--- a/videos/machine-learning/03_ridger_regression_gradient_descent/recreated_pptx/slide_045_recreated.pptx
+++ b/videos/machine-learning/03_ridger_regression_gradient_descent/recreated_pptx/slide_045_recreated.pptx
@@ -884,7 +884,7 @@
         <p:spPr>
           <a:xfrm>
             <a:off x="685800" y="571500"/>
-            <a:ext cx="10795000" cy="6286500"/>
+            <a:ext cx="10782300" cy="6286500"/>
           </a:xfrm>
           <a:prstGeom prst="rect">
             <a:avLst/>
@@ -903,19 +903,16 @@
         </p:nvSpPr>
         <p:spPr>
           <a:xfrm>
-            <a:off x="742950" y="584200"/>
-            <a:ext cx="0" cy="6261100"/>
-          </a:xfrm>
-          <a:prstGeom prst="line">
-            <a:avLst/>
-          </a:prstGeom>
-          <a:noFill/>
-          <a:ln w="12700">
-            <a:solidFill>
-              <a:srgbClr val="C00000"/>
-            </a:solidFill>
-            <a:prstDash val="solid"/>
-          </a:ln>
+            <a:off x="742950" y="571500"/>
+            <a:ext cx="12700" cy="6286500"/>
+          </a:xfrm>
+          <a:prstGeom prst="rect">
+            <a:avLst/>
+          </a:prstGeom>
+          <a:solidFill>
+            <a:srgbClr val="C00000"/>
+          </a:solidFill>
+          <a:ln/>
         </p:spPr>
       </p:sp>
       <p:sp>
@@ -926,19 +923,16 @@
         </p:nvSpPr>
         <p:spPr>
           <a:xfrm>
-            <a:off x="11442700" y="584200"/>
-            <a:ext cx="0" cy="6261100"/>
-          </a:xfrm>
-          <a:prstGeom prst="line">
-            <a:avLst/>
-          </a:prstGeom>
-          <a:noFill/>
-          <a:ln w="12700">
-            <a:solidFill>
-              <a:srgbClr val="C00000"/>
-            </a:solidFill>
-            <a:prstDash val="solid"/>
-          </a:ln>
+            <a:off x="11442700" y="571500"/>
+            <a:ext cx="12700" cy="6286500"/>
+          </a:xfrm>
+          <a:prstGeom prst="rect">
+            <a:avLst/>
+          </a:prstGeom>
+          <a:solidFill>
+            <a:srgbClr val="C00000"/>
+          </a:solidFill>
+          <a:ln/>
         </p:spPr>
       </p:sp>
       <p:sp>
@@ -949,19 +943,16 @@
         </p:nvSpPr>
         <p:spPr>
           <a:xfrm>
-            <a:off x="736600" y="6838950"/>
-            <a:ext cx="10718800" cy="0"/>
-          </a:xfrm>
-          <a:prstGeom prst="line">
-            <a:avLst/>
-          </a:prstGeom>
-          <a:noFill/>
-          <a:ln w="12700">
-            <a:solidFill>
-              <a:srgbClr val="C00000"/>
-            </a:solidFill>
-            <a:prstDash val="solid"/>
-          </a:ln>
+            <a:off x="685800" y="6838950"/>
+            <a:ext cx="10782300" cy="12700"/>
+          </a:xfrm>
+          <a:prstGeom prst="rect">
+            <a:avLst/>
+          </a:prstGeom>
+          <a:solidFill>
+            <a:srgbClr val="C00000"/>
+          </a:solidFill>
+          <a:ln/>
         </p:spPr>
       </p:sp>
       <p:sp>
@@ -981,7 +972,7 @@
           <a:solidFill>
             <a:srgbClr val="FDFD96"/>
           </a:solidFill>
-          <a:ln w="25400">
+          <a:ln w="12700">
             <a:solidFill>
               <a:srgbClr val="6A5ACD"/>
             </a:solidFill>
@@ -2252,7 +2243,7 @@
             <a:r>
               <a:rPr lang="en-US" sz="1300" b="1" dirty="0">
                 <a:solidFill>
-                  <a:srgbClr val="000000"/>
+                  <a:srgbClr val="D8262C"/>
                 </a:solidFill>
                 <a:latin typeface="Arial" pitchFamily="34" charset="0"/>
                 <a:ea typeface="Arial" pitchFamily="34" charset="-122"/>
@@ -2269,13 +2260,13 @@
             <a:r>
               <a:rPr lang="en-US" sz="950" b="1" baseline="-40000" dirty="0">
                 <a:solidFill>
-                  <a:srgbClr val="000000"/>
-                </a:solidFill>
-                <a:latin typeface="Arial" pitchFamily="34" charset="0"/>
-                <a:ea typeface="Arial" pitchFamily="34" charset="-122"/>
-                <a:cs typeface="Arial" pitchFamily="34" charset="-120"/>
-              </a:rPr>
-              <a:t>2</a:t>
+                  <a:srgbClr val="D8262C"/>
+                </a:solidFill>
+                <a:latin typeface="Arial" pitchFamily="34" charset="0"/>
+                <a:ea typeface="Arial" pitchFamily="34" charset="-122"/>
+                <a:cs typeface="Arial" pitchFamily="34" charset="-120"/>
+              </a:rPr>
+              <a:t>1</a:t>
             </a:r>
             <a:endParaRPr lang="en-US" sz="1300" dirty="0"/>
           </a:p>
@@ -2370,7 +2361,7 @@
             <a:r>
               <a:rPr lang="en-US" sz="1300" b="1" dirty="0">
                 <a:solidFill>
-                  <a:srgbClr val="000000"/>
+                  <a:srgbClr val="0000FF"/>
                 </a:solidFill>
                 <a:latin typeface="Arial" pitchFamily="34" charset="0"/>
                 <a:ea typeface="Arial" pitchFamily="34" charset="-122"/>
@@ -2387,7 +2378,7 @@
             <a:r>
               <a:rPr lang="en-US" sz="950" b="1" baseline="-40000" dirty="0">
                 <a:solidFill>
-                  <a:srgbClr val="000000"/>
+                  <a:srgbClr val="0000FF"/>
                 </a:solidFill>
                 <a:latin typeface="Arial" pitchFamily="34" charset="0"/>
                 <a:ea typeface="Arial" pitchFamily="34" charset="-122"/>
@@ -2429,7 +2420,7 @@
             <a:r>
               <a:rPr lang="en-US" sz="1300" b="1" dirty="0">
                 <a:solidFill>
-                  <a:srgbClr val="000000"/>
+                  <a:srgbClr val="0000FF"/>
                 </a:solidFill>
                 <a:latin typeface="Arial" pitchFamily="34" charset="0"/>
                 <a:ea typeface="Arial" pitchFamily="34" charset="-122"/>
@@ -2446,7 +2437,7 @@
             <a:r>
               <a:rPr lang="en-US" sz="950" b="1" baseline="-40000" dirty="0">
                 <a:solidFill>
-                  <a:srgbClr val="000000"/>
+                  <a:srgbClr val="0000FF"/>
                 </a:solidFill>
                 <a:latin typeface="Arial" pitchFamily="34" charset="0"/>
                 <a:ea typeface="Arial" pitchFamily="34" charset="-122"/>
@@ -2488,7 +2479,7 @@
             <a:r>
               <a:rPr lang="en-US" sz="1300" b="1" dirty="0">
                 <a:solidFill>
-                  <a:srgbClr val="000000"/>
+                  <a:srgbClr val="0000FF"/>
                 </a:solidFill>
                 <a:latin typeface="Arial" pitchFamily="34" charset="0"/>
                 <a:ea typeface="Arial" pitchFamily="34" charset="-122"/>
@@ -2505,7 +2496,7 @@
             <a:r>
               <a:rPr lang="en-US" sz="950" b="1" baseline="-40000" dirty="0">
                 <a:solidFill>
-                  <a:srgbClr val="000000"/>
+                  <a:srgbClr val="0000FF"/>
                 </a:solidFill>
                 <a:latin typeface="Arial" pitchFamily="34" charset="0"/>
                 <a:ea typeface="Arial" pitchFamily="34" charset="-122"/>
@@ -2711,7 +2702,7 @@
                 <a:ea typeface="Arial" pitchFamily="34" charset="-122"/>
                 <a:cs typeface="Arial" pitchFamily="34" charset="-120"/>
               </a:rPr>
-              <a:t>-2</a:t>
+              <a:t>−2</a:t>
             </a:r>
             <a:endParaRPr lang="en-US" sz="1300" dirty="0"/>
           </a:p>
@@ -2753,7 +2744,7 @@
                 <a:ea typeface="Arial" pitchFamily="34" charset="-122"/>
                 <a:cs typeface="Arial" pitchFamily="34" charset="-120"/>
               </a:rPr>
-              <a:t>-2</a:t>
+              <a:t>−2</a:t>
             </a:r>
             <a:endParaRPr lang="en-US" sz="1300" dirty="0"/>
           </a:p>
@@ -2787,7 +2778,7 @@
               <a:buNone/>
             </a:pPr>
             <a:r>
-              <a:rPr lang="en-US" sz="1400" dirty="0">
+              <a:rPr lang="en-US" sz="1400" b="1" i="1" dirty="0">
                 <a:solidFill>
                   <a:srgbClr val="D8262C"/>
                 </a:solidFill>
@@ -2804,7 +2795,7 @@
               <a:buNone/>
             </a:pPr>
             <a:r>
-              <a:rPr lang="en-US" sz="1400" dirty="0">
+              <a:rPr lang="en-US" sz="1400" b="1" i="1" dirty="0">
                 <a:solidFill>
                   <a:srgbClr val="D8262C"/>
                 </a:solidFill>
@@ -2821,7 +2812,7 @@
               <a:buNone/>
             </a:pPr>
             <a:r>
-              <a:rPr lang="en-US" sz="1400" dirty="0">
+              <a:rPr lang="en-US" sz="1400" b="1" i="1" dirty="0">
                 <a:solidFill>
                   <a:srgbClr val="D8262C"/>
                 </a:solidFill>
@@ -2844,7 +2835,7 @@
         <p:spPr>
           <a:xfrm>
             <a:off x="6337300" y="990600"/>
-            <a:ext cx="1206500" cy="152400"/>
+            <a:ext cx="1371600" cy="152400"/>
           </a:xfrm>
           <a:prstGeom prst="rect">
             <a:avLst/>
@@ -2858,12 +2849,12 @@
           <a:p>
             <a:pPr algn="l" indent="0" marL="0">
               <a:lnSpc>
-                <a:spcPts val="1500"/>
-              </a:lnSpc>
-              <a:buNone/>
-            </a:pPr>
-            <a:r>
-              <a:rPr lang="en-US" sz="1300" dirty="0">
+                <a:spcPts val="1400"/>
+              </a:lnSpc>
+              <a:buNone/>
+            </a:pPr>
+            <a:r>
+              <a:rPr lang="en-US" sz="1200" spc="-50" kern="0" dirty="0">
                 <a:solidFill>
                   <a:srgbClr val="000000"/>
                 </a:solidFill>
@@ -2873,7 +2864,7 @@
               </a:rPr>
               <a:t>Check classes of</a:t>
             </a:r>
-            <a:endParaRPr lang="en-US" sz="1300" dirty="0"/>
+            <a:endParaRPr lang="en-US" sz="1200" dirty="0"/>
           </a:p>
         </p:txBody>
       </p:sp>
@@ -3476,15 +3467,32 @@
               <a:buNone/>
             </a:pPr>
             <a:r>
-              <a:rPr lang="en-US" sz="1300" dirty="0">
-                <a:solidFill>
-                  <a:srgbClr val="000000"/>
-                </a:solidFill>
-                <a:latin typeface="Arial" pitchFamily="34" charset="0"/>
-                <a:ea typeface="Arial" pitchFamily="34" charset="-122"/>
-                <a:cs typeface="Arial" pitchFamily="34" charset="-120"/>
-              </a:rPr>
-              <a:t>Zero is unaccepted</a:t>
+              <a:rPr lang="en-US" sz="1300" b="1" dirty="0">
+                <a:solidFill>
+                  <a:srgbClr val="458A38"/>
+                </a:solidFill>
+                <a:latin typeface="Arial" pitchFamily="34" charset="0"/>
+                <a:ea typeface="Arial" pitchFamily="34" charset="-122"/>
+                <a:cs typeface="Arial" pitchFamily="34" charset="-120"/>
+              </a:rPr>
+              <a:t>Zero</a:t>
+            </a:r>
+            <a:pPr algn="l" indent="0" marL="0">
+              <a:lnSpc>
+                <a:spcPts val="1500"/>
+              </a:lnSpc>
+              <a:buNone/>
+            </a:pPr>
+            <a:r>
+              <a:rPr lang="en-US" sz="1300" dirty="0">
+                <a:solidFill>
+                  <a:srgbClr val="000000"/>
+                </a:solidFill>
+                <a:latin typeface="Arial" pitchFamily="34" charset="0"/>
+                <a:ea typeface="Arial" pitchFamily="34" charset="-122"/>
+                <a:cs typeface="Arial" pitchFamily="34" charset="-120"/>
+              </a:rPr>
+              <a:t> is unaccepted</a:t>
             </a:r>
             <a:endParaRPr lang="en-US" sz="1300" dirty="0"/>
           </a:p>
@@ -3509,7 +3517,7 @@
           </a:solidFill>
           <a:ln w="12700">
             <a:solidFill>
-              <a:srgbClr val="000000"/>
+              <a:srgbClr val="A6A6A6"/>
             </a:solidFill>
             <a:prstDash val="solid"/>
           </a:ln>
@@ -3547,11 +3555,11 @@
                 <a:solidFill>
                   <a:srgbClr val="0000FF"/>
                 </a:solidFill>
-                <a:latin typeface="Arial" pitchFamily="34" charset="0"/>
-                <a:ea typeface="Arial" pitchFamily="34" charset="-122"/>
-                <a:cs typeface="Arial" pitchFamily="34" charset="-120"/>
-              </a:rPr>
-              <a:t>Ugmented Vectors (from Top)</a:t>
+                <a:latin typeface="Times New Roman" pitchFamily="34" charset="0"/>
+                <a:ea typeface="Times New Roman" pitchFamily="34" charset="-122"/>
+                <a:cs typeface="Times New Roman" pitchFamily="34" charset="-120"/>
+              </a:rPr>
+              <a:t>Ugmented Vectors ( from Top )</a:t>
             </a:r>
             <a:endParaRPr lang="en-US" sz="1200" dirty="0"/>
           </a:p>
@@ -4654,7 +4662,7 @@
             <a:r>
               <a:rPr lang="en-US" sz="1200" b="1" dirty="0">
                 <a:solidFill>
-                  <a:srgbClr val="0000FF"/>
+                  <a:srgbClr val="D8262C"/>
                 </a:solidFill>
                 <a:latin typeface="Arial" pitchFamily="34" charset="0"/>
                 <a:ea typeface="Arial" pitchFamily="34" charset="-122"/>
@@ -4671,13 +4679,13 @@
             <a:r>
               <a:rPr lang="en-US" sz="900" b="1" baseline="-40000" dirty="0">
                 <a:solidFill>
-                  <a:srgbClr val="0000FF"/>
-                </a:solidFill>
-                <a:latin typeface="Arial" pitchFamily="34" charset="0"/>
-                <a:ea typeface="Arial" pitchFamily="34" charset="-122"/>
-                <a:cs typeface="Arial" pitchFamily="34" charset="-120"/>
-              </a:rPr>
-              <a:t>2</a:t>
+                  <a:srgbClr val="D8262C"/>
+                </a:solidFill>
+                <a:latin typeface="Arial" pitchFamily="34" charset="0"/>
+                <a:ea typeface="Arial" pitchFamily="34" charset="-122"/>
+                <a:cs typeface="Arial" pitchFamily="34" charset="-120"/>
+              </a:rPr>
+              <a:t>1</a:t>
             </a:r>
             <a:endParaRPr lang="en-US" sz="1200" dirty="0"/>
           </a:p>
@@ -4996,7 +5004,7 @@
             <a:avLst/>
           </a:prstGeom>
           <a:solidFill>
-            <a:srgbClr val="FFFFFF"/>
+            <a:srgbClr val="F8D7DA"/>
           </a:solidFill>
           <a:ln w="12700">
             <a:solidFill>
@@ -5014,8 +5022,8 @@
         </p:nvSpPr>
         <p:spPr>
           <a:xfrm>
-            <a:off x="977900" y="4432300"/>
-            <a:ext cx="762000" cy="228600"/>
+            <a:off x="939800" y="4368800"/>
+            <a:ext cx="2032000" cy="330200"/>
           </a:xfrm>
           <a:prstGeom prst="rect">
             <a:avLst/>
@@ -5029,12 +5037,12 @@
           <a:p>
             <a:pPr algn="l" indent="0" marL="0">
               <a:lnSpc>
-                <a:spcPts val="1500"/>
-              </a:lnSpc>
-              <a:buNone/>
-            </a:pPr>
-            <a:r>
-              <a:rPr lang="en-US" sz="1300" dirty="0">
+                <a:spcPts val="2100"/>
+              </a:lnSpc>
+              <a:buNone/>
+            </a:pPr>
+            <a:r>
+              <a:rPr lang="en-US" sz="1900" b="1" dirty="0">
                 <a:solidFill>
                   <a:srgbClr val="000000"/>
                 </a:solidFill>
@@ -5044,7 +5052,24 @@
               </a:rPr>
               <a:t>No change in </a:t>
             </a:r>
-            <a:endParaRPr lang="en-US" sz="1300" dirty="0"/>
+            <a:pPr algn="l" indent="0" marL="0">
+              <a:lnSpc>
+                <a:spcPts val="2100"/>
+              </a:lnSpc>
+              <a:buNone/>
+            </a:pPr>
+            <a:r>
+              <a:rPr lang="en-US" sz="1900" b="1" u="sng" dirty="0">
+                <a:solidFill>
+                  <a:srgbClr val="000000"/>
+                </a:solidFill>
+                <a:latin typeface="Arial" pitchFamily="34" charset="0"/>
+                <a:ea typeface="Arial" pitchFamily="34" charset="-122"/>
+                <a:cs typeface="Arial" pitchFamily="34" charset="-120"/>
+              </a:rPr>
+              <a:t>W</a:t>
+            </a:r>
+            <a:endParaRPr lang="en-US" sz="1900" dirty="0"/>
           </a:p>
         </p:txBody>
       </p:sp>
@@ -5056,8 +5081,8 @@
         </p:nvSpPr>
         <p:spPr>
           <a:xfrm>
-            <a:off x="1689100" y="4432300"/>
-            <a:ext cx="177800" cy="228600"/>
+            <a:off x="1079500" y="4724400"/>
+            <a:ext cx="1778000" cy="330200"/>
           </a:xfrm>
           <a:prstGeom prst="rect">
             <a:avLst/>
@@ -5071,54 +5096,12 @@
           <a:p>
             <a:pPr algn="l" indent="0" marL="0">
               <a:lnSpc>
-                <a:spcPts val="1500"/>
-              </a:lnSpc>
-              <a:buNone/>
-            </a:pPr>
-            <a:r>
-              <a:rPr lang="en-US" sz="1300" u="sng" dirty="0">
-                <a:solidFill>
-                  <a:srgbClr val="000000"/>
-                </a:solidFill>
-                <a:latin typeface="Arial" pitchFamily="34" charset="0"/>
-                <a:ea typeface="Arial" pitchFamily="34" charset="-122"/>
-                <a:cs typeface="Arial" pitchFamily="34" charset="-120"/>
-              </a:rPr>
-              <a:t>W</a:t>
-            </a:r>
-            <a:endParaRPr lang="en-US" sz="1300" dirty="0"/>
-          </a:p>
-        </p:txBody>
-      </p:sp>
-      <p:sp>
-        <p:nvSpPr>
-          <p:cNvPr id="96" name="Text 94"/>
-          <p:cNvSpPr/>
-          <p:nvPr/>
-        </p:nvSpPr>
-        <p:spPr>
-          <a:xfrm>
-            <a:off x="1079500" y="4749800"/>
-            <a:ext cx="1524000" cy="254000"/>
-          </a:xfrm>
-          <a:prstGeom prst="rect">
-            <a:avLst/>
-          </a:prstGeom>
-          <a:noFill/>
-          <a:ln/>
-        </p:spPr>
-        <p:txBody>
-          <a:bodyPr wrap="square" lIns="0" tIns="0" rIns="0" bIns="0" rtlCol="0" anchor="ctr"/>
-          <a:lstStyle/>
-          <a:p>
-            <a:pPr algn="l" indent="0" marL="0">
-              <a:lnSpc>
-                <a:spcPts val="1600"/>
-              </a:lnSpc>
-              <a:buNone/>
-            </a:pPr>
-            <a:r>
-              <a:rPr lang="en-US" sz="1400" i="1" dirty="0">
+                <a:spcPts val="2100"/>
+              </a:lnSpc>
+              <a:buNone/>
+            </a:pPr>
+            <a:r>
+              <a:rPr lang="en-US" sz="1900" b="1" i="1" dirty="0">
                 <a:solidFill>
                   <a:srgbClr val="FF0000"/>
                 </a:solidFill>
@@ -5128,13 +5111,13 @@
               </a:rPr>
               <a:t>Stop Iterations</a:t>
             </a:r>
-            <a:endParaRPr lang="en-US" sz="1400" dirty="0"/>
-          </a:p>
-        </p:txBody>
-      </p:sp>
-      <p:sp>
-        <p:nvSpPr>
-          <p:cNvPr id="97" name="Shape 95"/>
+            <a:endParaRPr lang="en-US" sz="1900" dirty="0"/>
+          </a:p>
+        </p:txBody>
+      </p:sp>
+      <p:sp>
+        <p:nvSpPr>
+          <p:cNvPr id="96" name="Shape 94"/>
           <p:cNvSpPr/>
           <p:nvPr/>
         </p:nvSpPr>
@@ -5159,7 +5142,7 @@
       </p:sp>
       <p:sp>
         <p:nvSpPr>
-          <p:cNvPr id="98" name="Shape 96"/>
+          <p:cNvPr id="97" name="Shape 95"/>
           <p:cNvSpPr/>
           <p:nvPr/>
         </p:nvSpPr>
@@ -5182,7 +5165,7 @@
       </p:sp>
       <p:sp>
         <p:nvSpPr>
-          <p:cNvPr id="99" name="Shape 97"/>
+          <p:cNvPr id="98" name="Shape 96"/>
           <p:cNvSpPr/>
           <p:nvPr/>
         </p:nvSpPr>
@@ -5205,7 +5188,7 @@
       </p:sp>
       <p:sp>
         <p:nvSpPr>
-          <p:cNvPr id="100" name="Shape 98"/>
+          <p:cNvPr id="99" name="Shape 97"/>
           <p:cNvSpPr/>
           <p:nvPr/>
         </p:nvSpPr>
@@ -5228,7 +5211,7 @@
       </p:sp>
       <p:sp>
         <p:nvSpPr>
-          <p:cNvPr id="101" name="Shape 99"/>
+          <p:cNvPr id="100" name="Shape 98"/>
           <p:cNvSpPr/>
           <p:nvPr/>
         </p:nvSpPr>
@@ -5251,7 +5234,7 @@
       </p:sp>
       <p:sp>
         <p:nvSpPr>
-          <p:cNvPr id="102" name="Shape 100"/>
+          <p:cNvPr id="101" name="Shape 99"/>
           <p:cNvSpPr/>
           <p:nvPr/>
         </p:nvSpPr>
@@ -5274,7 +5257,7 @@
       </p:sp>
       <p:sp>
         <p:nvSpPr>
-          <p:cNvPr id="103" name="Shape 101"/>
+          <p:cNvPr id="102" name="Shape 100"/>
           <p:cNvSpPr/>
           <p:nvPr/>
         </p:nvSpPr>
@@ -5297,7 +5280,7 @@
       </p:sp>
       <p:sp>
         <p:nvSpPr>
-          <p:cNvPr id="104" name="Shape 102"/>
+          <p:cNvPr id="103" name="Shape 101"/>
           <p:cNvSpPr/>
           <p:nvPr/>
         </p:nvSpPr>
@@ -5320,7 +5303,7 @@
       </p:sp>
       <p:sp>
         <p:nvSpPr>
-          <p:cNvPr id="105" name="Shape 103"/>
+          <p:cNvPr id="104" name="Shape 102"/>
           <p:cNvSpPr/>
           <p:nvPr/>
         </p:nvSpPr>
@@ -5343,7 +5326,7 @@
       </p:sp>
       <p:sp>
         <p:nvSpPr>
-          <p:cNvPr id="106" name="Shape 104"/>
+          <p:cNvPr id="105" name="Shape 103"/>
           <p:cNvSpPr/>
           <p:nvPr/>
         </p:nvSpPr>
@@ -5366,7 +5349,7 @@
       </p:sp>
       <p:sp>
         <p:nvSpPr>
-          <p:cNvPr id="107" name="Shape 105"/>
+          <p:cNvPr id="106" name="Shape 104"/>
           <p:cNvSpPr/>
           <p:nvPr/>
         </p:nvSpPr>
@@ -5389,7 +5372,7 @@
       </p:sp>
       <p:sp>
         <p:nvSpPr>
-          <p:cNvPr id="108" name="Shape 106"/>
+          <p:cNvPr id="107" name="Shape 105"/>
           <p:cNvSpPr/>
           <p:nvPr/>
         </p:nvSpPr>
@@ -5412,7 +5395,7 @@
       </p:sp>
       <p:sp>
         <p:nvSpPr>
-          <p:cNvPr id="109" name="Shape 107"/>
+          <p:cNvPr id="108" name="Shape 106"/>
           <p:cNvSpPr/>
           <p:nvPr/>
         </p:nvSpPr>
@@ -5435,14 +5418,124 @@
       </p:sp>
       <p:sp>
         <p:nvSpPr>
+          <p:cNvPr id="109" name="Text 107"/>
+          <p:cNvSpPr/>
+          <p:nvPr/>
+        </p:nvSpPr>
+        <p:spPr>
+          <a:xfrm>
+            <a:off x="3594100" y="2006600"/>
+            <a:ext cx="635000" cy="228600"/>
+          </a:xfrm>
+          <a:prstGeom prst="rect">
+            <a:avLst/>
+          </a:prstGeom>
+          <a:noFill/>
+          <a:ln/>
+        </p:spPr>
+        <p:txBody>
+          <a:bodyPr wrap="square" lIns="0" tIns="0" rIns="0" bIns="0" rtlCol="0" anchor="ctr"/>
+          <a:lstStyle/>
+          <a:p>
+            <a:pPr algn="l" indent="0" marL="0">
+              <a:lnSpc>
+                <a:spcPts val="1500"/>
+              </a:lnSpc>
+              <a:buNone/>
+            </a:pPr>
+            <a:r>
+              <a:rPr lang="en-US" sz="1300" dirty="0">
+                <a:solidFill>
+                  <a:srgbClr val="000000"/>
+                </a:solidFill>
+                <a:latin typeface="Arial" pitchFamily="34" charset="0"/>
+                <a:ea typeface="Arial" pitchFamily="34" charset="-122"/>
+                <a:cs typeface="Arial" pitchFamily="34" charset="-120"/>
+              </a:rPr>
+              <a:t>d(</a:t>
+            </a:r>
+            <a:pPr algn="l" indent="0" marL="0">
+              <a:lnSpc>
+                <a:spcPts val="1500"/>
+              </a:lnSpc>
+              <a:buNone/>
+            </a:pPr>
+            <a:r>
+              <a:rPr lang="en-US" sz="1300" dirty="0">
+                <a:solidFill>
+                  <a:srgbClr val="000000"/>
+                </a:solidFill>
+                <a:latin typeface="Arial" pitchFamily="34" charset="0"/>
+                <a:ea typeface="Arial" pitchFamily="34" charset="-122"/>
+                <a:cs typeface="Arial" pitchFamily="34" charset="-120"/>
+              </a:rPr>
+              <a:t>x</a:t>
+            </a:r>
+            <a:pPr algn="l" indent="0" marL="0">
+              <a:lnSpc>
+                <a:spcPts val="1500"/>
+              </a:lnSpc>
+              <a:buNone/>
+            </a:pPr>
+            <a:r>
+              <a:rPr lang="en-US" sz="950" baseline="-40000" dirty="0">
+                <a:solidFill>
+                  <a:srgbClr val="000000"/>
+                </a:solidFill>
+                <a:latin typeface="Arial" pitchFamily="34" charset="0"/>
+                <a:ea typeface="Arial" pitchFamily="34" charset="-122"/>
+                <a:cs typeface="Arial" pitchFamily="34" charset="-120"/>
+              </a:rPr>
+              <a:t>1</a:t>
+            </a:r>
+            <a:pPr algn="l" indent="0" marL="0">
+              <a:lnSpc>
+                <a:spcPts val="1500"/>
+              </a:lnSpc>
+              <a:buNone/>
+            </a:pPr>
+            <a:r>
+              <a:rPr lang="en-US" sz="1300" dirty="0">
+                <a:solidFill>
+                  <a:srgbClr val="000000"/>
+                </a:solidFill>
+                <a:latin typeface="Arial" pitchFamily="34" charset="0"/>
+                <a:ea typeface="Arial" pitchFamily="34" charset="-122"/>
+                <a:cs typeface="Arial" pitchFamily="34" charset="-120"/>
+              </a:rPr>
+              <a:t>)</a:t>
+            </a:r>
+            <a:pPr algn="l" indent="0" marL="0">
+              <a:lnSpc>
+                <a:spcPts val="1500"/>
+              </a:lnSpc>
+              <a:buNone/>
+            </a:pPr>
+            <a:r>
+              <a:rPr lang="en-US" sz="1300" dirty="0">
+                <a:solidFill>
+                  <a:srgbClr val="000000"/>
+                </a:solidFill>
+                <a:latin typeface="Arial" pitchFamily="34" charset="0"/>
+                <a:ea typeface="Arial" pitchFamily="34" charset="-122"/>
+                <a:cs typeface="Arial" pitchFamily="34" charset="-120"/>
+              </a:rPr>
+              <a:t> = </a:t>
+            </a:r>
+            <a:endParaRPr lang="en-US" sz="1300" dirty="0"/>
+          </a:p>
+        </p:txBody>
+      </p:sp>
+      <p:sp>
+        <p:nvSpPr>
           <p:cNvPr id="110" name="Text 108"/>
           <p:cNvSpPr/>
           <p:nvPr/>
         </p:nvSpPr>
         <p:spPr>
           <a:xfrm>
-            <a:off x="3594100" y="2006600"/>
-            <a:ext cx="1168400" cy="228600"/>
+            <a:off x="4241800" y="2006600"/>
+            <a:ext cx="558800" cy="228600"/>
           </a:xfrm>
           <a:prstGeom prst="rect">
             <a:avLst/>
@@ -5461,83 +5554,15 @@
               <a:buNone/>
             </a:pPr>
             <a:r>
-              <a:rPr lang="en-US" sz="1300" dirty="0">
-                <a:solidFill>
-                  <a:srgbClr val="000000"/>
-                </a:solidFill>
-                <a:latin typeface="Arial" pitchFamily="34" charset="0"/>
-                <a:ea typeface="Arial" pitchFamily="34" charset="-122"/>
-                <a:cs typeface="Arial" pitchFamily="34" charset="-120"/>
-              </a:rPr>
-              <a:t>d(</a:t>
-            </a:r>
-            <a:pPr algn="l" indent="0" marL="0">
-              <a:lnSpc>
-                <a:spcPts val="1500"/>
-              </a:lnSpc>
-              <a:buNone/>
-            </a:pPr>
-            <a:r>
-              <a:rPr lang="en-US" sz="1300" dirty="0">
-                <a:solidFill>
-                  <a:srgbClr val="000000"/>
-                </a:solidFill>
-                <a:latin typeface="Arial" pitchFamily="34" charset="0"/>
-                <a:ea typeface="Arial" pitchFamily="34" charset="-122"/>
-                <a:cs typeface="Arial" pitchFamily="34" charset="-120"/>
-              </a:rPr>
-              <a:t>x</a:t>
-            </a:r>
-            <a:pPr algn="l" indent="0" marL="0">
-              <a:lnSpc>
-                <a:spcPts val="1500"/>
-              </a:lnSpc>
-              <a:buNone/>
-            </a:pPr>
-            <a:r>
-              <a:rPr lang="en-US" sz="950" baseline="-40000" dirty="0">
-                <a:solidFill>
-                  <a:srgbClr val="000000"/>
-                </a:solidFill>
-                <a:latin typeface="Arial" pitchFamily="34" charset="0"/>
-                <a:ea typeface="Arial" pitchFamily="34" charset="-122"/>
-                <a:cs typeface="Arial" pitchFamily="34" charset="-120"/>
-              </a:rPr>
-              <a:t>1</a:t>
-            </a:r>
-            <a:pPr algn="l" indent="0" marL="0">
-              <a:lnSpc>
-                <a:spcPts val="1500"/>
-              </a:lnSpc>
-              <a:buNone/>
-            </a:pPr>
-            <a:r>
-              <a:rPr lang="en-US" sz="1300" dirty="0">
-                <a:solidFill>
-                  <a:srgbClr val="000000"/>
-                </a:solidFill>
-                <a:latin typeface="Arial" pitchFamily="34" charset="0"/>
-                <a:ea typeface="Arial" pitchFamily="34" charset="-122"/>
-                <a:cs typeface="Arial" pitchFamily="34" charset="-120"/>
-              </a:rPr>
-              <a:t>)</a:t>
-            </a:r>
-            <a:pPr algn="l" indent="0" marL="0">
-              <a:lnSpc>
-                <a:spcPts val="1500"/>
-              </a:lnSpc>
-              <a:buNone/>
-            </a:pPr>
-            <a:r>
-              <a:rPr lang="en-US" sz="1300" dirty="0">
-                <a:solidFill>
-                  <a:srgbClr val="000000"/>
-                </a:solidFill>
-                <a:latin typeface="Arial" pitchFamily="34" charset="0"/>
-                <a:ea typeface="Arial" pitchFamily="34" charset="-122"/>
-                <a:cs typeface="Arial" pitchFamily="34" charset="-120"/>
-              </a:rPr>
-              <a:t> = </a:t>
+              <a:rPr lang="en-US" sz="1300" spc="300" kern="0" dirty="0">
+                <a:solidFill>
+                  <a:srgbClr val="0000FF"/>
+                </a:solidFill>
+                <a:latin typeface="Arial" pitchFamily="34" charset="0"/>
+                <a:ea typeface="Arial" pitchFamily="34" charset="-122"/>
+                <a:cs typeface="Arial" pitchFamily="34" charset="-120"/>
+              </a:rPr>
+              <a:t>1 1 1</a:t>
             </a:r>
             <a:endParaRPr lang="en-US" sz="1300" dirty="0"/>
           </a:p>
@@ -5558,7 +5583,7 @@
             <a:avLst/>
           </a:prstGeom>
           <a:solidFill>
-            <a:srgbClr val="000000"/>
+            <a:srgbClr val="A6A6A6"/>
           </a:solidFill>
           <a:ln/>
         </p:spPr>
@@ -5578,7 +5603,7 @@
             <a:avLst/>
           </a:prstGeom>
           <a:solidFill>
-            <a:srgbClr val="000000"/>
+            <a:srgbClr val="A6A6A6"/>
           </a:solidFill>
           <a:ln/>
         </p:spPr>
@@ -5613,13 +5638,13 @@
             <a:r>
               <a:rPr lang="en-US" sz="1300" dirty="0">
                 <a:solidFill>
-                  <a:srgbClr val="000000"/>
-                </a:solidFill>
-                <a:latin typeface="Arial" pitchFamily="34" charset="0"/>
-                <a:ea typeface="Arial" pitchFamily="34" charset="-122"/>
-                <a:cs typeface="Arial" pitchFamily="34" charset="-120"/>
-              </a:rPr>
-              <a:t>1 1 1</a:t>
+                  <a:srgbClr val="008000"/>
+                </a:solidFill>
+                <a:latin typeface="Arial" pitchFamily="34" charset="0"/>
+                <a:ea typeface="Arial" pitchFamily="34" charset="-122"/>
+                <a:cs typeface="Arial" pitchFamily="34" charset="-120"/>
+              </a:rPr>
+              <a:t>14</a:t>
             </a:r>
             <a:endParaRPr lang="en-US" sz="1300" dirty="0"/>
           </a:p>
@@ -5655,13 +5680,13 @@
             <a:r>
               <a:rPr lang="en-US" sz="1300" dirty="0">
                 <a:solidFill>
-                  <a:srgbClr val="000000"/>
-                </a:solidFill>
-                <a:latin typeface="Arial" pitchFamily="34" charset="0"/>
-                <a:ea typeface="Arial" pitchFamily="34" charset="-122"/>
-                <a:cs typeface="Arial" pitchFamily="34" charset="-120"/>
-              </a:rPr>
-              <a:t>-4</a:t>
+                  <a:srgbClr val="008000"/>
+                </a:solidFill>
+                <a:latin typeface="Arial" pitchFamily="34" charset="0"/>
+                <a:ea typeface="Arial" pitchFamily="34" charset="-122"/>
+                <a:cs typeface="Arial" pitchFamily="34" charset="-120"/>
+              </a:rPr>
+              <a:t>−4</a:t>
             </a:r>
             <a:endParaRPr lang="en-US" sz="1300" dirty="0"/>
           </a:p>
@@ -5697,7 +5722,7 @@
             <a:r>
               <a:rPr lang="en-US" sz="1300" dirty="0">
                 <a:solidFill>
-                  <a:srgbClr val="000000"/>
+                  <a:srgbClr val="008000"/>
                 </a:solidFill>
                 <a:latin typeface="Arial" pitchFamily="34" charset="0"/>
                 <a:ea typeface="Arial" pitchFamily="34" charset="-122"/>
@@ -5943,7 +5968,7 @@
             <a:avLst/>
           </a:prstGeom>
           <a:solidFill>
-            <a:srgbClr val="000000"/>
+            <a:srgbClr val="A6A6A6"/>
           </a:solidFill>
           <a:ln/>
         </p:spPr>
@@ -5963,7 +5988,7 @@
             <a:avLst/>
           </a:prstGeom>
           <a:solidFill>
-            <a:srgbClr val="000000"/>
+            <a:srgbClr val="A6A6A6"/>
           </a:solidFill>
           <a:ln/>
         </p:spPr>
@@ -6046,7 +6071,7 @@
                 <a:ea typeface="Arial" pitchFamily="34" charset="-122"/>
                 <a:cs typeface="Arial" pitchFamily="34" charset="-120"/>
               </a:rPr>
-              <a:t>-4</a:t>
+              <a:t>−4</a:t>
             </a:r>
             <a:endParaRPr lang="en-US" sz="1300" dirty="0"/>
           </a:p>
@@ -6103,7 +6128,7 @@
         <p:spPr>
           <a:xfrm>
             <a:off x="3594100" y="2851150"/>
-            <a:ext cx="1168400" cy="228600"/>
+            <a:ext cx="635000" cy="228600"/>
           </a:xfrm>
           <a:prstGeom prst="rect">
             <a:avLst/>
@@ -6206,7 +6231,49 @@
       </p:sp>
       <p:sp>
         <p:nvSpPr>
-          <p:cNvPr id="126" name="Shape 124"/>
+          <p:cNvPr id="126" name="Text 124"/>
+          <p:cNvSpPr/>
+          <p:nvPr/>
+        </p:nvSpPr>
+        <p:spPr>
+          <a:xfrm>
+            <a:off x="4241800" y="2851150"/>
+            <a:ext cx="558800" cy="228600"/>
+          </a:xfrm>
+          <a:prstGeom prst="rect">
+            <a:avLst/>
+          </a:prstGeom>
+          <a:noFill/>
+          <a:ln/>
+        </p:spPr>
+        <p:txBody>
+          <a:bodyPr wrap="square" lIns="0" tIns="0" rIns="0" bIns="0" rtlCol="0" anchor="ctr"/>
+          <a:lstStyle/>
+          <a:p>
+            <a:pPr algn="l" indent="0" marL="0">
+              <a:lnSpc>
+                <a:spcPts val="1500"/>
+              </a:lnSpc>
+              <a:buNone/>
+            </a:pPr>
+            <a:r>
+              <a:rPr lang="en-US" sz="1300" spc="300" kern="0" dirty="0">
+                <a:solidFill>
+                  <a:srgbClr val="0000FF"/>
+                </a:solidFill>
+                <a:latin typeface="Arial" pitchFamily="34" charset="0"/>
+                <a:ea typeface="Arial" pitchFamily="34" charset="-122"/>
+                <a:cs typeface="Arial" pitchFamily="34" charset="-120"/>
+              </a:rPr>
+              <a:t>1 2 1</a:t>
+            </a:r>
+            <a:endParaRPr lang="en-US" sz="1300" dirty="0"/>
+          </a:p>
+        </p:txBody>
+      </p:sp>
+      <p:sp>
+        <p:nvSpPr>
+          <p:cNvPr id="127" name="Shape 125"/>
           <p:cNvSpPr/>
           <p:nvPr/>
         </p:nvSpPr>
@@ -6219,14 +6286,14 @@
             <a:avLst/>
           </a:prstGeom>
           <a:solidFill>
-            <a:srgbClr val="000000"/>
+            <a:srgbClr val="A6A6A6"/>
           </a:solidFill>
           <a:ln/>
         </p:spPr>
       </p:sp>
       <p:sp>
         <p:nvSpPr>
-          <p:cNvPr id="127" name="Shape 125"/>
+          <p:cNvPr id="128" name="Shape 126"/>
           <p:cNvSpPr/>
           <p:nvPr/>
         </p:nvSpPr>
@@ -6239,14 +6306,14 @@
             <a:avLst/>
           </a:prstGeom>
           <a:solidFill>
-            <a:srgbClr val="000000"/>
+            <a:srgbClr val="A6A6A6"/>
           </a:solidFill>
           <a:ln/>
         </p:spPr>
       </p:sp>
       <p:sp>
         <p:nvSpPr>
-          <p:cNvPr id="128" name="Text 126"/>
+          <p:cNvPr id="129" name="Text 127"/>
           <p:cNvSpPr/>
           <p:nvPr/>
         </p:nvSpPr>
@@ -6274,21 +6341,21 @@
             <a:r>
               <a:rPr lang="en-US" sz="1300" dirty="0">
                 <a:solidFill>
-                  <a:srgbClr val="000000"/>
-                </a:solidFill>
-                <a:latin typeface="Arial" pitchFamily="34" charset="0"/>
-                <a:ea typeface="Arial" pitchFamily="34" charset="-122"/>
-                <a:cs typeface="Arial" pitchFamily="34" charset="-120"/>
-              </a:rPr>
-              <a:t>1 1 2</a:t>
-            </a:r>
-            <a:endParaRPr lang="en-US" sz="1300" dirty="0"/>
-          </a:p>
-        </p:txBody>
-      </p:sp>
-      <p:sp>
-        <p:nvSpPr>
-          <p:cNvPr id="129" name="Text 127"/>
+                  <a:srgbClr val="008000"/>
+                </a:solidFill>
+                <a:latin typeface="Arial" pitchFamily="34" charset="0"/>
+                <a:ea typeface="Arial" pitchFamily="34" charset="-122"/>
+                <a:cs typeface="Arial" pitchFamily="34" charset="-120"/>
+              </a:rPr>
+              <a:t>14</a:t>
+            </a:r>
+            <a:endParaRPr lang="en-US" sz="1300" dirty="0"/>
+          </a:p>
+        </p:txBody>
+      </p:sp>
+      <p:sp>
+        <p:nvSpPr>
+          <p:cNvPr id="130" name="Text 128"/>
           <p:cNvSpPr/>
           <p:nvPr/>
         </p:nvSpPr>
@@ -6316,21 +6383,21 @@
             <a:r>
               <a:rPr lang="en-US" sz="1300" dirty="0">
                 <a:solidFill>
-                  <a:srgbClr val="000000"/>
-                </a:solidFill>
-                <a:latin typeface="Arial" pitchFamily="34" charset="0"/>
-                <a:ea typeface="Arial" pitchFamily="34" charset="-122"/>
-                <a:cs typeface="Arial" pitchFamily="34" charset="-120"/>
-              </a:rPr>
-              <a:t>-4</a:t>
-            </a:r>
-            <a:endParaRPr lang="en-US" sz="1300" dirty="0"/>
-          </a:p>
-        </p:txBody>
-      </p:sp>
-      <p:sp>
-        <p:nvSpPr>
-          <p:cNvPr id="130" name="Text 128"/>
+                  <a:srgbClr val="008000"/>
+                </a:solidFill>
+                <a:latin typeface="Arial" pitchFamily="34" charset="0"/>
+                <a:ea typeface="Arial" pitchFamily="34" charset="-122"/>
+                <a:cs typeface="Arial" pitchFamily="34" charset="-120"/>
+              </a:rPr>
+              <a:t>−4</a:t>
+            </a:r>
+            <a:endParaRPr lang="en-US" sz="1300" dirty="0"/>
+          </a:p>
+        </p:txBody>
+      </p:sp>
+      <p:sp>
+        <p:nvSpPr>
+          <p:cNvPr id="131" name="Text 129"/>
           <p:cNvSpPr/>
           <p:nvPr/>
         </p:nvSpPr>
@@ -6358,7 +6425,7 @@
             <a:r>
               <a:rPr lang="en-US" sz="1300" dirty="0">
                 <a:solidFill>
-                  <a:srgbClr val="000000"/>
+                  <a:srgbClr val="008000"/>
                 </a:solidFill>
                 <a:latin typeface="Arial" pitchFamily="34" charset="0"/>
                 <a:ea typeface="Arial" pitchFamily="34" charset="-122"/>
@@ -6372,7 +6439,7 @@
       </p:sp>
       <p:sp>
         <p:nvSpPr>
-          <p:cNvPr id="131" name="Text 129"/>
+          <p:cNvPr id="132" name="Text 130"/>
           <p:cNvSpPr/>
           <p:nvPr/>
         </p:nvSpPr>
@@ -6406,15 +6473,15 @@
                 <a:ea typeface="Arial" pitchFamily="34" charset="-122"/>
                 <a:cs typeface="Arial" pitchFamily="34" charset="-120"/>
               </a:rPr>
-              <a:t>= -4</a:t>
-            </a:r>
-            <a:endParaRPr lang="en-US" sz="1300" dirty="0"/>
-          </a:p>
-        </p:txBody>
-      </p:sp>
-      <p:sp>
-        <p:nvSpPr>
-          <p:cNvPr id="132" name="Text 130"/>
+              <a:t>= 6</a:t>
+            </a:r>
+            <a:endParaRPr lang="en-US" sz="1300" dirty="0"/>
+          </a:p>
+        </p:txBody>
+      </p:sp>
+      <p:sp>
+        <p:nvSpPr>
+          <p:cNvPr id="133" name="Text 131"/>
           <p:cNvSpPr/>
           <p:nvPr/>
         </p:nvSpPr>
@@ -6456,7 +6523,7 @@
       </p:sp>
       <p:sp>
         <p:nvSpPr>
-          <p:cNvPr id="133" name="Text 131"/>
+          <p:cNvPr id="134" name="Text 132"/>
           <p:cNvSpPr/>
           <p:nvPr/>
         </p:nvSpPr>
@@ -6532,7 +6599,7 @@
       </p:sp>
       <p:sp>
         <p:nvSpPr>
-          <p:cNvPr id="134" name="Text 132"/>
+          <p:cNvPr id="135" name="Text 133"/>
           <p:cNvSpPr/>
           <p:nvPr/>
         </p:nvSpPr>
@@ -6591,7 +6658,7 @@
       </p:sp>
       <p:sp>
         <p:nvSpPr>
-          <p:cNvPr id="135" name="Shape 133"/>
+          <p:cNvPr id="136" name="Shape 134"/>
           <p:cNvSpPr/>
           <p:nvPr/>
         </p:nvSpPr>
@@ -6604,14 +6671,14 @@
             <a:avLst/>
           </a:prstGeom>
           <a:solidFill>
-            <a:srgbClr val="000000"/>
+            <a:srgbClr val="A6A6A6"/>
           </a:solidFill>
           <a:ln/>
         </p:spPr>
       </p:sp>
       <p:sp>
         <p:nvSpPr>
-          <p:cNvPr id="136" name="Shape 134"/>
+          <p:cNvPr id="137" name="Shape 135"/>
           <p:cNvSpPr/>
           <p:nvPr/>
         </p:nvSpPr>
@@ -6624,14 +6691,14 @@
             <a:avLst/>
           </a:prstGeom>
           <a:solidFill>
-            <a:srgbClr val="000000"/>
+            <a:srgbClr val="A6A6A6"/>
           </a:solidFill>
           <a:ln/>
         </p:spPr>
       </p:sp>
       <p:sp>
         <p:nvSpPr>
-          <p:cNvPr id="137" name="Text 135"/>
+          <p:cNvPr id="138" name="Text 136"/>
           <p:cNvSpPr/>
           <p:nvPr/>
         </p:nvSpPr>
@@ -6673,7 +6740,7 @@
       </p:sp>
       <p:sp>
         <p:nvSpPr>
-          <p:cNvPr id="138" name="Text 136"/>
+          <p:cNvPr id="139" name="Text 137"/>
           <p:cNvSpPr/>
           <p:nvPr/>
         </p:nvSpPr>
@@ -6707,15 +6774,15 @@
                 <a:ea typeface="Arial" pitchFamily="34" charset="-122"/>
                 <a:cs typeface="Arial" pitchFamily="34" charset="-120"/>
               </a:rPr>
-              <a:t>-4</a:t>
-            </a:r>
-            <a:endParaRPr lang="en-US" sz="1300" dirty="0"/>
-          </a:p>
-        </p:txBody>
-      </p:sp>
-      <p:sp>
-        <p:nvSpPr>
-          <p:cNvPr id="139" name="Text 137"/>
+              <a:t>−4</a:t>
+            </a:r>
+            <a:endParaRPr lang="en-US" sz="1300" dirty="0"/>
+          </a:p>
+        </p:txBody>
+      </p:sp>
+      <p:sp>
+        <p:nvSpPr>
+          <p:cNvPr id="140" name="Text 138"/>
           <p:cNvSpPr/>
           <p:nvPr/>
         </p:nvSpPr>
@@ -6757,14 +6824,14 @@
       </p:sp>
       <p:sp>
         <p:nvSpPr>
-          <p:cNvPr id="140" name="Text 138"/>
+          <p:cNvPr id="141" name="Text 139"/>
           <p:cNvSpPr/>
           <p:nvPr/>
         </p:nvSpPr>
         <p:spPr>
           <a:xfrm>
             <a:off x="3594100" y="3689350"/>
-            <a:ext cx="1168400" cy="228600"/>
+            <a:ext cx="635000" cy="228600"/>
           </a:xfrm>
           <a:prstGeom prst="rect">
             <a:avLst/>
@@ -6867,7 +6934,49 @@
       </p:sp>
       <p:sp>
         <p:nvSpPr>
-          <p:cNvPr id="141" name="Shape 139"/>
+          <p:cNvPr id="142" name="Text 140"/>
+          <p:cNvSpPr/>
+          <p:nvPr/>
+        </p:nvSpPr>
+        <p:spPr>
+          <a:xfrm>
+            <a:off x="4241800" y="3689350"/>
+            <a:ext cx="558800" cy="228600"/>
+          </a:xfrm>
+          <a:prstGeom prst="rect">
+            <a:avLst/>
+          </a:prstGeom>
+          <a:noFill/>
+          <a:ln/>
+        </p:spPr>
+        <p:txBody>
+          <a:bodyPr wrap="square" lIns="0" tIns="0" rIns="0" bIns="0" rtlCol="0" anchor="ctr"/>
+          <a:lstStyle/>
+          <a:p>
+            <a:pPr algn="l" indent="0" marL="0">
+              <a:lnSpc>
+                <a:spcPts val="1500"/>
+              </a:lnSpc>
+              <a:buNone/>
+            </a:pPr>
+            <a:r>
+              <a:rPr lang="en-US" sz="1300" spc="300" kern="0" dirty="0">
+                <a:solidFill>
+                  <a:srgbClr val="0000FF"/>
+                </a:solidFill>
+                <a:latin typeface="Arial" pitchFamily="34" charset="0"/>
+                <a:ea typeface="Arial" pitchFamily="34" charset="-122"/>
+                <a:cs typeface="Arial" pitchFamily="34" charset="-120"/>
+              </a:rPr>
+              <a:t>1 1 2</a:t>
+            </a:r>
+            <a:endParaRPr lang="en-US" sz="1300" dirty="0"/>
+          </a:p>
+        </p:txBody>
+      </p:sp>
+      <p:sp>
+        <p:nvSpPr>
+          <p:cNvPr id="143" name="Shape 141"/>
           <p:cNvSpPr/>
           <p:nvPr/>
         </p:nvSpPr>
@@ -6880,14 +6989,14 @@
             <a:avLst/>
           </a:prstGeom>
           <a:solidFill>
-            <a:srgbClr val="000000"/>
+            <a:srgbClr val="A6A6A6"/>
           </a:solidFill>
           <a:ln/>
         </p:spPr>
       </p:sp>
       <p:sp>
         <p:nvSpPr>
-          <p:cNvPr id="142" name="Shape 140"/>
+          <p:cNvPr id="144" name="Shape 142"/>
           <p:cNvSpPr/>
           <p:nvPr/>
         </p:nvSpPr>
@@ -6900,14 +7009,14 @@
             <a:avLst/>
           </a:prstGeom>
           <a:solidFill>
-            <a:srgbClr val="000000"/>
+            <a:srgbClr val="A6A6A6"/>
           </a:solidFill>
           <a:ln/>
         </p:spPr>
       </p:sp>
       <p:sp>
         <p:nvSpPr>
-          <p:cNvPr id="143" name="Text 141"/>
+          <p:cNvPr id="145" name="Text 143"/>
           <p:cNvSpPr/>
           <p:nvPr/>
         </p:nvSpPr>
@@ -6935,21 +7044,21 @@
             <a:r>
               <a:rPr lang="en-US" sz="1300" dirty="0">
                 <a:solidFill>
-                  <a:srgbClr val="000000"/>
-                </a:solidFill>
-                <a:latin typeface="Arial" pitchFamily="34" charset="0"/>
-                <a:ea typeface="Arial" pitchFamily="34" charset="-122"/>
-                <a:cs typeface="Arial" pitchFamily="34" charset="-120"/>
-              </a:rPr>
-              <a:t>1 1 2</a:t>
-            </a:r>
-            <a:endParaRPr lang="en-US" sz="1300" dirty="0"/>
-          </a:p>
-        </p:txBody>
-      </p:sp>
-      <p:sp>
-        <p:nvSpPr>
-          <p:cNvPr id="144" name="Text 142"/>
+                  <a:srgbClr val="008000"/>
+                </a:solidFill>
+                <a:latin typeface="Arial" pitchFamily="34" charset="0"/>
+                <a:ea typeface="Arial" pitchFamily="34" charset="-122"/>
+                <a:cs typeface="Arial" pitchFamily="34" charset="-120"/>
+              </a:rPr>
+              <a:t>14</a:t>
+            </a:r>
+            <a:endParaRPr lang="en-US" sz="1300" dirty="0"/>
+          </a:p>
+        </p:txBody>
+      </p:sp>
+      <p:sp>
+        <p:nvSpPr>
+          <p:cNvPr id="146" name="Text 144"/>
           <p:cNvSpPr/>
           <p:nvPr/>
         </p:nvSpPr>
@@ -6977,21 +7086,21 @@
             <a:r>
               <a:rPr lang="en-US" sz="1300" dirty="0">
                 <a:solidFill>
-                  <a:srgbClr val="000000"/>
-                </a:solidFill>
-                <a:latin typeface="Arial" pitchFamily="34" charset="0"/>
-                <a:ea typeface="Arial" pitchFamily="34" charset="-122"/>
-                <a:cs typeface="Arial" pitchFamily="34" charset="-120"/>
-              </a:rPr>
-              <a:t>-4</a:t>
-            </a:r>
-            <a:endParaRPr lang="en-US" sz="1300" dirty="0"/>
-          </a:p>
-        </p:txBody>
-      </p:sp>
-      <p:sp>
-        <p:nvSpPr>
-          <p:cNvPr id="145" name="Text 143"/>
+                  <a:srgbClr val="008000"/>
+                </a:solidFill>
+                <a:latin typeface="Arial" pitchFamily="34" charset="0"/>
+                <a:ea typeface="Arial" pitchFamily="34" charset="-122"/>
+                <a:cs typeface="Arial" pitchFamily="34" charset="-120"/>
+              </a:rPr>
+              <a:t>−4</a:t>
+            </a:r>
+            <a:endParaRPr lang="en-US" sz="1300" dirty="0"/>
+          </a:p>
+        </p:txBody>
+      </p:sp>
+      <p:sp>
+        <p:nvSpPr>
+          <p:cNvPr id="147" name="Text 145"/>
           <p:cNvSpPr/>
           <p:nvPr/>
         </p:nvSpPr>
@@ -7019,7 +7128,7 @@
             <a:r>
               <a:rPr lang="en-US" sz="1300" dirty="0">
                 <a:solidFill>
-                  <a:srgbClr val="000000"/>
+                  <a:srgbClr val="008000"/>
                 </a:solidFill>
                 <a:latin typeface="Arial" pitchFamily="34" charset="0"/>
                 <a:ea typeface="Arial" pitchFamily="34" charset="-122"/>
@@ -7033,7 +7142,7 @@
       </p:sp>
       <p:sp>
         <p:nvSpPr>
-          <p:cNvPr id="146" name="Text 144"/>
+          <p:cNvPr id="148" name="Text 146"/>
           <p:cNvSpPr/>
           <p:nvPr/>
         </p:nvSpPr>
@@ -7075,7 +7184,7 @@
       </p:sp>
       <p:sp>
         <p:nvSpPr>
-          <p:cNvPr id="147" name="Text 145"/>
+          <p:cNvPr id="149" name="Text 147"/>
           <p:cNvSpPr/>
           <p:nvPr/>
         </p:nvSpPr>
@@ -7117,7 +7226,7 @@
       </p:sp>
       <p:sp>
         <p:nvSpPr>
-          <p:cNvPr id="148" name="Text 146"/>
+          <p:cNvPr id="150" name="Text 148"/>
           <p:cNvSpPr/>
           <p:nvPr/>
         </p:nvSpPr>
@@ -7193,7 +7302,7 @@
       </p:sp>
       <p:sp>
         <p:nvSpPr>
-          <p:cNvPr id="149" name="Text 147"/>
+          <p:cNvPr id="151" name="Text 149"/>
           <p:cNvSpPr/>
           <p:nvPr/>
         </p:nvSpPr>
@@ -7252,7 +7361,7 @@
       </p:sp>
       <p:sp>
         <p:nvSpPr>
-          <p:cNvPr id="150" name="Shape 148"/>
+          <p:cNvPr id="152" name="Shape 150"/>
           <p:cNvSpPr/>
           <p:nvPr/>
         </p:nvSpPr>
@@ -7265,14 +7374,14 @@
             <a:avLst/>
           </a:prstGeom>
           <a:solidFill>
-            <a:srgbClr val="000000"/>
+            <a:srgbClr val="A6A6A6"/>
           </a:solidFill>
           <a:ln/>
         </p:spPr>
       </p:sp>
       <p:sp>
         <p:nvSpPr>
-          <p:cNvPr id="151" name="Shape 149"/>
+          <p:cNvPr id="153" name="Shape 151"/>
           <p:cNvSpPr/>
           <p:nvPr/>
         </p:nvSpPr>
@@ -7285,14 +7394,14 @@
             <a:avLst/>
           </a:prstGeom>
           <a:solidFill>
-            <a:srgbClr val="000000"/>
+            <a:srgbClr val="A6A6A6"/>
           </a:solidFill>
           <a:ln/>
         </p:spPr>
       </p:sp>
       <p:sp>
         <p:nvSpPr>
-          <p:cNvPr id="152" name="Text 150"/>
+          <p:cNvPr id="154" name="Text 152"/>
           <p:cNvSpPr/>
           <p:nvPr/>
         </p:nvSpPr>
@@ -7334,7 +7443,7 @@
       </p:sp>
       <p:sp>
         <p:nvSpPr>
-          <p:cNvPr id="153" name="Text 151"/>
+          <p:cNvPr id="155" name="Text 153"/>
           <p:cNvSpPr/>
           <p:nvPr/>
         </p:nvSpPr>
@@ -7368,15 +7477,15 @@
                 <a:ea typeface="Arial" pitchFamily="34" charset="-122"/>
                 <a:cs typeface="Arial" pitchFamily="34" charset="-120"/>
               </a:rPr>
-              <a:t>-4</a:t>
-            </a:r>
-            <a:endParaRPr lang="en-US" sz="1300" dirty="0"/>
-          </a:p>
-        </p:txBody>
-      </p:sp>
-      <p:sp>
-        <p:nvSpPr>
-          <p:cNvPr id="154" name="Text 152"/>
+              <a:t>−4</a:t>
+            </a:r>
+            <a:endParaRPr lang="en-US" sz="1300" dirty="0"/>
+          </a:p>
+        </p:txBody>
+      </p:sp>
+      <p:sp>
+        <p:nvSpPr>
+          <p:cNvPr id="156" name="Text 154"/>
           <p:cNvSpPr/>
           <p:nvPr/>
         </p:nvSpPr>
@@ -7418,14 +7527,14 @@
       </p:sp>
       <p:sp>
         <p:nvSpPr>
-          <p:cNvPr id="155" name="Text 153"/>
+          <p:cNvPr id="157" name="Text 155"/>
           <p:cNvSpPr/>
           <p:nvPr/>
         </p:nvSpPr>
         <p:spPr>
           <a:xfrm>
             <a:off x="3594100" y="4565650"/>
-            <a:ext cx="1168400" cy="228600"/>
+            <a:ext cx="635000" cy="228600"/>
           </a:xfrm>
           <a:prstGeom prst="rect">
             <a:avLst/>
@@ -7528,7 +7637,49 @@
       </p:sp>
       <p:sp>
         <p:nvSpPr>
-          <p:cNvPr id="156" name="Shape 154"/>
+          <p:cNvPr id="158" name="Text 156"/>
+          <p:cNvSpPr/>
+          <p:nvPr/>
+        </p:nvSpPr>
+        <p:spPr>
+          <a:xfrm>
+            <a:off x="4241800" y="4565650"/>
+            <a:ext cx="558800" cy="228600"/>
+          </a:xfrm>
+          <a:prstGeom prst="rect">
+            <a:avLst/>
+          </a:prstGeom>
+          <a:noFill/>
+          <a:ln/>
+        </p:spPr>
+        <p:txBody>
+          <a:bodyPr wrap="square" lIns="0" tIns="0" rIns="0" bIns="0" rtlCol="0" anchor="ctr"/>
+          <a:lstStyle/>
+          <a:p>
+            <a:pPr algn="l" indent="0" marL="0">
+              <a:lnSpc>
+                <a:spcPts val="1500"/>
+              </a:lnSpc>
+              <a:buNone/>
+            </a:pPr>
+            <a:r>
+              <a:rPr lang="en-US" sz="1300" spc="300" kern="0" dirty="0">
+                <a:solidFill>
+                  <a:srgbClr val="0000FF"/>
+                </a:solidFill>
+                <a:latin typeface="Arial" pitchFamily="34" charset="0"/>
+                <a:ea typeface="Arial" pitchFamily="34" charset="-122"/>
+                <a:cs typeface="Arial" pitchFamily="34" charset="-120"/>
+              </a:rPr>
+              <a:t>1 5 4</a:t>
+            </a:r>
+            <a:endParaRPr lang="en-US" sz="1300" dirty="0"/>
+          </a:p>
+        </p:txBody>
+      </p:sp>
+      <p:sp>
+        <p:nvSpPr>
+          <p:cNvPr id="159" name="Shape 157"/>
           <p:cNvSpPr/>
           <p:nvPr/>
         </p:nvSpPr>
@@ -7541,14 +7692,14 @@
             <a:avLst/>
           </a:prstGeom>
           <a:solidFill>
-            <a:srgbClr val="000000"/>
+            <a:srgbClr val="A6A6A6"/>
           </a:solidFill>
           <a:ln/>
         </p:spPr>
       </p:sp>
       <p:sp>
         <p:nvSpPr>
-          <p:cNvPr id="157" name="Shape 155"/>
+          <p:cNvPr id="160" name="Shape 158"/>
           <p:cNvSpPr/>
           <p:nvPr/>
         </p:nvSpPr>
@@ -7561,14 +7712,14 @@
             <a:avLst/>
           </a:prstGeom>
           <a:solidFill>
-            <a:srgbClr val="000000"/>
+            <a:srgbClr val="A6A6A6"/>
           </a:solidFill>
           <a:ln/>
         </p:spPr>
       </p:sp>
       <p:sp>
         <p:nvSpPr>
-          <p:cNvPr id="158" name="Text 156"/>
+          <p:cNvPr id="161" name="Text 159"/>
           <p:cNvSpPr/>
           <p:nvPr/>
         </p:nvSpPr>
@@ -7596,21 +7747,21 @@
             <a:r>
               <a:rPr lang="en-US" sz="1300" dirty="0">
                 <a:solidFill>
-                  <a:srgbClr val="000000"/>
-                </a:solidFill>
-                <a:latin typeface="Arial" pitchFamily="34" charset="0"/>
-                <a:ea typeface="Arial" pitchFamily="34" charset="-122"/>
-                <a:cs typeface="Arial" pitchFamily="34" charset="-120"/>
-              </a:rPr>
-              <a:t>1 5 4</a:t>
-            </a:r>
-            <a:endParaRPr lang="en-US" sz="1300" dirty="0"/>
-          </a:p>
-        </p:txBody>
-      </p:sp>
-      <p:sp>
-        <p:nvSpPr>
-          <p:cNvPr id="159" name="Text 157"/>
+                  <a:srgbClr val="008000"/>
+                </a:solidFill>
+                <a:latin typeface="Arial" pitchFamily="34" charset="0"/>
+                <a:ea typeface="Arial" pitchFamily="34" charset="-122"/>
+                <a:cs typeface="Arial" pitchFamily="34" charset="-120"/>
+              </a:rPr>
+              <a:t>14</a:t>
+            </a:r>
+            <a:endParaRPr lang="en-US" sz="1300" dirty="0"/>
+          </a:p>
+        </p:txBody>
+      </p:sp>
+      <p:sp>
+        <p:nvSpPr>
+          <p:cNvPr id="162" name="Text 160"/>
           <p:cNvSpPr/>
           <p:nvPr/>
         </p:nvSpPr>
@@ -7638,21 +7789,21 @@
             <a:r>
               <a:rPr lang="en-US" sz="1300" dirty="0">
                 <a:solidFill>
-                  <a:srgbClr val="000000"/>
-                </a:solidFill>
-                <a:latin typeface="Arial" pitchFamily="34" charset="0"/>
-                <a:ea typeface="Arial" pitchFamily="34" charset="-122"/>
-                <a:cs typeface="Arial" pitchFamily="34" charset="-120"/>
-              </a:rPr>
-              <a:t>-4</a:t>
-            </a:r>
-            <a:endParaRPr lang="en-US" sz="1300" dirty="0"/>
-          </a:p>
-        </p:txBody>
-      </p:sp>
-      <p:sp>
-        <p:nvSpPr>
-          <p:cNvPr id="160" name="Text 158"/>
+                  <a:srgbClr val="008000"/>
+                </a:solidFill>
+                <a:latin typeface="Arial" pitchFamily="34" charset="0"/>
+                <a:ea typeface="Arial" pitchFamily="34" charset="-122"/>
+                <a:cs typeface="Arial" pitchFamily="34" charset="-120"/>
+              </a:rPr>
+              <a:t>−4</a:t>
+            </a:r>
+            <a:endParaRPr lang="en-US" sz="1300" dirty="0"/>
+          </a:p>
+        </p:txBody>
+      </p:sp>
+      <p:sp>
+        <p:nvSpPr>
+          <p:cNvPr id="163" name="Text 161"/>
           <p:cNvSpPr/>
           <p:nvPr/>
         </p:nvSpPr>
@@ -7680,7 +7831,7 @@
             <a:r>
               <a:rPr lang="en-US" sz="1300" dirty="0">
                 <a:solidFill>
-                  <a:srgbClr val="000000"/>
+                  <a:srgbClr val="008000"/>
                 </a:solidFill>
                 <a:latin typeface="Arial" pitchFamily="34" charset="0"/>
                 <a:ea typeface="Arial" pitchFamily="34" charset="-122"/>
@@ -7694,7 +7845,7 @@
       </p:sp>
       <p:sp>
         <p:nvSpPr>
-          <p:cNvPr id="161" name="Text 159"/>
+          <p:cNvPr id="164" name="Text 162"/>
           <p:cNvSpPr/>
           <p:nvPr/>
         </p:nvSpPr>
@@ -7728,15 +7879,15 @@
                 <a:ea typeface="Arial" pitchFamily="34" charset="-122"/>
                 <a:cs typeface="Arial" pitchFamily="34" charset="-120"/>
               </a:rPr>
-              <a:t>= -6</a:t>
-            </a:r>
-            <a:endParaRPr lang="en-US" sz="1300" dirty="0"/>
-          </a:p>
-        </p:txBody>
-      </p:sp>
-      <p:sp>
-        <p:nvSpPr>
-          <p:cNvPr id="162" name="Text 160"/>
+              <a:t>= −6</a:t>
+            </a:r>
+            <a:endParaRPr lang="en-US" sz="1300" dirty="0"/>
+          </a:p>
+        </p:txBody>
+      </p:sp>
+      <p:sp>
+        <p:nvSpPr>
+          <p:cNvPr id="165" name="Text 163"/>
           <p:cNvSpPr/>
           <p:nvPr/>
         </p:nvSpPr>
@@ -7778,7 +7929,7 @@
       </p:sp>
       <p:sp>
         <p:nvSpPr>
-          <p:cNvPr id="163" name="Text 161"/>
+          <p:cNvPr id="166" name="Text 164"/>
           <p:cNvSpPr/>
           <p:nvPr/>
         </p:nvSpPr>
@@ -7854,7 +8005,7 @@
       </p:sp>
       <p:sp>
         <p:nvSpPr>
-          <p:cNvPr id="164" name="Text 162"/>
+          <p:cNvPr id="167" name="Text 165"/>
           <p:cNvSpPr/>
           <p:nvPr/>
         </p:nvSpPr>
@@ -7913,7 +8064,7 @@
       </p:sp>
       <p:sp>
         <p:nvSpPr>
-          <p:cNvPr id="165" name="Shape 163"/>
+          <p:cNvPr id="168" name="Shape 166"/>
           <p:cNvSpPr/>
           <p:nvPr/>
         </p:nvSpPr>
@@ -7926,14 +8077,14 @@
             <a:avLst/>
           </a:prstGeom>
           <a:solidFill>
-            <a:srgbClr val="000000"/>
+            <a:srgbClr val="A6A6A6"/>
           </a:solidFill>
           <a:ln/>
         </p:spPr>
       </p:sp>
       <p:sp>
         <p:nvSpPr>
-          <p:cNvPr id="166" name="Shape 164"/>
+          <p:cNvPr id="169" name="Shape 167"/>
           <p:cNvSpPr/>
           <p:nvPr/>
         </p:nvSpPr>
@@ -7946,14 +8097,14 @@
             <a:avLst/>
           </a:prstGeom>
           <a:solidFill>
-            <a:srgbClr val="000000"/>
+            <a:srgbClr val="A6A6A6"/>
           </a:solidFill>
           <a:ln/>
         </p:spPr>
       </p:sp>
       <p:sp>
         <p:nvSpPr>
-          <p:cNvPr id="167" name="Text 165"/>
+          <p:cNvPr id="170" name="Text 168"/>
           <p:cNvSpPr/>
           <p:nvPr/>
         </p:nvSpPr>
@@ -7995,7 +8146,7 @@
       </p:sp>
       <p:sp>
         <p:nvSpPr>
-          <p:cNvPr id="168" name="Text 166"/>
+          <p:cNvPr id="171" name="Text 169"/>
           <p:cNvSpPr/>
           <p:nvPr/>
         </p:nvSpPr>
@@ -8029,15 +8180,15 @@
                 <a:ea typeface="Arial" pitchFamily="34" charset="-122"/>
                 <a:cs typeface="Arial" pitchFamily="34" charset="-120"/>
               </a:rPr>
-              <a:t>-4</a:t>
-            </a:r>
-            <a:endParaRPr lang="en-US" sz="1300" dirty="0"/>
-          </a:p>
-        </p:txBody>
-      </p:sp>
-      <p:sp>
-        <p:nvSpPr>
-          <p:cNvPr id="169" name="Text 167"/>
+              <a:t>−4</a:t>
+            </a:r>
+            <a:endParaRPr lang="en-US" sz="1300" dirty="0"/>
+          </a:p>
+        </p:txBody>
+      </p:sp>
+      <p:sp>
+        <p:nvSpPr>
+          <p:cNvPr id="172" name="Text 170"/>
           <p:cNvSpPr/>
           <p:nvPr/>
         </p:nvSpPr>
@@ -8079,14 +8230,14 @@
       </p:sp>
       <p:sp>
         <p:nvSpPr>
-          <p:cNvPr id="170" name="Text 168"/>
+          <p:cNvPr id="173" name="Text 171"/>
           <p:cNvSpPr/>
           <p:nvPr/>
         </p:nvSpPr>
         <p:spPr>
           <a:xfrm>
             <a:off x="3594100" y="5365750"/>
-            <a:ext cx="1168400" cy="228600"/>
+            <a:ext cx="635000" cy="228600"/>
           </a:xfrm>
           <a:prstGeom prst="rect">
             <a:avLst/>
@@ -8189,7 +8340,49 @@
       </p:sp>
       <p:sp>
         <p:nvSpPr>
-          <p:cNvPr id="171" name="Shape 169"/>
+          <p:cNvPr id="174" name="Text 172"/>
+          <p:cNvSpPr/>
+          <p:nvPr/>
+        </p:nvSpPr>
+        <p:spPr>
+          <a:xfrm>
+            <a:off x="4241800" y="5365750"/>
+            <a:ext cx="558800" cy="228600"/>
+          </a:xfrm>
+          <a:prstGeom prst="rect">
+            <a:avLst/>
+          </a:prstGeom>
+          <a:noFill/>
+          <a:ln/>
+        </p:spPr>
+        <p:txBody>
+          <a:bodyPr wrap="square" lIns="0" tIns="0" rIns="0" bIns="0" rtlCol="0" anchor="ctr"/>
+          <a:lstStyle/>
+          <a:p>
+            <a:pPr algn="l" indent="0" marL="0">
+              <a:lnSpc>
+                <a:spcPts val="1500"/>
+              </a:lnSpc>
+              <a:buNone/>
+            </a:pPr>
+            <a:r>
+              <a:rPr lang="en-US" sz="1300" spc="300" kern="0" dirty="0">
+                <a:solidFill>
+                  <a:srgbClr val="0000FF"/>
+                </a:solidFill>
+                <a:latin typeface="Arial" pitchFamily="34" charset="0"/>
+                <a:ea typeface="Arial" pitchFamily="34" charset="-122"/>
+                <a:cs typeface="Arial" pitchFamily="34" charset="-120"/>
+              </a:rPr>
+              <a:t>1 6 5</a:t>
+            </a:r>
+            <a:endParaRPr lang="en-US" sz="1300" dirty="0"/>
+          </a:p>
+        </p:txBody>
+      </p:sp>
+      <p:sp>
+        <p:nvSpPr>
+          <p:cNvPr id="175" name="Shape 173"/>
           <p:cNvSpPr/>
           <p:nvPr/>
         </p:nvSpPr>
@@ -8202,14 +8395,14 @@
             <a:avLst/>
           </a:prstGeom>
           <a:solidFill>
-            <a:srgbClr val="000000"/>
+            <a:srgbClr val="A6A6A6"/>
           </a:solidFill>
           <a:ln/>
         </p:spPr>
       </p:sp>
       <p:sp>
         <p:nvSpPr>
-          <p:cNvPr id="172" name="Shape 170"/>
+          <p:cNvPr id="176" name="Shape 174"/>
           <p:cNvSpPr/>
           <p:nvPr/>
         </p:nvSpPr>
@@ -8222,14 +8415,14 @@
             <a:avLst/>
           </a:prstGeom>
           <a:solidFill>
-            <a:srgbClr val="000000"/>
+            <a:srgbClr val="A6A6A6"/>
           </a:solidFill>
           <a:ln/>
         </p:spPr>
       </p:sp>
       <p:sp>
         <p:nvSpPr>
-          <p:cNvPr id="173" name="Text 171"/>
+          <p:cNvPr id="177" name="Text 175"/>
           <p:cNvSpPr/>
           <p:nvPr/>
         </p:nvSpPr>
@@ -8257,21 +8450,21 @@
             <a:r>
               <a:rPr lang="en-US" sz="1300" dirty="0">
                 <a:solidFill>
-                  <a:srgbClr val="000000"/>
-                </a:solidFill>
-                <a:latin typeface="Arial" pitchFamily="34" charset="0"/>
-                <a:ea typeface="Arial" pitchFamily="34" charset="-122"/>
-                <a:cs typeface="Arial" pitchFamily="34" charset="-120"/>
-              </a:rPr>
-              <a:t>1 6 5</a:t>
-            </a:r>
-            <a:endParaRPr lang="en-US" sz="1300" dirty="0"/>
-          </a:p>
-        </p:txBody>
-      </p:sp>
-      <p:sp>
-        <p:nvSpPr>
-          <p:cNvPr id="174" name="Text 172"/>
+                  <a:srgbClr val="008000"/>
+                </a:solidFill>
+                <a:latin typeface="Arial" pitchFamily="34" charset="0"/>
+                <a:ea typeface="Arial" pitchFamily="34" charset="-122"/>
+                <a:cs typeface="Arial" pitchFamily="34" charset="-120"/>
+              </a:rPr>
+              <a:t>14</a:t>
+            </a:r>
+            <a:endParaRPr lang="en-US" sz="1300" dirty="0"/>
+          </a:p>
+        </p:txBody>
+      </p:sp>
+      <p:sp>
+        <p:nvSpPr>
+          <p:cNvPr id="178" name="Text 176"/>
           <p:cNvSpPr/>
           <p:nvPr/>
         </p:nvSpPr>
@@ -8299,21 +8492,21 @@
             <a:r>
               <a:rPr lang="en-US" sz="1300" dirty="0">
                 <a:solidFill>
-                  <a:srgbClr val="000000"/>
-                </a:solidFill>
-                <a:latin typeface="Arial" pitchFamily="34" charset="0"/>
-                <a:ea typeface="Arial" pitchFamily="34" charset="-122"/>
-                <a:cs typeface="Arial" pitchFamily="34" charset="-120"/>
-              </a:rPr>
-              <a:t>-4</a:t>
-            </a:r>
-            <a:endParaRPr lang="en-US" sz="1300" dirty="0"/>
-          </a:p>
-        </p:txBody>
-      </p:sp>
-      <p:sp>
-        <p:nvSpPr>
-          <p:cNvPr id="175" name="Text 173"/>
+                  <a:srgbClr val="008000"/>
+                </a:solidFill>
+                <a:latin typeface="Arial" pitchFamily="34" charset="0"/>
+                <a:ea typeface="Arial" pitchFamily="34" charset="-122"/>
+                <a:cs typeface="Arial" pitchFamily="34" charset="-120"/>
+              </a:rPr>
+              <a:t>−4</a:t>
+            </a:r>
+            <a:endParaRPr lang="en-US" sz="1300" dirty="0"/>
+          </a:p>
+        </p:txBody>
+      </p:sp>
+      <p:sp>
+        <p:nvSpPr>
+          <p:cNvPr id="179" name="Text 177"/>
           <p:cNvSpPr/>
           <p:nvPr/>
         </p:nvSpPr>
@@ -8341,7 +8534,7 @@
             <a:r>
               <a:rPr lang="en-US" sz="1300" dirty="0">
                 <a:solidFill>
-                  <a:srgbClr val="000000"/>
+                  <a:srgbClr val="008000"/>
                 </a:solidFill>
                 <a:latin typeface="Arial" pitchFamily="34" charset="0"/>
                 <a:ea typeface="Arial" pitchFamily="34" charset="-122"/>
@@ -8355,7 +8548,7 @@
       </p:sp>
       <p:sp>
         <p:nvSpPr>
-          <p:cNvPr id="176" name="Text 174"/>
+          <p:cNvPr id="180" name="Text 178"/>
           <p:cNvSpPr/>
           <p:nvPr/>
         </p:nvSpPr>
@@ -8389,15 +8582,15 @@
                 <a:ea typeface="Arial" pitchFamily="34" charset="-122"/>
                 <a:cs typeface="Arial" pitchFamily="34" charset="-120"/>
               </a:rPr>
-              <a:t>= -10</a:t>
-            </a:r>
-            <a:endParaRPr lang="en-US" sz="1300" dirty="0"/>
-          </a:p>
-        </p:txBody>
-      </p:sp>
-      <p:sp>
-        <p:nvSpPr>
-          <p:cNvPr id="177" name="Text 175"/>
+              <a:t>= −10</a:t>
+            </a:r>
+            <a:endParaRPr lang="en-US" sz="1300" dirty="0"/>
+          </a:p>
+        </p:txBody>
+      </p:sp>
+      <p:sp>
+        <p:nvSpPr>
+          <p:cNvPr id="181" name="Text 179"/>
           <p:cNvSpPr/>
           <p:nvPr/>
         </p:nvSpPr>
@@ -8439,7 +8632,7 @@
       </p:sp>
       <p:sp>
         <p:nvSpPr>
-          <p:cNvPr id="178" name="Text 176"/>
+          <p:cNvPr id="182" name="Text 180"/>
           <p:cNvSpPr/>
           <p:nvPr/>
         </p:nvSpPr>
@@ -8515,7 +8708,7 @@
       </p:sp>
       <p:sp>
         <p:nvSpPr>
-          <p:cNvPr id="179" name="Text 177"/>
+          <p:cNvPr id="183" name="Text 181"/>
           <p:cNvSpPr/>
           <p:nvPr/>
         </p:nvSpPr>
@@ -8574,7 +8767,7 @@
       </p:sp>
       <p:sp>
         <p:nvSpPr>
-          <p:cNvPr id="180" name="Shape 178"/>
+          <p:cNvPr id="184" name="Shape 182"/>
           <p:cNvSpPr/>
           <p:nvPr/>
         </p:nvSpPr>
@@ -8587,14 +8780,14 @@
             <a:avLst/>
           </a:prstGeom>
           <a:solidFill>
-            <a:srgbClr val="000000"/>
+            <a:srgbClr val="A6A6A6"/>
           </a:solidFill>
           <a:ln/>
         </p:spPr>
       </p:sp>
       <p:sp>
         <p:nvSpPr>
-          <p:cNvPr id="181" name="Shape 179"/>
+          <p:cNvPr id="185" name="Shape 183"/>
           <p:cNvSpPr/>
           <p:nvPr/>
         </p:nvSpPr>
@@ -8607,14 +8800,14 @@
             <a:avLst/>
           </a:prstGeom>
           <a:solidFill>
-            <a:srgbClr val="000000"/>
+            <a:srgbClr val="A6A6A6"/>
           </a:solidFill>
           <a:ln/>
         </p:spPr>
       </p:sp>
       <p:sp>
         <p:nvSpPr>
-          <p:cNvPr id="182" name="Text 180"/>
+          <p:cNvPr id="186" name="Text 184"/>
           <p:cNvSpPr/>
           <p:nvPr/>
         </p:nvSpPr>
@@ -8656,7 +8849,7 @@
       </p:sp>
       <p:sp>
         <p:nvSpPr>
-          <p:cNvPr id="183" name="Text 181"/>
+          <p:cNvPr id="187" name="Text 185"/>
           <p:cNvSpPr/>
           <p:nvPr/>
         </p:nvSpPr>
@@ -8690,15 +8883,15 @@
                 <a:ea typeface="Arial" pitchFamily="34" charset="-122"/>
                 <a:cs typeface="Arial" pitchFamily="34" charset="-120"/>
               </a:rPr>
-              <a:t>-4</a:t>
-            </a:r>
-            <a:endParaRPr lang="en-US" sz="1300" dirty="0"/>
-          </a:p>
-        </p:txBody>
-      </p:sp>
-      <p:sp>
-        <p:nvSpPr>
-          <p:cNvPr id="184" name="Text 182"/>
+              <a:t>−4</a:t>
+            </a:r>
+            <a:endParaRPr lang="en-US" sz="1300" dirty="0"/>
+          </a:p>
+        </p:txBody>
+      </p:sp>
+      <p:sp>
+        <p:nvSpPr>
+          <p:cNvPr id="188" name="Text 186"/>
           <p:cNvSpPr/>
           <p:nvPr/>
         </p:nvSpPr>
@@ -8740,14 +8933,14 @@
       </p:sp>
       <p:sp>
         <p:nvSpPr>
-          <p:cNvPr id="185" name="Text 183"/>
+          <p:cNvPr id="189" name="Text 187"/>
           <p:cNvSpPr/>
           <p:nvPr/>
         </p:nvSpPr>
         <p:spPr>
           <a:xfrm>
             <a:off x="3594100" y="6203950"/>
-            <a:ext cx="1168400" cy="228600"/>
+            <a:ext cx="635000" cy="228600"/>
           </a:xfrm>
           <a:prstGeom prst="rect">
             <a:avLst/>
@@ -8850,7 +9043,49 @@
       </p:sp>
       <p:sp>
         <p:nvSpPr>
-          <p:cNvPr id="186" name="Shape 184"/>
+          <p:cNvPr id="190" name="Text 188"/>
+          <p:cNvSpPr/>
+          <p:nvPr/>
+        </p:nvSpPr>
+        <p:spPr>
+          <a:xfrm>
+            <a:off x="4241800" y="6203950"/>
+            <a:ext cx="558800" cy="228600"/>
+          </a:xfrm>
+          <a:prstGeom prst="rect">
+            <a:avLst/>
+          </a:prstGeom>
+          <a:noFill/>
+          <a:ln/>
+        </p:spPr>
+        <p:txBody>
+          <a:bodyPr wrap="square" lIns="0" tIns="0" rIns="0" bIns="0" rtlCol="0" anchor="ctr"/>
+          <a:lstStyle/>
+          <a:p>
+            <a:pPr algn="l" indent="0" marL="0">
+              <a:lnSpc>
+                <a:spcPts val="1500"/>
+              </a:lnSpc>
+              <a:buNone/>
+            </a:pPr>
+            <a:r>
+              <a:rPr lang="en-US" sz="1300" spc="300" kern="0" dirty="0">
+                <a:solidFill>
+                  <a:srgbClr val="0000FF"/>
+                </a:solidFill>
+                <a:latin typeface="Arial" pitchFamily="34" charset="0"/>
+                <a:ea typeface="Arial" pitchFamily="34" charset="-122"/>
+                <a:cs typeface="Arial" pitchFamily="34" charset="-120"/>
+              </a:rPr>
+              <a:t>1 6 6</a:t>
+            </a:r>
+            <a:endParaRPr lang="en-US" sz="1300" dirty="0"/>
+          </a:p>
+        </p:txBody>
+      </p:sp>
+      <p:sp>
+        <p:nvSpPr>
+          <p:cNvPr id="191" name="Shape 189"/>
           <p:cNvSpPr/>
           <p:nvPr/>
         </p:nvSpPr>
@@ -8863,14 +9098,14 @@
             <a:avLst/>
           </a:prstGeom>
           <a:solidFill>
-            <a:srgbClr val="000000"/>
+            <a:srgbClr val="A6A6A6"/>
           </a:solidFill>
           <a:ln/>
         </p:spPr>
       </p:sp>
       <p:sp>
         <p:nvSpPr>
-          <p:cNvPr id="187" name="Shape 185"/>
+          <p:cNvPr id="192" name="Shape 190"/>
           <p:cNvSpPr/>
           <p:nvPr/>
         </p:nvSpPr>
@@ -8883,14 +9118,14 @@
             <a:avLst/>
           </a:prstGeom>
           <a:solidFill>
-            <a:srgbClr val="000000"/>
+            <a:srgbClr val="A6A6A6"/>
           </a:solidFill>
           <a:ln/>
         </p:spPr>
       </p:sp>
       <p:sp>
         <p:nvSpPr>
-          <p:cNvPr id="188" name="Text 186"/>
+          <p:cNvPr id="193" name="Text 191"/>
           <p:cNvSpPr/>
           <p:nvPr/>
         </p:nvSpPr>
@@ -8918,21 +9153,21 @@
             <a:r>
               <a:rPr lang="en-US" sz="1300" dirty="0">
                 <a:solidFill>
-                  <a:srgbClr val="000000"/>
-                </a:solidFill>
-                <a:latin typeface="Arial" pitchFamily="34" charset="0"/>
-                <a:ea typeface="Arial" pitchFamily="34" charset="-122"/>
-                <a:cs typeface="Arial" pitchFamily="34" charset="-120"/>
-              </a:rPr>
-              <a:t>1 6 6</a:t>
-            </a:r>
-            <a:endParaRPr lang="en-US" sz="1300" dirty="0"/>
-          </a:p>
-        </p:txBody>
-      </p:sp>
-      <p:sp>
-        <p:nvSpPr>
-          <p:cNvPr id="189" name="Text 187"/>
+                  <a:srgbClr val="008000"/>
+                </a:solidFill>
+                <a:latin typeface="Arial" pitchFamily="34" charset="0"/>
+                <a:ea typeface="Arial" pitchFamily="34" charset="-122"/>
+                <a:cs typeface="Arial" pitchFamily="34" charset="-120"/>
+              </a:rPr>
+              <a:t>14</a:t>
+            </a:r>
+            <a:endParaRPr lang="en-US" sz="1300" dirty="0"/>
+          </a:p>
+        </p:txBody>
+      </p:sp>
+      <p:sp>
+        <p:nvSpPr>
+          <p:cNvPr id="194" name="Text 192"/>
           <p:cNvSpPr/>
           <p:nvPr/>
         </p:nvSpPr>
@@ -8960,21 +9195,21 @@
             <a:r>
               <a:rPr lang="en-US" sz="1300" dirty="0">
                 <a:solidFill>
-                  <a:srgbClr val="000000"/>
-                </a:solidFill>
-                <a:latin typeface="Arial" pitchFamily="34" charset="0"/>
-                <a:ea typeface="Arial" pitchFamily="34" charset="-122"/>
-                <a:cs typeface="Arial" pitchFamily="34" charset="-120"/>
-              </a:rPr>
-              <a:t>-4</a:t>
-            </a:r>
-            <a:endParaRPr lang="en-US" sz="1300" dirty="0"/>
-          </a:p>
-        </p:txBody>
-      </p:sp>
-      <p:sp>
-        <p:nvSpPr>
-          <p:cNvPr id="190" name="Text 188"/>
+                  <a:srgbClr val="008000"/>
+                </a:solidFill>
+                <a:latin typeface="Arial" pitchFamily="34" charset="0"/>
+                <a:ea typeface="Arial" pitchFamily="34" charset="-122"/>
+                <a:cs typeface="Arial" pitchFamily="34" charset="-120"/>
+              </a:rPr>
+              <a:t>−4</a:t>
+            </a:r>
+            <a:endParaRPr lang="en-US" sz="1300" dirty="0"/>
+          </a:p>
+        </p:txBody>
+      </p:sp>
+      <p:sp>
+        <p:nvSpPr>
+          <p:cNvPr id="195" name="Text 193"/>
           <p:cNvSpPr/>
           <p:nvPr/>
         </p:nvSpPr>
@@ -9002,7 +9237,7 @@
             <a:r>
               <a:rPr lang="en-US" sz="1300" dirty="0">
                 <a:solidFill>
-                  <a:srgbClr val="000000"/>
+                  <a:srgbClr val="008000"/>
                 </a:solidFill>
                 <a:latin typeface="Arial" pitchFamily="34" charset="0"/>
                 <a:ea typeface="Arial" pitchFamily="34" charset="-122"/>
@@ -9016,7 +9251,7 @@
       </p:sp>
       <p:sp>
         <p:nvSpPr>
-          <p:cNvPr id="191" name="Text 189"/>
+          <p:cNvPr id="196" name="Text 194"/>
           <p:cNvSpPr/>
           <p:nvPr/>
         </p:nvSpPr>
@@ -9050,15 +9285,15 @@
                 <a:ea typeface="Arial" pitchFamily="34" charset="-122"/>
                 <a:cs typeface="Arial" pitchFamily="34" charset="-120"/>
               </a:rPr>
-              <a:t>= -112</a:t>
-            </a:r>
-            <a:endParaRPr lang="en-US" sz="1300" dirty="0"/>
-          </a:p>
-        </p:txBody>
-      </p:sp>
-      <p:sp>
-        <p:nvSpPr>
-          <p:cNvPr id="192" name="Text 190"/>
+              <a:t>= −112</a:t>
+            </a:r>
+            <a:endParaRPr lang="en-US" sz="1300" dirty="0"/>
+          </a:p>
+        </p:txBody>
+      </p:sp>
+      <p:sp>
+        <p:nvSpPr>
+          <p:cNvPr id="197" name="Text 195"/>
           <p:cNvSpPr/>
           <p:nvPr/>
         </p:nvSpPr>
@@ -9100,7 +9335,7 @@
       </p:sp>
       <p:sp>
         <p:nvSpPr>
-          <p:cNvPr id="193" name="Text 191"/>
+          <p:cNvPr id="198" name="Text 196"/>
           <p:cNvSpPr/>
           <p:nvPr/>
         </p:nvSpPr>
@@ -9176,7 +9411,7 @@
       </p:sp>
       <p:sp>
         <p:nvSpPr>
-          <p:cNvPr id="194" name="Text 192"/>
+          <p:cNvPr id="199" name="Text 197"/>
           <p:cNvSpPr/>
           <p:nvPr/>
         </p:nvSpPr>
@@ -9235,7 +9470,7 @@
       </p:sp>
       <p:sp>
         <p:nvSpPr>
-          <p:cNvPr id="195" name="Shape 193"/>
+          <p:cNvPr id="200" name="Shape 198"/>
           <p:cNvSpPr/>
           <p:nvPr/>
         </p:nvSpPr>
@@ -9248,14 +9483,14 @@
             <a:avLst/>
           </a:prstGeom>
           <a:solidFill>
-            <a:srgbClr val="000000"/>
+            <a:srgbClr val="A6A6A6"/>
           </a:solidFill>
           <a:ln/>
         </p:spPr>
       </p:sp>
       <p:sp>
         <p:nvSpPr>
-          <p:cNvPr id="196" name="Shape 194"/>
+          <p:cNvPr id="201" name="Shape 199"/>
           <p:cNvSpPr/>
           <p:nvPr/>
         </p:nvSpPr>
@@ -9268,14 +9503,14 @@
             <a:avLst/>
           </a:prstGeom>
           <a:solidFill>
-            <a:srgbClr val="000000"/>
+            <a:srgbClr val="A6A6A6"/>
           </a:solidFill>
           <a:ln/>
         </p:spPr>
       </p:sp>
       <p:sp>
         <p:nvSpPr>
-          <p:cNvPr id="197" name="Text 195"/>
+          <p:cNvPr id="202" name="Text 200"/>
           <p:cNvSpPr/>
           <p:nvPr/>
         </p:nvSpPr>
@@ -9317,7 +9552,7 @@
       </p:sp>
       <p:sp>
         <p:nvSpPr>
-          <p:cNvPr id="198" name="Text 196"/>
+          <p:cNvPr id="203" name="Text 201"/>
           <p:cNvSpPr/>
           <p:nvPr/>
         </p:nvSpPr>
@@ -9351,15 +9586,15 @@
                 <a:ea typeface="Arial" pitchFamily="34" charset="-122"/>
                 <a:cs typeface="Arial" pitchFamily="34" charset="-120"/>
               </a:rPr>
-              <a:t>-4</a:t>
-            </a:r>
-            <a:endParaRPr lang="en-US" sz="1300" dirty="0"/>
-          </a:p>
-        </p:txBody>
-      </p:sp>
-      <p:sp>
-        <p:nvSpPr>
-          <p:cNvPr id="199" name="Text 197"/>
+              <a:t>−4</a:t>
+            </a:r>
+            <a:endParaRPr lang="en-US" sz="1300" dirty="0"/>
+          </a:p>
+        </p:txBody>
+      </p:sp>
+      <p:sp>
+        <p:nvSpPr>
+          <p:cNvPr id="204" name="Text 202"/>
           <p:cNvSpPr/>
           <p:nvPr/>
         </p:nvSpPr>

--- a/videos/machine-learning/03_ridger_regression_gradient_descent/recreated_pptx/slide_045_recreated.pptx
+++ b/videos/machine-learning/03_ridger_regression_gradient_descent/recreated_pptx/slide_045_recreated.pptx
@@ -884,7 +884,7 @@
         <p:spPr>
           <a:xfrm>
             <a:off x="685800" y="571500"/>
-            <a:ext cx="10782300" cy="6286500"/>
+            <a:ext cx="10795000" cy="6286500"/>
           </a:xfrm>
           <a:prstGeom prst="rect">
             <a:avLst/>
@@ -903,16 +903,19 @@
         </p:nvSpPr>
         <p:spPr>
           <a:xfrm>
-            <a:off x="742950" y="571500"/>
-            <a:ext cx="12700" cy="6286500"/>
-          </a:xfrm>
-          <a:prstGeom prst="rect">
-            <a:avLst/>
-          </a:prstGeom>
-          <a:solidFill>
-            <a:srgbClr val="C00000"/>
-          </a:solidFill>
-          <a:ln/>
+            <a:off x="742950" y="584200"/>
+            <a:ext cx="0" cy="6261100"/>
+          </a:xfrm>
+          <a:prstGeom prst="line">
+            <a:avLst/>
+          </a:prstGeom>
+          <a:noFill/>
+          <a:ln w="12700">
+            <a:solidFill>
+              <a:srgbClr val="C00000"/>
+            </a:solidFill>
+            <a:prstDash val="solid"/>
+          </a:ln>
         </p:spPr>
       </p:sp>
       <p:sp>
@@ -923,16 +926,19 @@
         </p:nvSpPr>
         <p:spPr>
           <a:xfrm>
-            <a:off x="11442700" y="571500"/>
-            <a:ext cx="12700" cy="6286500"/>
-          </a:xfrm>
-          <a:prstGeom prst="rect">
-            <a:avLst/>
-          </a:prstGeom>
-          <a:solidFill>
-            <a:srgbClr val="C00000"/>
-          </a:solidFill>
-          <a:ln/>
+            <a:off x="11442700" y="584200"/>
+            <a:ext cx="0" cy="6261100"/>
+          </a:xfrm>
+          <a:prstGeom prst="line">
+            <a:avLst/>
+          </a:prstGeom>
+          <a:noFill/>
+          <a:ln w="12700">
+            <a:solidFill>
+              <a:srgbClr val="C00000"/>
+            </a:solidFill>
+            <a:prstDash val="solid"/>
+          </a:ln>
         </p:spPr>
       </p:sp>
       <p:sp>
@@ -943,16 +949,19 @@
         </p:nvSpPr>
         <p:spPr>
           <a:xfrm>
-            <a:off x="685800" y="6838950"/>
-            <a:ext cx="10782300" cy="12700"/>
-          </a:xfrm>
-          <a:prstGeom prst="rect">
-            <a:avLst/>
-          </a:prstGeom>
-          <a:solidFill>
-            <a:srgbClr val="C00000"/>
-          </a:solidFill>
-          <a:ln/>
+            <a:off x="736600" y="6838950"/>
+            <a:ext cx="10718800" cy="0"/>
+          </a:xfrm>
+          <a:prstGeom prst="line">
+            <a:avLst/>
+          </a:prstGeom>
+          <a:noFill/>
+          <a:ln w="12700">
+            <a:solidFill>
+              <a:srgbClr val="C00000"/>
+            </a:solidFill>
+            <a:prstDash val="solid"/>
+          </a:ln>
         </p:spPr>
       </p:sp>
       <p:sp>
@@ -972,7 +981,7 @@
           <a:solidFill>
             <a:srgbClr val="FDFD96"/>
           </a:solidFill>
-          <a:ln w="12700">
+          <a:ln w="25400">
             <a:solidFill>
               <a:srgbClr val="6A5ACD"/>
             </a:solidFill>
@@ -5534,27 +5543,27 @@
         </p:nvSpPr>
         <p:spPr>
           <a:xfrm>
-            <a:off x="4241800" y="2006600"/>
-            <a:ext cx="558800" cy="228600"/>
-          </a:xfrm>
-          <a:prstGeom prst="rect">
-            <a:avLst/>
-          </a:prstGeom>
-          <a:noFill/>
-          <a:ln/>
-        </p:spPr>
-        <p:txBody>
-          <a:bodyPr wrap="square" lIns="0" tIns="0" rIns="0" bIns="0" rtlCol="0" anchor="ctr"/>
-          <a:lstStyle/>
-          <a:p>
-            <a:pPr algn="l" indent="0" marL="0">
-              <a:lnSpc>
-                <a:spcPts val="1500"/>
-              </a:lnSpc>
-              <a:buNone/>
-            </a:pPr>
-            <a:r>
-              <a:rPr lang="en-US" sz="1300" spc="300" kern="0" dirty="0">
+            <a:off x="4187190" y="1850390"/>
+            <a:ext cx="127000" cy="190500"/>
+          </a:xfrm>
+          <a:prstGeom prst="rect">
+            <a:avLst/>
+          </a:prstGeom>
+          <a:noFill/>
+          <a:ln/>
+        </p:spPr>
+        <p:txBody>
+          <a:bodyPr wrap="square" lIns="0" tIns="0" rIns="0" bIns="0" rtlCol="0" anchor="ctr"/>
+          <a:lstStyle/>
+          <a:p>
+            <a:pPr algn="ctr" indent="0" marL="0">
+              <a:lnSpc>
+                <a:spcPts val="1500"/>
+              </a:lnSpc>
+              <a:buNone/>
+            </a:pPr>
+            <a:r>
+              <a:rPr lang="en-US" sz="1300" dirty="0">
                 <a:solidFill>
                   <a:srgbClr val="0000FF"/>
                 </a:solidFill>
@@ -5562,22 +5571,106 @@
                 <a:ea typeface="Arial" pitchFamily="34" charset="-122"/>
                 <a:cs typeface="Arial" pitchFamily="34" charset="-120"/>
               </a:rPr>
-              <a:t>1 1 1</a:t>
-            </a:r>
-            <a:endParaRPr lang="en-US" sz="1300" dirty="0"/>
-          </a:p>
-        </p:txBody>
-      </p:sp>
-      <p:sp>
-        <p:nvSpPr>
-          <p:cNvPr id="111" name="Shape 109"/>
-          <p:cNvSpPr/>
-          <p:nvPr/>
-        </p:nvSpPr>
-        <p:spPr>
-          <a:xfrm>
-            <a:off x="4819650" y="1854200"/>
-            <a:ext cx="12700" cy="584200"/>
+              <a:t>1</a:t>
+            </a:r>
+            <a:endParaRPr lang="en-US" sz="1300" dirty="0"/>
+          </a:p>
+        </p:txBody>
+      </p:sp>
+      <p:sp>
+        <p:nvSpPr>
+          <p:cNvPr id="111" name="Text 109"/>
+          <p:cNvSpPr/>
+          <p:nvPr/>
+        </p:nvSpPr>
+        <p:spPr>
+          <a:xfrm>
+            <a:off x="4414520" y="1850390"/>
+            <a:ext cx="127000" cy="190500"/>
+          </a:xfrm>
+          <a:prstGeom prst="rect">
+            <a:avLst/>
+          </a:prstGeom>
+          <a:noFill/>
+          <a:ln/>
+        </p:spPr>
+        <p:txBody>
+          <a:bodyPr wrap="square" lIns="0" tIns="0" rIns="0" bIns="0" rtlCol="0" anchor="ctr"/>
+          <a:lstStyle/>
+          <a:p>
+            <a:pPr algn="ctr" indent="0" marL="0">
+              <a:lnSpc>
+                <a:spcPts val="1500"/>
+              </a:lnSpc>
+              <a:buNone/>
+            </a:pPr>
+            <a:r>
+              <a:rPr lang="en-US" sz="1300" dirty="0">
+                <a:solidFill>
+                  <a:srgbClr val="0000FF"/>
+                </a:solidFill>
+                <a:latin typeface="Arial" pitchFamily="34" charset="0"/>
+                <a:ea typeface="Arial" pitchFamily="34" charset="-122"/>
+                <a:cs typeface="Arial" pitchFamily="34" charset="-120"/>
+              </a:rPr>
+              <a:t>1</a:t>
+            </a:r>
+            <a:endParaRPr lang="en-US" sz="1300" dirty="0"/>
+          </a:p>
+        </p:txBody>
+      </p:sp>
+      <p:sp>
+        <p:nvSpPr>
+          <p:cNvPr id="112" name="Text 110"/>
+          <p:cNvSpPr/>
+          <p:nvPr/>
+        </p:nvSpPr>
+        <p:spPr>
+          <a:xfrm>
+            <a:off x="4644390" y="1850390"/>
+            <a:ext cx="127000" cy="190500"/>
+          </a:xfrm>
+          <a:prstGeom prst="rect">
+            <a:avLst/>
+          </a:prstGeom>
+          <a:noFill/>
+          <a:ln/>
+        </p:spPr>
+        <p:txBody>
+          <a:bodyPr wrap="square" lIns="0" tIns="0" rIns="0" bIns="0" rtlCol="0" anchor="ctr"/>
+          <a:lstStyle/>
+          <a:p>
+            <a:pPr algn="ctr" indent="0" marL="0">
+              <a:lnSpc>
+                <a:spcPts val="1500"/>
+              </a:lnSpc>
+              <a:buNone/>
+            </a:pPr>
+            <a:r>
+              <a:rPr lang="en-US" sz="1300" dirty="0">
+                <a:solidFill>
+                  <a:srgbClr val="0000FF"/>
+                </a:solidFill>
+                <a:latin typeface="Arial" pitchFamily="34" charset="0"/>
+                <a:ea typeface="Arial" pitchFamily="34" charset="-122"/>
+                <a:cs typeface="Arial" pitchFamily="34" charset="-120"/>
+              </a:rPr>
+              <a:t>1</a:t>
+            </a:r>
+            <a:endParaRPr lang="en-US" sz="1300" dirty="0"/>
+          </a:p>
+        </p:txBody>
+      </p:sp>
+      <p:sp>
+        <p:nvSpPr>
+          <p:cNvPr id="113" name="Shape 111"/>
+          <p:cNvSpPr/>
+          <p:nvPr/>
+        </p:nvSpPr>
+        <p:spPr>
+          <a:xfrm>
+            <a:off x="4178300" y="1866900"/>
+            <a:ext cx="12700" cy="165100"/>
           </a:xfrm>
           <a:prstGeom prst="rect">
             <a:avLst/>
@@ -5590,14 +5683,14 @@
       </p:sp>
       <p:sp>
         <p:nvSpPr>
-          <p:cNvPr id="112" name="Shape 110"/>
-          <p:cNvSpPr/>
-          <p:nvPr/>
-        </p:nvSpPr>
-        <p:spPr>
-          <a:xfrm>
-            <a:off x="5124450" y="1854200"/>
-            <a:ext cx="12700" cy="584200"/>
+          <p:cNvPr id="114" name="Shape 112"/>
+          <p:cNvSpPr/>
+          <p:nvPr/>
+        </p:nvSpPr>
+        <p:spPr>
+          <a:xfrm>
+            <a:off x="4762500" y="1879600"/>
+            <a:ext cx="12700" cy="152400"/>
           </a:xfrm>
           <a:prstGeom prst="rect">
             <a:avLst/>
@@ -5610,358 +5703,13 @@
       </p:sp>
       <p:sp>
         <p:nvSpPr>
-          <p:cNvPr id="113" name="Text 111"/>
-          <p:cNvSpPr/>
-          <p:nvPr/>
-        </p:nvSpPr>
-        <p:spPr>
-          <a:xfrm>
-            <a:off x="4832350" y="1847850"/>
-            <a:ext cx="279400" cy="203200"/>
-          </a:xfrm>
-          <a:prstGeom prst="rect">
-            <a:avLst/>
-          </a:prstGeom>
-          <a:noFill/>
-          <a:ln/>
-        </p:spPr>
-        <p:txBody>
-          <a:bodyPr wrap="square" lIns="0" tIns="0" rIns="0" bIns="0" rtlCol="0" anchor="ctr"/>
-          <a:lstStyle/>
-          <a:p>
-            <a:pPr algn="ctr" indent="0" marL="0">
-              <a:lnSpc>
-                <a:spcPts val="1500"/>
-              </a:lnSpc>
-              <a:buNone/>
-            </a:pPr>
-            <a:r>
-              <a:rPr lang="en-US" sz="1300" dirty="0">
-                <a:solidFill>
-                  <a:srgbClr val="008000"/>
-                </a:solidFill>
-                <a:latin typeface="Arial" pitchFamily="34" charset="0"/>
-                <a:ea typeface="Arial" pitchFamily="34" charset="-122"/>
-                <a:cs typeface="Arial" pitchFamily="34" charset="-120"/>
-              </a:rPr>
-              <a:t>14</a:t>
-            </a:r>
-            <a:endParaRPr lang="en-US" sz="1300" dirty="0"/>
-          </a:p>
-        </p:txBody>
-      </p:sp>
-      <p:sp>
-        <p:nvSpPr>
-          <p:cNvPr id="114" name="Text 112"/>
-          <p:cNvSpPr/>
-          <p:nvPr/>
-        </p:nvSpPr>
-        <p:spPr>
-          <a:xfrm>
-            <a:off x="4832350" y="2044700"/>
-            <a:ext cx="279400" cy="203200"/>
-          </a:xfrm>
-          <a:prstGeom prst="rect">
-            <a:avLst/>
-          </a:prstGeom>
-          <a:noFill/>
-          <a:ln/>
-        </p:spPr>
-        <p:txBody>
-          <a:bodyPr wrap="square" lIns="0" tIns="0" rIns="0" bIns="0" rtlCol="0" anchor="ctr"/>
-          <a:lstStyle/>
-          <a:p>
-            <a:pPr algn="ctr" indent="0" marL="0">
-              <a:lnSpc>
-                <a:spcPts val="1500"/>
-              </a:lnSpc>
-              <a:buNone/>
-            </a:pPr>
-            <a:r>
-              <a:rPr lang="en-US" sz="1300" dirty="0">
-                <a:solidFill>
-                  <a:srgbClr val="008000"/>
-                </a:solidFill>
-                <a:latin typeface="Arial" pitchFamily="34" charset="0"/>
-                <a:ea typeface="Arial" pitchFamily="34" charset="-122"/>
-                <a:cs typeface="Arial" pitchFamily="34" charset="-120"/>
-              </a:rPr>
-              <a:t>−4</a:t>
-            </a:r>
-            <a:endParaRPr lang="en-US" sz="1300" dirty="0"/>
-          </a:p>
-        </p:txBody>
-      </p:sp>
-      <p:sp>
-        <p:nvSpPr>
-          <p:cNvPr id="115" name="Text 113"/>
-          <p:cNvSpPr/>
-          <p:nvPr/>
-        </p:nvSpPr>
-        <p:spPr>
-          <a:xfrm>
-            <a:off x="4832350" y="2241550"/>
-            <a:ext cx="279400" cy="203200"/>
-          </a:xfrm>
-          <a:prstGeom prst="rect">
-            <a:avLst/>
-          </a:prstGeom>
-          <a:noFill/>
-          <a:ln/>
-        </p:spPr>
-        <p:txBody>
-          <a:bodyPr wrap="square" lIns="0" tIns="0" rIns="0" bIns="0" rtlCol="0" anchor="ctr"/>
-          <a:lstStyle/>
-          <a:p>
-            <a:pPr algn="ctr" indent="0" marL="0">
-              <a:lnSpc>
-                <a:spcPts val="1500"/>
-              </a:lnSpc>
-              <a:buNone/>
-            </a:pPr>
-            <a:r>
-              <a:rPr lang="en-US" sz="1300" dirty="0">
-                <a:solidFill>
-                  <a:srgbClr val="008000"/>
-                </a:solidFill>
-                <a:latin typeface="Arial" pitchFamily="34" charset="0"/>
-                <a:ea typeface="Arial" pitchFamily="34" charset="-122"/>
-                <a:cs typeface="Arial" pitchFamily="34" charset="-120"/>
-              </a:rPr>
-              <a:t>0</a:t>
-            </a:r>
-            <a:endParaRPr lang="en-US" sz="1300" dirty="0"/>
-          </a:p>
-        </p:txBody>
-      </p:sp>
-      <p:sp>
-        <p:nvSpPr>
-          <p:cNvPr id="116" name="Text 114"/>
-          <p:cNvSpPr/>
-          <p:nvPr/>
-        </p:nvSpPr>
-        <p:spPr>
-          <a:xfrm>
-            <a:off x="5219700" y="2006600"/>
-            <a:ext cx="736600" cy="228600"/>
-          </a:xfrm>
-          <a:prstGeom prst="rect">
-            <a:avLst/>
-          </a:prstGeom>
-          <a:noFill/>
-          <a:ln/>
-        </p:spPr>
-        <p:txBody>
-          <a:bodyPr wrap="square" lIns="0" tIns="0" rIns="0" bIns="0" rtlCol="0" anchor="ctr"/>
-          <a:lstStyle/>
-          <a:p>
-            <a:pPr algn="l" indent="0" marL="0">
-              <a:lnSpc>
-                <a:spcPts val="1500"/>
-              </a:lnSpc>
-              <a:buNone/>
-            </a:pPr>
-            <a:r>
-              <a:rPr lang="en-US" sz="1300" dirty="0">
-                <a:solidFill>
-                  <a:srgbClr val="000000"/>
-                </a:solidFill>
-                <a:latin typeface="Arial" pitchFamily="34" charset="0"/>
-                <a:ea typeface="Arial" pitchFamily="34" charset="-122"/>
-                <a:cs typeface="Arial" pitchFamily="34" charset="-120"/>
-              </a:rPr>
-              <a:t>= 10</a:t>
-            </a:r>
-            <a:endParaRPr lang="en-US" sz="1300" dirty="0"/>
-          </a:p>
-        </p:txBody>
-      </p:sp>
-      <p:sp>
-        <p:nvSpPr>
-          <p:cNvPr id="117" name="Text 115"/>
-          <p:cNvSpPr/>
-          <p:nvPr/>
-        </p:nvSpPr>
-        <p:spPr>
-          <a:xfrm>
-            <a:off x="6413500" y="2006600"/>
-            <a:ext cx="203200" cy="228600"/>
-          </a:xfrm>
-          <a:prstGeom prst="rect">
-            <a:avLst/>
-          </a:prstGeom>
-          <a:noFill/>
-          <a:ln/>
-        </p:spPr>
-        <p:txBody>
-          <a:bodyPr wrap="square" lIns="0" tIns="0" rIns="0" bIns="0" rtlCol="0" anchor="ctr"/>
-          <a:lstStyle/>
-          <a:p>
-            <a:pPr algn="l" indent="0" marL="0">
-              <a:lnSpc>
-                <a:spcPts val="1500"/>
-              </a:lnSpc>
-              <a:buNone/>
-            </a:pPr>
-            <a:r>
-              <a:rPr lang="en-US" sz="1300" dirty="0">
-                <a:solidFill>
-                  <a:srgbClr val="000000"/>
-                </a:solidFill>
-                <a:latin typeface="Arial" pitchFamily="34" charset="0"/>
-                <a:ea typeface="Arial" pitchFamily="34" charset="-122"/>
-                <a:cs typeface="Arial" pitchFamily="34" charset="-120"/>
-              </a:rPr>
-              <a:t>⇒</a:t>
-            </a:r>
-            <a:endParaRPr lang="en-US" sz="1300" dirty="0"/>
-          </a:p>
-        </p:txBody>
-      </p:sp>
-      <p:sp>
-        <p:nvSpPr>
-          <p:cNvPr id="118" name="Text 116"/>
-          <p:cNvSpPr/>
-          <p:nvPr/>
-        </p:nvSpPr>
-        <p:spPr>
-          <a:xfrm>
-            <a:off x="6667500" y="2006600"/>
-            <a:ext cx="2197100" cy="228600"/>
-          </a:xfrm>
-          <a:prstGeom prst="rect">
-            <a:avLst/>
-          </a:prstGeom>
-          <a:noFill/>
-          <a:ln/>
-        </p:spPr>
-        <p:txBody>
-          <a:bodyPr wrap="square" lIns="0" tIns="0" rIns="0" bIns="0" rtlCol="0" anchor="ctr"/>
-          <a:lstStyle/>
-          <a:p>
-            <a:pPr algn="l" indent="0" marL="0">
-              <a:lnSpc>
-                <a:spcPts val="1500"/>
-              </a:lnSpc>
-              <a:buNone/>
-            </a:pPr>
-            <a:r>
-              <a:rPr lang="en-US" sz="1300" dirty="0">
-                <a:solidFill>
-                  <a:srgbClr val="000000"/>
-                </a:solidFill>
-                <a:latin typeface="Arial" pitchFamily="34" charset="0"/>
-                <a:ea typeface="Arial" pitchFamily="34" charset="-122"/>
-                <a:cs typeface="Arial" pitchFamily="34" charset="-120"/>
-              </a:rPr>
-              <a:t>Keep same </a:t>
-            </a:r>
-            <a:pPr algn="l" indent="0" marL="0">
-              <a:lnSpc>
-                <a:spcPts val="1500"/>
-              </a:lnSpc>
-              <a:buNone/>
-            </a:pPr>
-            <a:r>
-              <a:rPr lang="en-US" sz="1300" u="sng" dirty="0">
-                <a:solidFill>
-                  <a:srgbClr val="000000"/>
-                </a:solidFill>
-                <a:latin typeface="Arial" pitchFamily="34" charset="0"/>
-                <a:ea typeface="Arial" pitchFamily="34" charset="-122"/>
-                <a:cs typeface="Arial" pitchFamily="34" charset="-120"/>
-              </a:rPr>
-              <a:t>W</a:t>
-            </a:r>
-            <a:pPr algn="l" indent="0" marL="0">
-              <a:lnSpc>
-                <a:spcPts val="1500"/>
-              </a:lnSpc>
-              <a:buNone/>
-            </a:pPr>
-            <a:r>
-              <a:rPr lang="en-US" sz="1300" dirty="0">
-                <a:solidFill>
-                  <a:srgbClr val="000000"/>
-                </a:solidFill>
-                <a:latin typeface="Arial" pitchFamily="34" charset="0"/>
-                <a:ea typeface="Arial" pitchFamily="34" charset="-122"/>
-                <a:cs typeface="Arial" pitchFamily="34" charset="-120"/>
-              </a:rPr>
-              <a:t>eight</a:t>
-            </a:r>
-            <a:endParaRPr lang="en-US" sz="1300" dirty="0"/>
-          </a:p>
-        </p:txBody>
-      </p:sp>
-      <p:sp>
-        <p:nvSpPr>
-          <p:cNvPr id="119" name="Text 117"/>
-          <p:cNvSpPr/>
-          <p:nvPr/>
-        </p:nvSpPr>
-        <p:spPr>
-          <a:xfrm>
-            <a:off x="8940800" y="2006600"/>
-            <a:ext cx="342900" cy="228600"/>
-          </a:xfrm>
-          <a:prstGeom prst="rect">
-            <a:avLst/>
-          </a:prstGeom>
-          <a:noFill/>
-          <a:ln/>
-        </p:spPr>
-        <p:txBody>
-          <a:bodyPr wrap="square" lIns="0" tIns="0" rIns="0" bIns="0" rtlCol="0" anchor="ctr"/>
-          <a:lstStyle/>
-          <a:p>
-            <a:pPr algn="l" indent="0" marL="0">
-              <a:lnSpc>
-                <a:spcPts val="1500"/>
-              </a:lnSpc>
-              <a:buNone/>
-            </a:pPr>
-            <a:r>
-              <a:rPr lang="en-US" sz="1300" u="sng" dirty="0">
-                <a:solidFill>
-                  <a:srgbClr val="000000"/>
-                </a:solidFill>
-                <a:latin typeface="Arial" pitchFamily="34" charset="0"/>
-                <a:ea typeface="Arial" pitchFamily="34" charset="-122"/>
-                <a:cs typeface="Arial" pitchFamily="34" charset="-120"/>
-              </a:rPr>
-              <a:t>W</a:t>
-            </a:r>
-            <a:pPr algn="l" indent="0" marL="0">
-              <a:lnSpc>
-                <a:spcPts val="1500"/>
-              </a:lnSpc>
-              <a:buNone/>
-            </a:pPr>
-            <a:r>
-              <a:rPr lang="en-US" sz="1300" dirty="0">
-                <a:solidFill>
-                  <a:srgbClr val="000000"/>
-                </a:solidFill>
-                <a:latin typeface="Arial" pitchFamily="34" charset="0"/>
-                <a:ea typeface="Arial" pitchFamily="34" charset="-122"/>
-                <a:cs typeface="Arial" pitchFamily="34" charset="-120"/>
-              </a:rPr>
-              <a:t> = </a:t>
-            </a:r>
-            <a:endParaRPr lang="en-US" sz="1300" dirty="0"/>
-          </a:p>
-        </p:txBody>
-      </p:sp>
-      <p:sp>
-        <p:nvSpPr>
-          <p:cNvPr id="120" name="Shape 118"/>
-          <p:cNvSpPr/>
-          <p:nvPr/>
-        </p:nvSpPr>
-        <p:spPr>
-          <a:xfrm>
-            <a:off x="9264650" y="1854200"/>
+          <p:cNvPr id="115" name="Shape 113"/>
+          <p:cNvSpPr/>
+          <p:nvPr/>
+        </p:nvSpPr>
+        <p:spPr>
+          <a:xfrm>
+            <a:off x="4819650" y="1854200"/>
             <a:ext cx="12700" cy="584200"/>
           </a:xfrm>
           <a:prstGeom prst="rect">
@@ -5975,13 +5723,13 @@
       </p:sp>
       <p:sp>
         <p:nvSpPr>
-          <p:cNvPr id="121" name="Shape 119"/>
-          <p:cNvSpPr/>
-          <p:nvPr/>
-        </p:nvSpPr>
-        <p:spPr>
-          <a:xfrm>
-            <a:off x="9569450" y="1854200"/>
+          <p:cNvPr id="116" name="Shape 114"/>
+          <p:cNvSpPr/>
+          <p:nvPr/>
+        </p:nvSpPr>
+        <p:spPr>
+          <a:xfrm>
+            <a:off x="5124450" y="1854200"/>
             <a:ext cx="12700" cy="584200"/>
           </a:xfrm>
           <a:prstGeom prst="rect">
@@ -5995,41 +5743,285 @@
       </p:sp>
       <p:sp>
         <p:nvSpPr>
+          <p:cNvPr id="117" name="Text 115"/>
+          <p:cNvSpPr/>
+          <p:nvPr/>
+        </p:nvSpPr>
+        <p:spPr>
+          <a:xfrm>
+            <a:off x="4832350" y="1847850"/>
+            <a:ext cx="279400" cy="203200"/>
+          </a:xfrm>
+          <a:prstGeom prst="rect">
+            <a:avLst/>
+          </a:prstGeom>
+          <a:noFill/>
+          <a:ln/>
+        </p:spPr>
+        <p:txBody>
+          <a:bodyPr wrap="square" lIns="0" tIns="0" rIns="0" bIns="0" rtlCol="0" anchor="ctr"/>
+          <a:lstStyle/>
+          <a:p>
+            <a:pPr algn="ctr" indent="0" marL="0">
+              <a:lnSpc>
+                <a:spcPts val="1500"/>
+              </a:lnSpc>
+              <a:buNone/>
+            </a:pPr>
+            <a:r>
+              <a:rPr lang="en-US" sz="1300" dirty="0">
+                <a:solidFill>
+                  <a:srgbClr val="008000"/>
+                </a:solidFill>
+                <a:latin typeface="Arial" pitchFamily="34" charset="0"/>
+                <a:ea typeface="Arial" pitchFamily="34" charset="-122"/>
+                <a:cs typeface="Arial" pitchFamily="34" charset="-120"/>
+              </a:rPr>
+              <a:t>14</a:t>
+            </a:r>
+            <a:endParaRPr lang="en-US" sz="1300" dirty="0"/>
+          </a:p>
+        </p:txBody>
+      </p:sp>
+      <p:sp>
+        <p:nvSpPr>
+          <p:cNvPr id="118" name="Text 116"/>
+          <p:cNvSpPr/>
+          <p:nvPr/>
+        </p:nvSpPr>
+        <p:spPr>
+          <a:xfrm>
+            <a:off x="4832350" y="2044700"/>
+            <a:ext cx="279400" cy="203200"/>
+          </a:xfrm>
+          <a:prstGeom prst="rect">
+            <a:avLst/>
+          </a:prstGeom>
+          <a:noFill/>
+          <a:ln/>
+        </p:spPr>
+        <p:txBody>
+          <a:bodyPr wrap="square" lIns="0" tIns="0" rIns="0" bIns="0" rtlCol="0" anchor="ctr"/>
+          <a:lstStyle/>
+          <a:p>
+            <a:pPr algn="ctr" indent="0" marL="0">
+              <a:lnSpc>
+                <a:spcPts val="1500"/>
+              </a:lnSpc>
+              <a:buNone/>
+            </a:pPr>
+            <a:r>
+              <a:rPr lang="en-US" sz="1300" dirty="0">
+                <a:solidFill>
+                  <a:srgbClr val="008000"/>
+                </a:solidFill>
+                <a:latin typeface="Arial" pitchFamily="34" charset="0"/>
+                <a:ea typeface="Arial" pitchFamily="34" charset="-122"/>
+                <a:cs typeface="Arial" pitchFamily="34" charset="-120"/>
+              </a:rPr>
+              <a:t>−4</a:t>
+            </a:r>
+            <a:endParaRPr lang="en-US" sz="1300" dirty="0"/>
+          </a:p>
+        </p:txBody>
+      </p:sp>
+      <p:sp>
+        <p:nvSpPr>
+          <p:cNvPr id="119" name="Text 117"/>
+          <p:cNvSpPr/>
+          <p:nvPr/>
+        </p:nvSpPr>
+        <p:spPr>
+          <a:xfrm>
+            <a:off x="4832350" y="2241550"/>
+            <a:ext cx="279400" cy="203200"/>
+          </a:xfrm>
+          <a:prstGeom prst="rect">
+            <a:avLst/>
+          </a:prstGeom>
+          <a:noFill/>
+          <a:ln/>
+        </p:spPr>
+        <p:txBody>
+          <a:bodyPr wrap="square" lIns="0" tIns="0" rIns="0" bIns="0" rtlCol="0" anchor="ctr"/>
+          <a:lstStyle/>
+          <a:p>
+            <a:pPr algn="ctr" indent="0" marL="0">
+              <a:lnSpc>
+                <a:spcPts val="1500"/>
+              </a:lnSpc>
+              <a:buNone/>
+            </a:pPr>
+            <a:r>
+              <a:rPr lang="en-US" sz="1300" dirty="0">
+                <a:solidFill>
+                  <a:srgbClr val="008000"/>
+                </a:solidFill>
+                <a:latin typeface="Arial" pitchFamily="34" charset="0"/>
+                <a:ea typeface="Arial" pitchFamily="34" charset="-122"/>
+                <a:cs typeface="Arial" pitchFamily="34" charset="-120"/>
+              </a:rPr>
+              <a:t>0</a:t>
+            </a:r>
+            <a:endParaRPr lang="en-US" sz="1300" dirty="0"/>
+          </a:p>
+        </p:txBody>
+      </p:sp>
+      <p:sp>
+        <p:nvSpPr>
+          <p:cNvPr id="120" name="Text 118"/>
+          <p:cNvSpPr/>
+          <p:nvPr/>
+        </p:nvSpPr>
+        <p:spPr>
+          <a:xfrm>
+            <a:off x="5219700" y="2006600"/>
+            <a:ext cx="736600" cy="228600"/>
+          </a:xfrm>
+          <a:prstGeom prst="rect">
+            <a:avLst/>
+          </a:prstGeom>
+          <a:noFill/>
+          <a:ln/>
+        </p:spPr>
+        <p:txBody>
+          <a:bodyPr wrap="square" lIns="0" tIns="0" rIns="0" bIns="0" rtlCol="0" anchor="ctr"/>
+          <a:lstStyle/>
+          <a:p>
+            <a:pPr algn="l" indent="0" marL="0">
+              <a:lnSpc>
+                <a:spcPts val="1500"/>
+              </a:lnSpc>
+              <a:buNone/>
+            </a:pPr>
+            <a:r>
+              <a:rPr lang="en-US" sz="1300" dirty="0">
+                <a:solidFill>
+                  <a:srgbClr val="000000"/>
+                </a:solidFill>
+                <a:latin typeface="Arial" pitchFamily="34" charset="0"/>
+                <a:ea typeface="Arial" pitchFamily="34" charset="-122"/>
+                <a:cs typeface="Arial" pitchFamily="34" charset="-120"/>
+              </a:rPr>
+              <a:t>= 10</a:t>
+            </a:r>
+            <a:endParaRPr lang="en-US" sz="1300" dirty="0"/>
+          </a:p>
+        </p:txBody>
+      </p:sp>
+      <p:sp>
+        <p:nvSpPr>
+          <p:cNvPr id="121" name="Text 119"/>
+          <p:cNvSpPr/>
+          <p:nvPr/>
+        </p:nvSpPr>
+        <p:spPr>
+          <a:xfrm>
+            <a:off x="6413500" y="2006600"/>
+            <a:ext cx="203200" cy="228600"/>
+          </a:xfrm>
+          <a:prstGeom prst="rect">
+            <a:avLst/>
+          </a:prstGeom>
+          <a:noFill/>
+          <a:ln/>
+        </p:spPr>
+        <p:txBody>
+          <a:bodyPr wrap="square" lIns="0" tIns="0" rIns="0" bIns="0" rtlCol="0" anchor="ctr"/>
+          <a:lstStyle/>
+          <a:p>
+            <a:pPr algn="l" indent="0" marL="0">
+              <a:lnSpc>
+                <a:spcPts val="1500"/>
+              </a:lnSpc>
+              <a:buNone/>
+            </a:pPr>
+            <a:r>
+              <a:rPr lang="en-US" sz="1300" dirty="0">
+                <a:solidFill>
+                  <a:srgbClr val="000000"/>
+                </a:solidFill>
+                <a:latin typeface="Arial" pitchFamily="34" charset="0"/>
+                <a:ea typeface="Arial" pitchFamily="34" charset="-122"/>
+                <a:cs typeface="Arial" pitchFamily="34" charset="-120"/>
+              </a:rPr>
+              <a:t>⇒</a:t>
+            </a:r>
+            <a:endParaRPr lang="en-US" sz="1300" dirty="0"/>
+          </a:p>
+        </p:txBody>
+      </p:sp>
+      <p:sp>
+        <p:nvSpPr>
           <p:cNvPr id="122" name="Text 120"/>
           <p:cNvSpPr/>
           <p:nvPr/>
         </p:nvSpPr>
         <p:spPr>
           <a:xfrm>
-            <a:off x="9277350" y="1847850"/>
-            <a:ext cx="279400" cy="203200"/>
-          </a:xfrm>
-          <a:prstGeom prst="rect">
-            <a:avLst/>
-          </a:prstGeom>
-          <a:noFill/>
-          <a:ln/>
-        </p:spPr>
-        <p:txBody>
-          <a:bodyPr wrap="square" lIns="0" tIns="0" rIns="0" bIns="0" rtlCol="0" anchor="ctr"/>
-          <a:lstStyle/>
-          <a:p>
-            <a:pPr algn="ctr" indent="0" marL="0">
-              <a:lnSpc>
-                <a:spcPts val="1500"/>
-              </a:lnSpc>
-              <a:buNone/>
-            </a:pPr>
-            <a:r>
-              <a:rPr lang="en-US" sz="1300" dirty="0">
-                <a:solidFill>
-                  <a:srgbClr val="000000"/>
-                </a:solidFill>
-                <a:latin typeface="Arial" pitchFamily="34" charset="0"/>
-                <a:ea typeface="Arial" pitchFamily="34" charset="-122"/>
-                <a:cs typeface="Arial" pitchFamily="34" charset="-120"/>
-              </a:rPr>
-              <a:t>14</a:t>
+            <a:off x="6667500" y="2006600"/>
+            <a:ext cx="2197100" cy="228600"/>
+          </a:xfrm>
+          <a:prstGeom prst="rect">
+            <a:avLst/>
+          </a:prstGeom>
+          <a:noFill/>
+          <a:ln/>
+        </p:spPr>
+        <p:txBody>
+          <a:bodyPr wrap="square" lIns="0" tIns="0" rIns="0" bIns="0" rtlCol="0" anchor="ctr"/>
+          <a:lstStyle/>
+          <a:p>
+            <a:pPr algn="l" indent="0" marL="0">
+              <a:lnSpc>
+                <a:spcPts val="1500"/>
+              </a:lnSpc>
+              <a:buNone/>
+            </a:pPr>
+            <a:r>
+              <a:rPr lang="en-US" sz="1300" dirty="0">
+                <a:solidFill>
+                  <a:srgbClr val="000000"/>
+                </a:solidFill>
+                <a:latin typeface="Arial" pitchFamily="34" charset="0"/>
+                <a:ea typeface="Arial" pitchFamily="34" charset="-122"/>
+                <a:cs typeface="Arial" pitchFamily="34" charset="-120"/>
+              </a:rPr>
+              <a:t>Keep same </a:t>
+            </a:r>
+            <a:pPr algn="l" indent="0" marL="0">
+              <a:lnSpc>
+                <a:spcPts val="1500"/>
+              </a:lnSpc>
+              <a:buNone/>
+            </a:pPr>
+            <a:r>
+              <a:rPr lang="en-US" sz="1300" u="sng" dirty="0">
+                <a:solidFill>
+                  <a:srgbClr val="000000"/>
+                </a:solidFill>
+                <a:latin typeface="Arial" pitchFamily="34" charset="0"/>
+                <a:ea typeface="Arial" pitchFamily="34" charset="-122"/>
+                <a:cs typeface="Arial" pitchFamily="34" charset="-120"/>
+              </a:rPr>
+              <a:t>W</a:t>
+            </a:r>
+            <a:pPr algn="l" indent="0" marL="0">
+              <a:lnSpc>
+                <a:spcPts val="1500"/>
+              </a:lnSpc>
+              <a:buNone/>
+            </a:pPr>
+            <a:r>
+              <a:rPr lang="en-US" sz="1300" dirty="0">
+                <a:solidFill>
+                  <a:srgbClr val="000000"/>
+                </a:solidFill>
+                <a:latin typeface="Arial" pitchFamily="34" charset="0"/>
+                <a:ea typeface="Arial" pitchFamily="34" charset="-122"/>
+                <a:cs typeface="Arial" pitchFamily="34" charset="-120"/>
+              </a:rPr>
+              <a:t>eight</a:t>
             </a:r>
             <a:endParaRPr lang="en-US" sz="1300" dirty="0"/>
           </a:p>
@@ -6043,92 +6035,8 @@
         </p:nvSpPr>
         <p:spPr>
           <a:xfrm>
-            <a:off x="9277350" y="2044700"/>
-            <a:ext cx="279400" cy="203200"/>
-          </a:xfrm>
-          <a:prstGeom prst="rect">
-            <a:avLst/>
-          </a:prstGeom>
-          <a:noFill/>
-          <a:ln/>
-        </p:spPr>
-        <p:txBody>
-          <a:bodyPr wrap="square" lIns="0" tIns="0" rIns="0" bIns="0" rtlCol="0" anchor="ctr"/>
-          <a:lstStyle/>
-          <a:p>
-            <a:pPr algn="ctr" indent="0" marL="0">
-              <a:lnSpc>
-                <a:spcPts val="1500"/>
-              </a:lnSpc>
-              <a:buNone/>
-            </a:pPr>
-            <a:r>
-              <a:rPr lang="en-US" sz="1300" dirty="0">
-                <a:solidFill>
-                  <a:srgbClr val="000000"/>
-                </a:solidFill>
-                <a:latin typeface="Arial" pitchFamily="34" charset="0"/>
-                <a:ea typeface="Arial" pitchFamily="34" charset="-122"/>
-                <a:cs typeface="Arial" pitchFamily="34" charset="-120"/>
-              </a:rPr>
-              <a:t>−4</a:t>
-            </a:r>
-            <a:endParaRPr lang="en-US" sz="1300" dirty="0"/>
-          </a:p>
-        </p:txBody>
-      </p:sp>
-      <p:sp>
-        <p:nvSpPr>
-          <p:cNvPr id="124" name="Text 122"/>
-          <p:cNvSpPr/>
-          <p:nvPr/>
-        </p:nvSpPr>
-        <p:spPr>
-          <a:xfrm>
-            <a:off x="9277350" y="2241550"/>
-            <a:ext cx="279400" cy="203200"/>
-          </a:xfrm>
-          <a:prstGeom prst="rect">
-            <a:avLst/>
-          </a:prstGeom>
-          <a:noFill/>
-          <a:ln/>
-        </p:spPr>
-        <p:txBody>
-          <a:bodyPr wrap="square" lIns="0" tIns="0" rIns="0" bIns="0" rtlCol="0" anchor="ctr"/>
-          <a:lstStyle/>
-          <a:p>
-            <a:pPr algn="ctr" indent="0" marL="0">
-              <a:lnSpc>
-                <a:spcPts val="1500"/>
-              </a:lnSpc>
-              <a:buNone/>
-            </a:pPr>
-            <a:r>
-              <a:rPr lang="en-US" sz="1300" dirty="0">
-                <a:solidFill>
-                  <a:srgbClr val="000000"/>
-                </a:solidFill>
-                <a:latin typeface="Arial" pitchFamily="34" charset="0"/>
-                <a:ea typeface="Arial" pitchFamily="34" charset="-122"/>
-                <a:cs typeface="Arial" pitchFamily="34" charset="-120"/>
-              </a:rPr>
-              <a:t>0</a:t>
-            </a:r>
-            <a:endParaRPr lang="en-US" sz="1300" dirty="0"/>
-          </a:p>
-        </p:txBody>
-      </p:sp>
-      <p:sp>
-        <p:nvSpPr>
-          <p:cNvPr id="125" name="Text 123"/>
-          <p:cNvSpPr/>
-          <p:nvPr/>
-        </p:nvSpPr>
-        <p:spPr>
-          <a:xfrm>
-            <a:off x="3594100" y="2851150"/>
-            <a:ext cx="635000" cy="228600"/>
+            <a:off x="8940800" y="2006600"/>
+            <a:ext cx="342900" cy="228600"/>
           </a:xfrm>
           <a:prstGeom prst="rect">
             <a:avLst/>
@@ -6147,15 +6055,15 @@
               <a:buNone/>
             </a:pPr>
             <a:r>
-              <a:rPr lang="en-US" sz="1300" dirty="0">
-                <a:solidFill>
-                  <a:srgbClr val="000000"/>
-                </a:solidFill>
-                <a:latin typeface="Arial" pitchFamily="34" charset="0"/>
-                <a:ea typeface="Arial" pitchFamily="34" charset="-122"/>
-                <a:cs typeface="Arial" pitchFamily="34" charset="-120"/>
-              </a:rPr>
-              <a:t>d(</a:t>
+              <a:rPr lang="en-US" sz="1300" u="sng" dirty="0">
+                <a:solidFill>
+                  <a:srgbClr val="000000"/>
+                </a:solidFill>
+                <a:latin typeface="Arial" pitchFamily="34" charset="0"/>
+                <a:ea typeface="Arial" pitchFamily="34" charset="-122"/>
+                <a:cs typeface="Arial" pitchFamily="34" charset="-120"/>
+              </a:rPr>
+              <a:t>W</a:t>
             </a:r>
             <a:pPr algn="l" indent="0" marL="0">
               <a:lnSpc>
@@ -6172,57 +6080,6 @@
                 <a:ea typeface="Arial" pitchFamily="34" charset="-122"/>
                 <a:cs typeface="Arial" pitchFamily="34" charset="-120"/>
               </a:rPr>
-              <a:t>x</a:t>
-            </a:r>
-            <a:pPr algn="l" indent="0" marL="0">
-              <a:lnSpc>
-                <a:spcPts val="1500"/>
-              </a:lnSpc>
-              <a:buNone/>
-            </a:pPr>
-            <a:r>
-              <a:rPr lang="en-US" sz="950" baseline="-40000" dirty="0">
-                <a:solidFill>
-                  <a:srgbClr val="000000"/>
-                </a:solidFill>
-                <a:latin typeface="Arial" pitchFamily="34" charset="0"/>
-                <a:ea typeface="Arial" pitchFamily="34" charset="-122"/>
-                <a:cs typeface="Arial" pitchFamily="34" charset="-120"/>
-              </a:rPr>
-              <a:t>2</a:t>
-            </a:r>
-            <a:pPr algn="l" indent="0" marL="0">
-              <a:lnSpc>
-                <a:spcPts val="1500"/>
-              </a:lnSpc>
-              <a:buNone/>
-            </a:pPr>
-            <a:r>
-              <a:rPr lang="en-US" sz="1300" dirty="0">
-                <a:solidFill>
-                  <a:srgbClr val="000000"/>
-                </a:solidFill>
-                <a:latin typeface="Arial" pitchFamily="34" charset="0"/>
-                <a:ea typeface="Arial" pitchFamily="34" charset="-122"/>
-                <a:cs typeface="Arial" pitchFamily="34" charset="-120"/>
-              </a:rPr>
-              <a:t>)</a:t>
-            </a:r>
-            <a:pPr algn="l" indent="0" marL="0">
-              <a:lnSpc>
-                <a:spcPts val="1500"/>
-              </a:lnSpc>
-              <a:buNone/>
-            </a:pPr>
-            <a:r>
-              <a:rPr lang="en-US" sz="1300" dirty="0">
-                <a:solidFill>
-                  <a:srgbClr val="000000"/>
-                </a:solidFill>
-                <a:latin typeface="Arial" pitchFamily="34" charset="0"/>
-                <a:ea typeface="Arial" pitchFamily="34" charset="-122"/>
-                <a:cs typeface="Arial" pitchFamily="34" charset="-120"/>
-              </a:rPr>
               <a:t> = </a:t>
             </a:r>
             <a:endParaRPr lang="en-US" sz="1300" dirty="0"/>
@@ -6231,55 +6088,13 @@
       </p:sp>
       <p:sp>
         <p:nvSpPr>
-          <p:cNvPr id="126" name="Text 124"/>
-          <p:cNvSpPr/>
-          <p:nvPr/>
-        </p:nvSpPr>
-        <p:spPr>
-          <a:xfrm>
-            <a:off x="4241800" y="2851150"/>
-            <a:ext cx="558800" cy="228600"/>
-          </a:xfrm>
-          <a:prstGeom prst="rect">
-            <a:avLst/>
-          </a:prstGeom>
-          <a:noFill/>
-          <a:ln/>
-        </p:spPr>
-        <p:txBody>
-          <a:bodyPr wrap="square" lIns="0" tIns="0" rIns="0" bIns="0" rtlCol="0" anchor="ctr"/>
-          <a:lstStyle/>
-          <a:p>
-            <a:pPr algn="l" indent="0" marL="0">
-              <a:lnSpc>
-                <a:spcPts val="1500"/>
-              </a:lnSpc>
-              <a:buNone/>
-            </a:pPr>
-            <a:r>
-              <a:rPr lang="en-US" sz="1300" spc="300" kern="0" dirty="0">
-                <a:solidFill>
-                  <a:srgbClr val="0000FF"/>
-                </a:solidFill>
-                <a:latin typeface="Arial" pitchFamily="34" charset="0"/>
-                <a:ea typeface="Arial" pitchFamily="34" charset="-122"/>
-                <a:cs typeface="Arial" pitchFamily="34" charset="-120"/>
-              </a:rPr>
-              <a:t>1 2 1</a:t>
-            </a:r>
-            <a:endParaRPr lang="en-US" sz="1300" dirty="0"/>
-          </a:p>
-        </p:txBody>
-      </p:sp>
-      <p:sp>
-        <p:nvSpPr>
-          <p:cNvPr id="127" name="Shape 125"/>
-          <p:cNvSpPr/>
-          <p:nvPr/>
-        </p:nvSpPr>
-        <p:spPr>
-          <a:xfrm>
-            <a:off x="4819650" y="2705100"/>
+          <p:cNvPr id="124" name="Shape 122"/>
+          <p:cNvSpPr/>
+          <p:nvPr/>
+        </p:nvSpPr>
+        <p:spPr>
+          <a:xfrm>
+            <a:off x="9264650" y="1854200"/>
             <a:ext cx="12700" cy="584200"/>
           </a:xfrm>
           <a:prstGeom prst="rect">
@@ -6293,13 +6108,13 @@
       </p:sp>
       <p:sp>
         <p:nvSpPr>
-          <p:cNvPr id="128" name="Shape 126"/>
-          <p:cNvSpPr/>
-          <p:nvPr/>
-        </p:nvSpPr>
-        <p:spPr>
-          <a:xfrm>
-            <a:off x="5124450" y="2705100"/>
+          <p:cNvPr id="125" name="Shape 123"/>
+          <p:cNvSpPr/>
+          <p:nvPr/>
+        </p:nvSpPr>
+        <p:spPr>
+          <a:xfrm>
+            <a:off x="9569450" y="1854200"/>
             <a:ext cx="12700" cy="584200"/>
           </a:xfrm>
           <a:prstGeom prst="rect">
@@ -6313,41 +6128,235 @@
       </p:sp>
       <p:sp>
         <p:nvSpPr>
+          <p:cNvPr id="126" name="Text 124"/>
+          <p:cNvSpPr/>
+          <p:nvPr/>
+        </p:nvSpPr>
+        <p:spPr>
+          <a:xfrm>
+            <a:off x="9277350" y="1847850"/>
+            <a:ext cx="279400" cy="203200"/>
+          </a:xfrm>
+          <a:prstGeom prst="rect">
+            <a:avLst/>
+          </a:prstGeom>
+          <a:noFill/>
+          <a:ln/>
+        </p:spPr>
+        <p:txBody>
+          <a:bodyPr wrap="square" lIns="0" tIns="0" rIns="0" bIns="0" rtlCol="0" anchor="ctr"/>
+          <a:lstStyle/>
+          <a:p>
+            <a:pPr algn="ctr" indent="0" marL="0">
+              <a:lnSpc>
+                <a:spcPts val="1500"/>
+              </a:lnSpc>
+              <a:buNone/>
+            </a:pPr>
+            <a:r>
+              <a:rPr lang="en-US" sz="1300" dirty="0">
+                <a:solidFill>
+                  <a:srgbClr val="000000"/>
+                </a:solidFill>
+                <a:latin typeface="Arial" pitchFamily="34" charset="0"/>
+                <a:ea typeface="Arial" pitchFamily="34" charset="-122"/>
+                <a:cs typeface="Arial" pitchFamily="34" charset="-120"/>
+              </a:rPr>
+              <a:t>14</a:t>
+            </a:r>
+            <a:endParaRPr lang="en-US" sz="1300" dirty="0"/>
+          </a:p>
+        </p:txBody>
+      </p:sp>
+      <p:sp>
+        <p:nvSpPr>
+          <p:cNvPr id="127" name="Text 125"/>
+          <p:cNvSpPr/>
+          <p:nvPr/>
+        </p:nvSpPr>
+        <p:spPr>
+          <a:xfrm>
+            <a:off x="9277350" y="2044700"/>
+            <a:ext cx="279400" cy="203200"/>
+          </a:xfrm>
+          <a:prstGeom prst="rect">
+            <a:avLst/>
+          </a:prstGeom>
+          <a:noFill/>
+          <a:ln/>
+        </p:spPr>
+        <p:txBody>
+          <a:bodyPr wrap="square" lIns="0" tIns="0" rIns="0" bIns="0" rtlCol="0" anchor="ctr"/>
+          <a:lstStyle/>
+          <a:p>
+            <a:pPr algn="ctr" indent="0" marL="0">
+              <a:lnSpc>
+                <a:spcPts val="1500"/>
+              </a:lnSpc>
+              <a:buNone/>
+            </a:pPr>
+            <a:r>
+              <a:rPr lang="en-US" sz="1300" dirty="0">
+                <a:solidFill>
+                  <a:srgbClr val="000000"/>
+                </a:solidFill>
+                <a:latin typeface="Arial" pitchFamily="34" charset="0"/>
+                <a:ea typeface="Arial" pitchFamily="34" charset="-122"/>
+                <a:cs typeface="Arial" pitchFamily="34" charset="-120"/>
+              </a:rPr>
+              <a:t>−4</a:t>
+            </a:r>
+            <a:endParaRPr lang="en-US" sz="1300" dirty="0"/>
+          </a:p>
+        </p:txBody>
+      </p:sp>
+      <p:sp>
+        <p:nvSpPr>
+          <p:cNvPr id="128" name="Text 126"/>
+          <p:cNvSpPr/>
+          <p:nvPr/>
+        </p:nvSpPr>
+        <p:spPr>
+          <a:xfrm>
+            <a:off x="9277350" y="2241550"/>
+            <a:ext cx="279400" cy="203200"/>
+          </a:xfrm>
+          <a:prstGeom prst="rect">
+            <a:avLst/>
+          </a:prstGeom>
+          <a:noFill/>
+          <a:ln/>
+        </p:spPr>
+        <p:txBody>
+          <a:bodyPr wrap="square" lIns="0" tIns="0" rIns="0" bIns="0" rtlCol="0" anchor="ctr"/>
+          <a:lstStyle/>
+          <a:p>
+            <a:pPr algn="ctr" indent="0" marL="0">
+              <a:lnSpc>
+                <a:spcPts val="1500"/>
+              </a:lnSpc>
+              <a:buNone/>
+            </a:pPr>
+            <a:r>
+              <a:rPr lang="en-US" sz="1300" dirty="0">
+                <a:solidFill>
+                  <a:srgbClr val="000000"/>
+                </a:solidFill>
+                <a:latin typeface="Arial" pitchFamily="34" charset="0"/>
+                <a:ea typeface="Arial" pitchFamily="34" charset="-122"/>
+                <a:cs typeface="Arial" pitchFamily="34" charset="-120"/>
+              </a:rPr>
+              <a:t>0</a:t>
+            </a:r>
+            <a:endParaRPr lang="en-US" sz="1300" dirty="0"/>
+          </a:p>
+        </p:txBody>
+      </p:sp>
+      <p:sp>
+        <p:nvSpPr>
           <p:cNvPr id="129" name="Text 127"/>
           <p:cNvSpPr/>
           <p:nvPr/>
         </p:nvSpPr>
         <p:spPr>
           <a:xfrm>
-            <a:off x="4832350" y="2698750"/>
-            <a:ext cx="279400" cy="203200"/>
-          </a:xfrm>
-          <a:prstGeom prst="rect">
-            <a:avLst/>
-          </a:prstGeom>
-          <a:noFill/>
-          <a:ln/>
-        </p:spPr>
-        <p:txBody>
-          <a:bodyPr wrap="square" lIns="0" tIns="0" rIns="0" bIns="0" rtlCol="0" anchor="ctr"/>
-          <a:lstStyle/>
-          <a:p>
-            <a:pPr algn="ctr" indent="0" marL="0">
-              <a:lnSpc>
-                <a:spcPts val="1500"/>
-              </a:lnSpc>
-              <a:buNone/>
-            </a:pPr>
-            <a:r>
-              <a:rPr lang="en-US" sz="1300" dirty="0">
-                <a:solidFill>
-                  <a:srgbClr val="008000"/>
-                </a:solidFill>
-                <a:latin typeface="Arial" pitchFamily="34" charset="0"/>
-                <a:ea typeface="Arial" pitchFamily="34" charset="-122"/>
-                <a:cs typeface="Arial" pitchFamily="34" charset="-120"/>
-              </a:rPr>
-              <a:t>14</a:t>
+            <a:off x="3594100" y="2851150"/>
+            <a:ext cx="635000" cy="228600"/>
+          </a:xfrm>
+          <a:prstGeom prst="rect">
+            <a:avLst/>
+          </a:prstGeom>
+          <a:noFill/>
+          <a:ln/>
+        </p:spPr>
+        <p:txBody>
+          <a:bodyPr wrap="square" lIns="0" tIns="0" rIns="0" bIns="0" rtlCol="0" anchor="ctr"/>
+          <a:lstStyle/>
+          <a:p>
+            <a:pPr algn="l" indent="0" marL="0">
+              <a:lnSpc>
+                <a:spcPts val="1500"/>
+              </a:lnSpc>
+              <a:buNone/>
+            </a:pPr>
+            <a:r>
+              <a:rPr lang="en-US" sz="1300" dirty="0">
+                <a:solidFill>
+                  <a:srgbClr val="000000"/>
+                </a:solidFill>
+                <a:latin typeface="Arial" pitchFamily="34" charset="0"/>
+                <a:ea typeface="Arial" pitchFamily="34" charset="-122"/>
+                <a:cs typeface="Arial" pitchFamily="34" charset="-120"/>
+              </a:rPr>
+              <a:t>d(</a:t>
+            </a:r>
+            <a:pPr algn="l" indent="0" marL="0">
+              <a:lnSpc>
+                <a:spcPts val="1500"/>
+              </a:lnSpc>
+              <a:buNone/>
+            </a:pPr>
+            <a:r>
+              <a:rPr lang="en-US" sz="1300" dirty="0">
+                <a:solidFill>
+                  <a:srgbClr val="000000"/>
+                </a:solidFill>
+                <a:latin typeface="Arial" pitchFamily="34" charset="0"/>
+                <a:ea typeface="Arial" pitchFamily="34" charset="-122"/>
+                <a:cs typeface="Arial" pitchFamily="34" charset="-120"/>
+              </a:rPr>
+              <a:t>x</a:t>
+            </a:r>
+            <a:pPr algn="l" indent="0" marL="0">
+              <a:lnSpc>
+                <a:spcPts val="1500"/>
+              </a:lnSpc>
+              <a:buNone/>
+            </a:pPr>
+            <a:r>
+              <a:rPr lang="en-US" sz="950" baseline="-40000" dirty="0">
+                <a:solidFill>
+                  <a:srgbClr val="000000"/>
+                </a:solidFill>
+                <a:latin typeface="Arial" pitchFamily="34" charset="0"/>
+                <a:ea typeface="Arial" pitchFamily="34" charset="-122"/>
+                <a:cs typeface="Arial" pitchFamily="34" charset="-120"/>
+              </a:rPr>
+              <a:t>2</a:t>
+            </a:r>
+            <a:pPr algn="l" indent="0" marL="0">
+              <a:lnSpc>
+                <a:spcPts val="1500"/>
+              </a:lnSpc>
+              <a:buNone/>
+            </a:pPr>
+            <a:r>
+              <a:rPr lang="en-US" sz="1300" dirty="0">
+                <a:solidFill>
+                  <a:srgbClr val="000000"/>
+                </a:solidFill>
+                <a:latin typeface="Arial" pitchFamily="34" charset="0"/>
+                <a:ea typeface="Arial" pitchFamily="34" charset="-122"/>
+                <a:cs typeface="Arial" pitchFamily="34" charset="-120"/>
+              </a:rPr>
+              <a:t>)</a:t>
+            </a:r>
+            <a:pPr algn="l" indent="0" marL="0">
+              <a:lnSpc>
+                <a:spcPts val="1500"/>
+              </a:lnSpc>
+              <a:buNone/>
+            </a:pPr>
+            <a:r>
+              <a:rPr lang="en-US" sz="1300" dirty="0">
+                <a:solidFill>
+                  <a:srgbClr val="000000"/>
+                </a:solidFill>
+                <a:latin typeface="Arial" pitchFamily="34" charset="0"/>
+                <a:ea typeface="Arial" pitchFamily="34" charset="-122"/>
+                <a:cs typeface="Arial" pitchFamily="34" charset="-120"/>
+              </a:rPr>
+              <a:t> = </a:t>
             </a:r>
             <a:endParaRPr lang="en-US" sz="1300" dirty="0"/>
           </a:p>
@@ -6361,35 +6370,35 @@
         </p:nvSpPr>
         <p:spPr>
           <a:xfrm>
-            <a:off x="4832350" y="2895600"/>
-            <a:ext cx="279400" cy="203200"/>
-          </a:xfrm>
-          <a:prstGeom prst="rect">
-            <a:avLst/>
-          </a:prstGeom>
-          <a:noFill/>
-          <a:ln/>
-        </p:spPr>
-        <p:txBody>
-          <a:bodyPr wrap="square" lIns="0" tIns="0" rIns="0" bIns="0" rtlCol="0" anchor="ctr"/>
-          <a:lstStyle/>
-          <a:p>
-            <a:pPr algn="ctr" indent="0" marL="0">
-              <a:lnSpc>
-                <a:spcPts val="1500"/>
-              </a:lnSpc>
-              <a:buNone/>
-            </a:pPr>
-            <a:r>
-              <a:rPr lang="en-US" sz="1300" dirty="0">
-                <a:solidFill>
-                  <a:srgbClr val="008000"/>
-                </a:solidFill>
-                <a:latin typeface="Arial" pitchFamily="34" charset="0"/>
-                <a:ea typeface="Arial" pitchFamily="34" charset="-122"/>
-                <a:cs typeface="Arial" pitchFamily="34" charset="-120"/>
-              </a:rPr>
-              <a:t>−4</a:t>
+            <a:off x="4187190" y="2701290"/>
+            <a:ext cx="127000" cy="190500"/>
+          </a:xfrm>
+          <a:prstGeom prst="rect">
+            <a:avLst/>
+          </a:prstGeom>
+          <a:noFill/>
+          <a:ln/>
+        </p:spPr>
+        <p:txBody>
+          <a:bodyPr wrap="square" lIns="0" tIns="0" rIns="0" bIns="0" rtlCol="0" anchor="ctr"/>
+          <a:lstStyle/>
+          <a:p>
+            <a:pPr algn="ctr" indent="0" marL="0">
+              <a:lnSpc>
+                <a:spcPts val="1500"/>
+              </a:lnSpc>
+              <a:buNone/>
+            </a:pPr>
+            <a:r>
+              <a:rPr lang="en-US" sz="1300" dirty="0">
+                <a:solidFill>
+                  <a:srgbClr val="0000FF"/>
+                </a:solidFill>
+                <a:latin typeface="Arial" pitchFamily="34" charset="0"/>
+                <a:ea typeface="Arial" pitchFamily="34" charset="-122"/>
+                <a:cs typeface="Arial" pitchFamily="34" charset="-120"/>
+              </a:rPr>
+              <a:t>1</a:t>
             </a:r>
             <a:endParaRPr lang="en-US" sz="1300" dirty="0"/>
           </a:p>
@@ -6403,35 +6412,35 @@
         </p:nvSpPr>
         <p:spPr>
           <a:xfrm>
-            <a:off x="4832350" y="3092450"/>
-            <a:ext cx="279400" cy="203200"/>
-          </a:xfrm>
-          <a:prstGeom prst="rect">
-            <a:avLst/>
-          </a:prstGeom>
-          <a:noFill/>
-          <a:ln/>
-        </p:spPr>
-        <p:txBody>
-          <a:bodyPr wrap="square" lIns="0" tIns="0" rIns="0" bIns="0" rtlCol="0" anchor="ctr"/>
-          <a:lstStyle/>
-          <a:p>
-            <a:pPr algn="ctr" indent="0" marL="0">
-              <a:lnSpc>
-                <a:spcPts val="1500"/>
-              </a:lnSpc>
-              <a:buNone/>
-            </a:pPr>
-            <a:r>
-              <a:rPr lang="en-US" sz="1300" dirty="0">
-                <a:solidFill>
-                  <a:srgbClr val="008000"/>
-                </a:solidFill>
-                <a:latin typeface="Arial" pitchFamily="34" charset="0"/>
-                <a:ea typeface="Arial" pitchFamily="34" charset="-122"/>
-                <a:cs typeface="Arial" pitchFamily="34" charset="-120"/>
-              </a:rPr>
-              <a:t>0</a:t>
+            <a:off x="4414520" y="2701290"/>
+            <a:ext cx="127000" cy="190500"/>
+          </a:xfrm>
+          <a:prstGeom prst="rect">
+            <a:avLst/>
+          </a:prstGeom>
+          <a:noFill/>
+          <a:ln/>
+        </p:spPr>
+        <p:txBody>
+          <a:bodyPr wrap="square" lIns="0" tIns="0" rIns="0" bIns="0" rtlCol="0" anchor="ctr"/>
+          <a:lstStyle/>
+          <a:p>
+            <a:pPr algn="ctr" indent="0" marL="0">
+              <a:lnSpc>
+                <a:spcPts val="1500"/>
+              </a:lnSpc>
+              <a:buNone/>
+            </a:pPr>
+            <a:r>
+              <a:rPr lang="en-US" sz="1300" dirty="0">
+                <a:solidFill>
+                  <a:srgbClr val="0000FF"/>
+                </a:solidFill>
+                <a:latin typeface="Arial" pitchFamily="34" charset="0"/>
+                <a:ea typeface="Arial" pitchFamily="34" charset="-122"/>
+                <a:cs typeface="Arial" pitchFamily="34" charset="-120"/>
+              </a:rPr>
+              <a:t>2</a:t>
             </a:r>
             <a:endParaRPr lang="en-US" sz="1300" dirty="0"/>
           </a:p>
@@ -6445,227 +6454,50 @@
         </p:nvSpPr>
         <p:spPr>
           <a:xfrm>
-            <a:off x="5219700" y="2851150"/>
-            <a:ext cx="736600" cy="228600"/>
-          </a:xfrm>
-          <a:prstGeom prst="rect">
-            <a:avLst/>
-          </a:prstGeom>
-          <a:noFill/>
-          <a:ln/>
-        </p:spPr>
-        <p:txBody>
-          <a:bodyPr wrap="square" lIns="0" tIns="0" rIns="0" bIns="0" rtlCol="0" anchor="ctr"/>
-          <a:lstStyle/>
-          <a:p>
-            <a:pPr algn="l" indent="0" marL="0">
-              <a:lnSpc>
-                <a:spcPts val="1500"/>
-              </a:lnSpc>
-              <a:buNone/>
-            </a:pPr>
-            <a:r>
-              <a:rPr lang="en-US" sz="1300" dirty="0">
-                <a:solidFill>
-                  <a:srgbClr val="000000"/>
-                </a:solidFill>
-                <a:latin typeface="Arial" pitchFamily="34" charset="0"/>
-                <a:ea typeface="Arial" pitchFamily="34" charset="-122"/>
-                <a:cs typeface="Arial" pitchFamily="34" charset="-120"/>
-              </a:rPr>
-              <a:t>= 6</a:t>
-            </a:r>
-            <a:endParaRPr lang="en-US" sz="1300" dirty="0"/>
-          </a:p>
-        </p:txBody>
-      </p:sp>
-      <p:sp>
-        <p:nvSpPr>
-          <p:cNvPr id="133" name="Text 131"/>
-          <p:cNvSpPr/>
-          <p:nvPr/>
-        </p:nvSpPr>
-        <p:spPr>
-          <a:xfrm>
-            <a:off x="6350000" y="2851150"/>
-            <a:ext cx="203200" cy="228600"/>
-          </a:xfrm>
-          <a:prstGeom prst="rect">
-            <a:avLst/>
-          </a:prstGeom>
-          <a:noFill/>
-          <a:ln/>
-        </p:spPr>
-        <p:txBody>
-          <a:bodyPr wrap="square" lIns="0" tIns="0" rIns="0" bIns="0" rtlCol="0" anchor="ctr"/>
-          <a:lstStyle/>
-          <a:p>
-            <a:pPr algn="l" indent="0" marL="0">
-              <a:lnSpc>
-                <a:spcPts val="1500"/>
-              </a:lnSpc>
-              <a:buNone/>
-            </a:pPr>
-            <a:r>
-              <a:rPr lang="en-US" sz="1300" dirty="0">
-                <a:solidFill>
-                  <a:srgbClr val="000000"/>
-                </a:solidFill>
-                <a:latin typeface="Arial" pitchFamily="34" charset="0"/>
-                <a:ea typeface="Arial" pitchFamily="34" charset="-122"/>
-                <a:cs typeface="Arial" pitchFamily="34" charset="-120"/>
-              </a:rPr>
-              <a:t>⇒</a:t>
-            </a:r>
-            <a:endParaRPr lang="en-US" sz="1300" dirty="0"/>
-          </a:p>
-        </p:txBody>
-      </p:sp>
-      <p:sp>
-        <p:nvSpPr>
-          <p:cNvPr id="134" name="Text 132"/>
-          <p:cNvSpPr/>
-          <p:nvPr/>
-        </p:nvSpPr>
-        <p:spPr>
-          <a:xfrm>
-            <a:off x="6591300" y="2851150"/>
-            <a:ext cx="2197100" cy="228600"/>
-          </a:xfrm>
-          <a:prstGeom prst="rect">
-            <a:avLst/>
-          </a:prstGeom>
-          <a:noFill/>
-          <a:ln/>
-        </p:spPr>
-        <p:txBody>
-          <a:bodyPr wrap="square" lIns="0" tIns="0" rIns="0" bIns="0" rtlCol="0" anchor="ctr"/>
-          <a:lstStyle/>
-          <a:p>
-            <a:pPr algn="l" indent="0" marL="0">
-              <a:lnSpc>
-                <a:spcPts val="1500"/>
-              </a:lnSpc>
-              <a:buNone/>
-            </a:pPr>
-            <a:r>
-              <a:rPr lang="en-US" sz="1300" dirty="0">
-                <a:solidFill>
-                  <a:srgbClr val="000000"/>
-                </a:solidFill>
-                <a:latin typeface="Arial" pitchFamily="34" charset="0"/>
-                <a:ea typeface="Arial" pitchFamily="34" charset="-122"/>
-                <a:cs typeface="Arial" pitchFamily="34" charset="-120"/>
-              </a:rPr>
-              <a:t>Keep same </a:t>
-            </a:r>
-            <a:pPr algn="l" indent="0" marL="0">
-              <a:lnSpc>
-                <a:spcPts val="1500"/>
-              </a:lnSpc>
-              <a:buNone/>
-            </a:pPr>
-            <a:r>
-              <a:rPr lang="en-US" sz="1300" u="sng" dirty="0">
-                <a:solidFill>
-                  <a:srgbClr val="000000"/>
-                </a:solidFill>
-                <a:latin typeface="Arial" pitchFamily="34" charset="0"/>
-                <a:ea typeface="Arial" pitchFamily="34" charset="-122"/>
-                <a:cs typeface="Arial" pitchFamily="34" charset="-120"/>
-              </a:rPr>
-              <a:t>W</a:t>
-            </a:r>
-            <a:pPr algn="l" indent="0" marL="0">
-              <a:lnSpc>
-                <a:spcPts val="1500"/>
-              </a:lnSpc>
-              <a:buNone/>
-            </a:pPr>
-            <a:r>
-              <a:rPr lang="en-US" sz="1300" dirty="0">
-                <a:solidFill>
-                  <a:srgbClr val="000000"/>
-                </a:solidFill>
-                <a:latin typeface="Arial" pitchFamily="34" charset="0"/>
-                <a:ea typeface="Arial" pitchFamily="34" charset="-122"/>
-                <a:cs typeface="Arial" pitchFamily="34" charset="-120"/>
-              </a:rPr>
-              <a:t>eight</a:t>
-            </a:r>
-            <a:endParaRPr lang="en-US" sz="1300" dirty="0"/>
-          </a:p>
-        </p:txBody>
-      </p:sp>
-      <p:sp>
-        <p:nvSpPr>
-          <p:cNvPr id="135" name="Text 133"/>
-          <p:cNvSpPr/>
-          <p:nvPr/>
-        </p:nvSpPr>
-        <p:spPr>
-          <a:xfrm>
-            <a:off x="8864600" y="2851150"/>
-            <a:ext cx="342900" cy="228600"/>
-          </a:xfrm>
-          <a:prstGeom prst="rect">
-            <a:avLst/>
-          </a:prstGeom>
-          <a:noFill/>
-          <a:ln/>
-        </p:spPr>
-        <p:txBody>
-          <a:bodyPr wrap="square" lIns="0" tIns="0" rIns="0" bIns="0" rtlCol="0" anchor="ctr"/>
-          <a:lstStyle/>
-          <a:p>
-            <a:pPr algn="l" indent="0" marL="0">
-              <a:lnSpc>
-                <a:spcPts val="1500"/>
-              </a:lnSpc>
-              <a:buNone/>
-            </a:pPr>
-            <a:r>
-              <a:rPr lang="en-US" sz="1300" u="sng" dirty="0">
-                <a:solidFill>
-                  <a:srgbClr val="000000"/>
-                </a:solidFill>
-                <a:latin typeface="Arial" pitchFamily="34" charset="0"/>
-                <a:ea typeface="Arial" pitchFamily="34" charset="-122"/>
-                <a:cs typeface="Arial" pitchFamily="34" charset="-120"/>
-              </a:rPr>
-              <a:t>W</a:t>
-            </a:r>
-            <a:pPr algn="l" indent="0" marL="0">
-              <a:lnSpc>
-                <a:spcPts val="1500"/>
-              </a:lnSpc>
-              <a:buNone/>
-            </a:pPr>
-            <a:r>
-              <a:rPr lang="en-US" sz="1300" dirty="0">
-                <a:solidFill>
-                  <a:srgbClr val="000000"/>
-                </a:solidFill>
-                <a:latin typeface="Arial" pitchFamily="34" charset="0"/>
-                <a:ea typeface="Arial" pitchFamily="34" charset="-122"/>
-                <a:cs typeface="Arial" pitchFamily="34" charset="-120"/>
-              </a:rPr>
-              <a:t> = </a:t>
-            </a:r>
-            <a:endParaRPr lang="en-US" sz="1300" dirty="0"/>
-          </a:p>
-        </p:txBody>
-      </p:sp>
-      <p:sp>
-        <p:nvSpPr>
-          <p:cNvPr id="136" name="Shape 134"/>
-          <p:cNvSpPr/>
-          <p:nvPr/>
-        </p:nvSpPr>
-        <p:spPr>
-          <a:xfrm>
-            <a:off x="9201150" y="2705100"/>
-            <a:ext cx="12700" cy="584200"/>
+            <a:off x="4644390" y="2701290"/>
+            <a:ext cx="127000" cy="190500"/>
+          </a:xfrm>
+          <a:prstGeom prst="rect">
+            <a:avLst/>
+          </a:prstGeom>
+          <a:noFill/>
+          <a:ln/>
+        </p:spPr>
+        <p:txBody>
+          <a:bodyPr wrap="square" lIns="0" tIns="0" rIns="0" bIns="0" rtlCol="0" anchor="ctr"/>
+          <a:lstStyle/>
+          <a:p>
+            <a:pPr algn="ctr" indent="0" marL="0">
+              <a:lnSpc>
+                <a:spcPts val="1500"/>
+              </a:lnSpc>
+              <a:buNone/>
+            </a:pPr>
+            <a:r>
+              <a:rPr lang="en-US" sz="1300" dirty="0">
+                <a:solidFill>
+                  <a:srgbClr val="0000FF"/>
+                </a:solidFill>
+                <a:latin typeface="Arial" pitchFamily="34" charset="0"/>
+                <a:ea typeface="Arial" pitchFamily="34" charset="-122"/>
+                <a:cs typeface="Arial" pitchFamily="34" charset="-120"/>
+              </a:rPr>
+              <a:t>1</a:t>
+            </a:r>
+            <a:endParaRPr lang="en-US" sz="1300" dirty="0"/>
+          </a:p>
+        </p:txBody>
+      </p:sp>
+      <p:sp>
+        <p:nvSpPr>
+          <p:cNvPr id="133" name="Shape 131"/>
+          <p:cNvSpPr/>
+          <p:nvPr/>
+        </p:nvSpPr>
+        <p:spPr>
+          <a:xfrm>
+            <a:off x="4178300" y="2717800"/>
+            <a:ext cx="12700" cy="165100"/>
           </a:xfrm>
           <a:prstGeom prst="rect">
             <a:avLst/>
@@ -6678,14 +6510,14 @@
       </p:sp>
       <p:sp>
         <p:nvSpPr>
-          <p:cNvPr id="137" name="Shape 135"/>
-          <p:cNvSpPr/>
-          <p:nvPr/>
-        </p:nvSpPr>
-        <p:spPr>
-          <a:xfrm>
-            <a:off x="9505950" y="2705100"/>
-            <a:ext cx="12700" cy="584200"/>
+          <p:cNvPr id="134" name="Shape 132"/>
+          <p:cNvSpPr/>
+          <p:nvPr/>
+        </p:nvSpPr>
+        <p:spPr>
+          <a:xfrm>
+            <a:off x="4762500" y="2730500"/>
+            <a:ext cx="12700" cy="152400"/>
           </a:xfrm>
           <a:prstGeom prst="rect">
             <a:avLst/>
@@ -6698,292 +6530,14 @@
       </p:sp>
       <p:sp>
         <p:nvSpPr>
-          <p:cNvPr id="138" name="Text 136"/>
-          <p:cNvSpPr/>
-          <p:nvPr/>
-        </p:nvSpPr>
-        <p:spPr>
-          <a:xfrm>
-            <a:off x="9213850" y="2698750"/>
-            <a:ext cx="279400" cy="203200"/>
-          </a:xfrm>
-          <a:prstGeom prst="rect">
-            <a:avLst/>
-          </a:prstGeom>
-          <a:noFill/>
-          <a:ln/>
-        </p:spPr>
-        <p:txBody>
-          <a:bodyPr wrap="square" lIns="0" tIns="0" rIns="0" bIns="0" rtlCol="0" anchor="ctr"/>
-          <a:lstStyle/>
-          <a:p>
-            <a:pPr algn="ctr" indent="0" marL="0">
-              <a:lnSpc>
-                <a:spcPts val="1500"/>
-              </a:lnSpc>
-              <a:buNone/>
-            </a:pPr>
-            <a:r>
-              <a:rPr lang="en-US" sz="1300" dirty="0">
-                <a:solidFill>
-                  <a:srgbClr val="000000"/>
-                </a:solidFill>
-                <a:latin typeface="Arial" pitchFamily="34" charset="0"/>
-                <a:ea typeface="Arial" pitchFamily="34" charset="-122"/>
-                <a:cs typeface="Arial" pitchFamily="34" charset="-120"/>
-              </a:rPr>
-              <a:t>14</a:t>
-            </a:r>
-            <a:endParaRPr lang="en-US" sz="1300" dirty="0"/>
-          </a:p>
-        </p:txBody>
-      </p:sp>
-      <p:sp>
-        <p:nvSpPr>
-          <p:cNvPr id="139" name="Text 137"/>
-          <p:cNvSpPr/>
-          <p:nvPr/>
-        </p:nvSpPr>
-        <p:spPr>
-          <a:xfrm>
-            <a:off x="9213850" y="2895600"/>
-            <a:ext cx="279400" cy="203200"/>
-          </a:xfrm>
-          <a:prstGeom prst="rect">
-            <a:avLst/>
-          </a:prstGeom>
-          <a:noFill/>
-          <a:ln/>
-        </p:spPr>
-        <p:txBody>
-          <a:bodyPr wrap="square" lIns="0" tIns="0" rIns="0" bIns="0" rtlCol="0" anchor="ctr"/>
-          <a:lstStyle/>
-          <a:p>
-            <a:pPr algn="ctr" indent="0" marL="0">
-              <a:lnSpc>
-                <a:spcPts val="1500"/>
-              </a:lnSpc>
-              <a:buNone/>
-            </a:pPr>
-            <a:r>
-              <a:rPr lang="en-US" sz="1300" dirty="0">
-                <a:solidFill>
-                  <a:srgbClr val="000000"/>
-                </a:solidFill>
-                <a:latin typeface="Arial" pitchFamily="34" charset="0"/>
-                <a:ea typeface="Arial" pitchFamily="34" charset="-122"/>
-                <a:cs typeface="Arial" pitchFamily="34" charset="-120"/>
-              </a:rPr>
-              <a:t>−4</a:t>
-            </a:r>
-            <a:endParaRPr lang="en-US" sz="1300" dirty="0"/>
-          </a:p>
-        </p:txBody>
-      </p:sp>
-      <p:sp>
-        <p:nvSpPr>
-          <p:cNvPr id="140" name="Text 138"/>
-          <p:cNvSpPr/>
-          <p:nvPr/>
-        </p:nvSpPr>
-        <p:spPr>
-          <a:xfrm>
-            <a:off x="9213850" y="3092450"/>
-            <a:ext cx="279400" cy="203200"/>
-          </a:xfrm>
-          <a:prstGeom prst="rect">
-            <a:avLst/>
-          </a:prstGeom>
-          <a:noFill/>
-          <a:ln/>
-        </p:spPr>
-        <p:txBody>
-          <a:bodyPr wrap="square" lIns="0" tIns="0" rIns="0" bIns="0" rtlCol="0" anchor="ctr"/>
-          <a:lstStyle/>
-          <a:p>
-            <a:pPr algn="ctr" indent="0" marL="0">
-              <a:lnSpc>
-                <a:spcPts val="1500"/>
-              </a:lnSpc>
-              <a:buNone/>
-            </a:pPr>
-            <a:r>
-              <a:rPr lang="en-US" sz="1300" dirty="0">
-                <a:solidFill>
-                  <a:srgbClr val="000000"/>
-                </a:solidFill>
-                <a:latin typeface="Arial" pitchFamily="34" charset="0"/>
-                <a:ea typeface="Arial" pitchFamily="34" charset="-122"/>
-                <a:cs typeface="Arial" pitchFamily="34" charset="-120"/>
-              </a:rPr>
-              <a:t>0</a:t>
-            </a:r>
-            <a:endParaRPr lang="en-US" sz="1300" dirty="0"/>
-          </a:p>
-        </p:txBody>
-      </p:sp>
-      <p:sp>
-        <p:nvSpPr>
-          <p:cNvPr id="141" name="Text 139"/>
-          <p:cNvSpPr/>
-          <p:nvPr/>
-        </p:nvSpPr>
-        <p:spPr>
-          <a:xfrm>
-            <a:off x="3594100" y="3689350"/>
-            <a:ext cx="635000" cy="228600"/>
-          </a:xfrm>
-          <a:prstGeom prst="rect">
-            <a:avLst/>
-          </a:prstGeom>
-          <a:noFill/>
-          <a:ln/>
-        </p:spPr>
-        <p:txBody>
-          <a:bodyPr wrap="square" lIns="0" tIns="0" rIns="0" bIns="0" rtlCol="0" anchor="ctr"/>
-          <a:lstStyle/>
-          <a:p>
-            <a:pPr algn="l" indent="0" marL="0">
-              <a:lnSpc>
-                <a:spcPts val="1500"/>
-              </a:lnSpc>
-              <a:buNone/>
-            </a:pPr>
-            <a:r>
-              <a:rPr lang="en-US" sz="1300" dirty="0">
-                <a:solidFill>
-                  <a:srgbClr val="000000"/>
-                </a:solidFill>
-                <a:latin typeface="Arial" pitchFamily="34" charset="0"/>
-                <a:ea typeface="Arial" pitchFamily="34" charset="-122"/>
-                <a:cs typeface="Arial" pitchFamily="34" charset="-120"/>
-              </a:rPr>
-              <a:t>d(</a:t>
-            </a:r>
-            <a:pPr algn="l" indent="0" marL="0">
-              <a:lnSpc>
-                <a:spcPts val="1500"/>
-              </a:lnSpc>
-              <a:buNone/>
-            </a:pPr>
-            <a:r>
-              <a:rPr lang="en-US" sz="1300" dirty="0">
-                <a:solidFill>
-                  <a:srgbClr val="000000"/>
-                </a:solidFill>
-                <a:latin typeface="Arial" pitchFamily="34" charset="0"/>
-                <a:ea typeface="Arial" pitchFamily="34" charset="-122"/>
-                <a:cs typeface="Arial" pitchFamily="34" charset="-120"/>
-              </a:rPr>
-              <a:t>x</a:t>
-            </a:r>
-            <a:pPr algn="l" indent="0" marL="0">
-              <a:lnSpc>
-                <a:spcPts val="1500"/>
-              </a:lnSpc>
-              <a:buNone/>
-            </a:pPr>
-            <a:r>
-              <a:rPr lang="en-US" sz="950" baseline="-40000" dirty="0">
-                <a:solidFill>
-                  <a:srgbClr val="000000"/>
-                </a:solidFill>
-                <a:latin typeface="Arial" pitchFamily="34" charset="0"/>
-                <a:ea typeface="Arial" pitchFamily="34" charset="-122"/>
-                <a:cs typeface="Arial" pitchFamily="34" charset="-120"/>
-              </a:rPr>
-              <a:t>3</a:t>
-            </a:r>
-            <a:pPr algn="l" indent="0" marL="0">
-              <a:lnSpc>
-                <a:spcPts val="1500"/>
-              </a:lnSpc>
-              <a:buNone/>
-            </a:pPr>
-            <a:r>
-              <a:rPr lang="en-US" sz="1300" dirty="0">
-                <a:solidFill>
-                  <a:srgbClr val="000000"/>
-                </a:solidFill>
-                <a:latin typeface="Arial" pitchFamily="34" charset="0"/>
-                <a:ea typeface="Arial" pitchFamily="34" charset="-122"/>
-                <a:cs typeface="Arial" pitchFamily="34" charset="-120"/>
-              </a:rPr>
-              <a:t>)</a:t>
-            </a:r>
-            <a:pPr algn="l" indent="0" marL="0">
-              <a:lnSpc>
-                <a:spcPts val="1500"/>
-              </a:lnSpc>
-              <a:buNone/>
-            </a:pPr>
-            <a:r>
-              <a:rPr lang="en-US" sz="1300" dirty="0">
-                <a:solidFill>
-                  <a:srgbClr val="000000"/>
-                </a:solidFill>
-                <a:latin typeface="Arial" pitchFamily="34" charset="0"/>
-                <a:ea typeface="Arial" pitchFamily="34" charset="-122"/>
-                <a:cs typeface="Arial" pitchFamily="34" charset="-120"/>
-              </a:rPr>
-              <a:t> = </a:t>
-            </a:r>
-            <a:endParaRPr lang="en-US" sz="1300" dirty="0"/>
-          </a:p>
-        </p:txBody>
-      </p:sp>
-      <p:sp>
-        <p:nvSpPr>
-          <p:cNvPr id="142" name="Text 140"/>
-          <p:cNvSpPr/>
-          <p:nvPr/>
-        </p:nvSpPr>
-        <p:spPr>
-          <a:xfrm>
-            <a:off x="4241800" y="3689350"/>
-            <a:ext cx="558800" cy="228600"/>
-          </a:xfrm>
-          <a:prstGeom prst="rect">
-            <a:avLst/>
-          </a:prstGeom>
-          <a:noFill/>
-          <a:ln/>
-        </p:spPr>
-        <p:txBody>
-          <a:bodyPr wrap="square" lIns="0" tIns="0" rIns="0" bIns="0" rtlCol="0" anchor="ctr"/>
-          <a:lstStyle/>
-          <a:p>
-            <a:pPr algn="l" indent="0" marL="0">
-              <a:lnSpc>
-                <a:spcPts val="1500"/>
-              </a:lnSpc>
-              <a:buNone/>
-            </a:pPr>
-            <a:r>
-              <a:rPr lang="en-US" sz="1300" spc="300" kern="0" dirty="0">
-                <a:solidFill>
-                  <a:srgbClr val="0000FF"/>
-                </a:solidFill>
-                <a:latin typeface="Arial" pitchFamily="34" charset="0"/>
-                <a:ea typeface="Arial" pitchFamily="34" charset="-122"/>
-                <a:cs typeface="Arial" pitchFamily="34" charset="-120"/>
-              </a:rPr>
-              <a:t>1 1 2</a:t>
-            </a:r>
-            <a:endParaRPr lang="en-US" sz="1300" dirty="0"/>
-          </a:p>
-        </p:txBody>
-      </p:sp>
-      <p:sp>
-        <p:nvSpPr>
-          <p:cNvPr id="143" name="Shape 141"/>
-          <p:cNvSpPr/>
-          <p:nvPr/>
-        </p:nvSpPr>
-        <p:spPr>
-          <a:xfrm>
-            <a:off x="4819650" y="3530600"/>
-            <a:ext cx="12700" cy="596900"/>
+          <p:cNvPr id="135" name="Shape 133"/>
+          <p:cNvSpPr/>
+          <p:nvPr/>
+        </p:nvSpPr>
+        <p:spPr>
+          <a:xfrm>
+            <a:off x="4819650" y="2705100"/>
+            <a:ext cx="12700" cy="584200"/>
           </a:xfrm>
           <a:prstGeom prst="rect">
             <a:avLst/>
@@ -6996,14 +6550,14 @@
       </p:sp>
       <p:sp>
         <p:nvSpPr>
-          <p:cNvPr id="144" name="Shape 142"/>
-          <p:cNvSpPr/>
-          <p:nvPr/>
-        </p:nvSpPr>
-        <p:spPr>
-          <a:xfrm>
-            <a:off x="5124450" y="3530600"/>
-            <a:ext cx="12700" cy="596900"/>
+          <p:cNvPr id="136" name="Shape 134"/>
+          <p:cNvSpPr/>
+          <p:nvPr/>
+        </p:nvSpPr>
+        <p:spPr>
+          <a:xfrm>
+            <a:off x="5124450" y="2705100"/>
+            <a:ext cx="12700" cy="584200"/>
           </a:xfrm>
           <a:prstGeom prst="rect">
             <a:avLst/>
@@ -7016,13 +6570,13 @@
       </p:sp>
       <p:sp>
         <p:nvSpPr>
-          <p:cNvPr id="145" name="Text 143"/>
-          <p:cNvSpPr/>
-          <p:nvPr/>
-        </p:nvSpPr>
-        <p:spPr>
-          <a:xfrm>
-            <a:off x="4832350" y="3524250"/>
+          <p:cNvPr id="137" name="Text 135"/>
+          <p:cNvSpPr/>
+          <p:nvPr/>
+        </p:nvSpPr>
+        <p:spPr>
+          <a:xfrm>
+            <a:off x="4832350" y="2698750"/>
             <a:ext cx="279400" cy="203200"/>
           </a:xfrm>
           <a:prstGeom prst="rect">
@@ -7058,13 +6612,13 @@
       </p:sp>
       <p:sp>
         <p:nvSpPr>
-          <p:cNvPr id="146" name="Text 144"/>
-          <p:cNvSpPr/>
-          <p:nvPr/>
-        </p:nvSpPr>
-        <p:spPr>
-          <a:xfrm>
-            <a:off x="4832350" y="3721100"/>
+          <p:cNvPr id="138" name="Text 136"/>
+          <p:cNvSpPr/>
+          <p:nvPr/>
+        </p:nvSpPr>
+        <p:spPr>
+          <a:xfrm>
+            <a:off x="4832350" y="2895600"/>
             <a:ext cx="279400" cy="203200"/>
           </a:xfrm>
           <a:prstGeom prst="rect">
@@ -7100,13 +6654,13 @@
       </p:sp>
       <p:sp>
         <p:nvSpPr>
-          <p:cNvPr id="147" name="Text 145"/>
-          <p:cNvSpPr/>
-          <p:nvPr/>
-        </p:nvSpPr>
-        <p:spPr>
-          <a:xfrm>
-            <a:off x="4832350" y="3917950"/>
+          <p:cNvPr id="139" name="Text 137"/>
+          <p:cNvSpPr/>
+          <p:nvPr/>
+        </p:nvSpPr>
+        <p:spPr>
+          <a:xfrm>
+            <a:off x="4832350" y="3092450"/>
             <a:ext cx="279400" cy="203200"/>
           </a:xfrm>
           <a:prstGeom prst="rect">
@@ -7142,13 +6696,13 @@
       </p:sp>
       <p:sp>
         <p:nvSpPr>
-          <p:cNvPr id="148" name="Text 146"/>
-          <p:cNvSpPr/>
-          <p:nvPr/>
-        </p:nvSpPr>
-        <p:spPr>
-          <a:xfrm>
-            <a:off x="5219700" y="3689350"/>
+          <p:cNvPr id="140" name="Text 138"/>
+          <p:cNvSpPr/>
+          <p:nvPr/>
+        </p:nvSpPr>
+        <p:spPr>
+          <a:xfrm>
+            <a:off x="5219700" y="2851150"/>
             <a:ext cx="736600" cy="228600"/>
           </a:xfrm>
           <a:prstGeom prst="rect">
@@ -7176,21 +6730,21 @@
                 <a:ea typeface="Arial" pitchFamily="34" charset="-122"/>
                 <a:cs typeface="Arial" pitchFamily="34" charset="-120"/>
               </a:rPr>
-              <a:t>= 10</a:t>
-            </a:r>
-            <a:endParaRPr lang="en-US" sz="1300" dirty="0"/>
-          </a:p>
-        </p:txBody>
-      </p:sp>
-      <p:sp>
-        <p:nvSpPr>
-          <p:cNvPr id="149" name="Text 147"/>
-          <p:cNvSpPr/>
-          <p:nvPr/>
-        </p:nvSpPr>
-        <p:spPr>
-          <a:xfrm>
-            <a:off x="6413500" y="3689350"/>
+              <a:t>= 6</a:t>
+            </a:r>
+            <a:endParaRPr lang="en-US" sz="1300" dirty="0"/>
+          </a:p>
+        </p:txBody>
+      </p:sp>
+      <p:sp>
+        <p:nvSpPr>
+          <p:cNvPr id="141" name="Text 139"/>
+          <p:cNvSpPr/>
+          <p:nvPr/>
+        </p:nvSpPr>
+        <p:spPr>
+          <a:xfrm>
+            <a:off x="6350000" y="2851150"/>
             <a:ext cx="203200" cy="228600"/>
           </a:xfrm>
           <a:prstGeom prst="rect">
@@ -7226,13 +6780,13 @@
       </p:sp>
       <p:sp>
         <p:nvSpPr>
-          <p:cNvPr id="150" name="Text 148"/>
-          <p:cNvSpPr/>
-          <p:nvPr/>
-        </p:nvSpPr>
-        <p:spPr>
-          <a:xfrm>
-            <a:off x="6667500" y="3689350"/>
+          <p:cNvPr id="142" name="Text 140"/>
+          <p:cNvSpPr/>
+          <p:nvPr/>
+        </p:nvSpPr>
+        <p:spPr>
+          <a:xfrm>
+            <a:off x="6591300" y="2851150"/>
             <a:ext cx="2197100" cy="228600"/>
           </a:xfrm>
           <a:prstGeom prst="rect">
@@ -7302,13 +6856,13 @@
       </p:sp>
       <p:sp>
         <p:nvSpPr>
-          <p:cNvPr id="151" name="Text 149"/>
-          <p:cNvSpPr/>
-          <p:nvPr/>
-        </p:nvSpPr>
-        <p:spPr>
-          <a:xfrm>
-            <a:off x="8940800" y="3689350"/>
+          <p:cNvPr id="143" name="Text 141"/>
+          <p:cNvSpPr/>
+          <p:nvPr/>
+        </p:nvSpPr>
+        <p:spPr>
+          <a:xfrm>
+            <a:off x="8864600" y="2851150"/>
             <a:ext cx="342900" cy="228600"/>
           </a:xfrm>
           <a:prstGeom prst="rect">
@@ -7361,14 +6915,14 @@
       </p:sp>
       <p:sp>
         <p:nvSpPr>
-          <p:cNvPr id="152" name="Shape 150"/>
-          <p:cNvSpPr/>
-          <p:nvPr/>
-        </p:nvSpPr>
-        <p:spPr>
-          <a:xfrm>
-            <a:off x="9271000" y="3530600"/>
-            <a:ext cx="12700" cy="596900"/>
+          <p:cNvPr id="144" name="Shape 142"/>
+          <p:cNvSpPr/>
+          <p:nvPr/>
+        </p:nvSpPr>
+        <p:spPr>
+          <a:xfrm>
+            <a:off x="9201150" y="2705100"/>
+            <a:ext cx="12700" cy="584200"/>
           </a:xfrm>
           <a:prstGeom prst="rect">
             <a:avLst/>
@@ -7381,14 +6935,14 @@
       </p:sp>
       <p:sp>
         <p:nvSpPr>
-          <p:cNvPr id="153" name="Shape 151"/>
-          <p:cNvSpPr/>
-          <p:nvPr/>
-        </p:nvSpPr>
-        <p:spPr>
-          <a:xfrm>
-            <a:off x="9575800" y="3530600"/>
-            <a:ext cx="12700" cy="596900"/>
+          <p:cNvPr id="145" name="Shape 143"/>
+          <p:cNvSpPr/>
+          <p:nvPr/>
+        </p:nvSpPr>
+        <p:spPr>
+          <a:xfrm>
+            <a:off x="9505950" y="2705100"/>
+            <a:ext cx="12700" cy="584200"/>
           </a:xfrm>
           <a:prstGeom prst="rect">
             <a:avLst/>
@@ -7401,13 +6955,13 @@
       </p:sp>
       <p:sp>
         <p:nvSpPr>
-          <p:cNvPr id="154" name="Text 152"/>
-          <p:cNvSpPr/>
-          <p:nvPr/>
-        </p:nvSpPr>
-        <p:spPr>
-          <a:xfrm>
-            <a:off x="9283700" y="3524250"/>
+          <p:cNvPr id="146" name="Text 144"/>
+          <p:cNvSpPr/>
+          <p:nvPr/>
+        </p:nvSpPr>
+        <p:spPr>
+          <a:xfrm>
+            <a:off x="9213850" y="2698750"/>
             <a:ext cx="279400" cy="203200"/>
           </a:xfrm>
           <a:prstGeom prst="rect">
@@ -7443,13 +6997,13 @@
       </p:sp>
       <p:sp>
         <p:nvSpPr>
-          <p:cNvPr id="155" name="Text 153"/>
-          <p:cNvSpPr/>
-          <p:nvPr/>
-        </p:nvSpPr>
-        <p:spPr>
-          <a:xfrm>
-            <a:off x="9283700" y="3721100"/>
+          <p:cNvPr id="147" name="Text 145"/>
+          <p:cNvSpPr/>
+          <p:nvPr/>
+        </p:nvSpPr>
+        <p:spPr>
+          <a:xfrm>
+            <a:off x="9213850" y="2895600"/>
             <a:ext cx="279400" cy="203200"/>
           </a:xfrm>
           <a:prstGeom prst="rect">
@@ -7485,13 +7039,13 @@
       </p:sp>
       <p:sp>
         <p:nvSpPr>
-          <p:cNvPr id="156" name="Text 154"/>
-          <p:cNvSpPr/>
-          <p:nvPr/>
-        </p:nvSpPr>
-        <p:spPr>
-          <a:xfrm>
-            <a:off x="9283700" y="3917950"/>
+          <p:cNvPr id="148" name="Text 146"/>
+          <p:cNvSpPr/>
+          <p:nvPr/>
+        </p:nvSpPr>
+        <p:spPr>
+          <a:xfrm>
+            <a:off x="9213850" y="3092450"/>
             <a:ext cx="279400" cy="203200"/>
           </a:xfrm>
           <a:prstGeom prst="rect">
@@ -7527,13 +7081,13 @@
       </p:sp>
       <p:sp>
         <p:nvSpPr>
-          <p:cNvPr id="157" name="Text 155"/>
-          <p:cNvSpPr/>
-          <p:nvPr/>
-        </p:nvSpPr>
-        <p:spPr>
-          <a:xfrm>
-            <a:off x="3594100" y="4565650"/>
+          <p:cNvPr id="149" name="Text 147"/>
+          <p:cNvSpPr/>
+          <p:nvPr/>
+        </p:nvSpPr>
+        <p:spPr>
+          <a:xfrm>
+            <a:off x="3594100" y="3689350"/>
             <a:ext cx="635000" cy="228600"/>
           </a:xfrm>
           <a:prstGeom prst="rect">
@@ -7595,7 +7149,7 @@
                 <a:ea typeface="Arial" pitchFamily="34" charset="-122"/>
                 <a:cs typeface="Arial" pitchFamily="34" charset="-120"/>
               </a:rPr>
-              <a:t>4</a:t>
+              <a:t>3</a:t>
             </a:r>
             <a:pPr algn="l" indent="0" marL="0">
               <a:lnSpc>
@@ -7637,33 +7191,33 @@
       </p:sp>
       <p:sp>
         <p:nvSpPr>
-          <p:cNvPr id="158" name="Text 156"/>
-          <p:cNvSpPr/>
-          <p:nvPr/>
-        </p:nvSpPr>
-        <p:spPr>
-          <a:xfrm>
-            <a:off x="4241800" y="4565650"/>
-            <a:ext cx="558800" cy="228600"/>
-          </a:xfrm>
-          <a:prstGeom prst="rect">
-            <a:avLst/>
-          </a:prstGeom>
-          <a:noFill/>
-          <a:ln/>
-        </p:spPr>
-        <p:txBody>
-          <a:bodyPr wrap="square" lIns="0" tIns="0" rIns="0" bIns="0" rtlCol="0" anchor="ctr"/>
-          <a:lstStyle/>
-          <a:p>
-            <a:pPr algn="l" indent="0" marL="0">
-              <a:lnSpc>
-                <a:spcPts val="1500"/>
-              </a:lnSpc>
-              <a:buNone/>
-            </a:pPr>
-            <a:r>
-              <a:rPr lang="en-US" sz="1300" spc="300" kern="0" dirty="0">
+          <p:cNvPr id="150" name="Text 148"/>
+          <p:cNvSpPr/>
+          <p:nvPr/>
+        </p:nvSpPr>
+        <p:spPr>
+          <a:xfrm>
+            <a:off x="4187190" y="3526790"/>
+            <a:ext cx="127000" cy="190500"/>
+          </a:xfrm>
+          <a:prstGeom prst="rect">
+            <a:avLst/>
+          </a:prstGeom>
+          <a:noFill/>
+          <a:ln/>
+        </p:spPr>
+        <p:txBody>
+          <a:bodyPr wrap="square" lIns="0" tIns="0" rIns="0" bIns="0" rtlCol="0" anchor="ctr"/>
+          <a:lstStyle/>
+          <a:p>
+            <a:pPr algn="ctr" indent="0" marL="0">
+              <a:lnSpc>
+                <a:spcPts val="1500"/>
+              </a:lnSpc>
+              <a:buNone/>
+            </a:pPr>
+            <a:r>
+              <a:rPr lang="en-US" sz="1300" dirty="0">
                 <a:solidFill>
                   <a:srgbClr val="0000FF"/>
                 </a:solidFill>
@@ -7671,22 +7225,106 @@
                 <a:ea typeface="Arial" pitchFamily="34" charset="-122"/>
                 <a:cs typeface="Arial" pitchFamily="34" charset="-120"/>
               </a:rPr>
-              <a:t>1 5 4</a:t>
-            </a:r>
-            <a:endParaRPr lang="en-US" sz="1300" dirty="0"/>
-          </a:p>
-        </p:txBody>
-      </p:sp>
-      <p:sp>
-        <p:nvSpPr>
-          <p:cNvPr id="159" name="Shape 157"/>
-          <p:cNvSpPr/>
-          <p:nvPr/>
-        </p:nvSpPr>
-        <p:spPr>
-          <a:xfrm>
-            <a:off x="4819650" y="4368800"/>
-            <a:ext cx="12700" cy="584200"/>
+              <a:t>1</a:t>
+            </a:r>
+            <a:endParaRPr lang="en-US" sz="1300" dirty="0"/>
+          </a:p>
+        </p:txBody>
+      </p:sp>
+      <p:sp>
+        <p:nvSpPr>
+          <p:cNvPr id="151" name="Text 149"/>
+          <p:cNvSpPr/>
+          <p:nvPr/>
+        </p:nvSpPr>
+        <p:spPr>
+          <a:xfrm>
+            <a:off x="4414520" y="3526790"/>
+            <a:ext cx="127000" cy="190500"/>
+          </a:xfrm>
+          <a:prstGeom prst="rect">
+            <a:avLst/>
+          </a:prstGeom>
+          <a:noFill/>
+          <a:ln/>
+        </p:spPr>
+        <p:txBody>
+          <a:bodyPr wrap="square" lIns="0" tIns="0" rIns="0" bIns="0" rtlCol="0" anchor="ctr"/>
+          <a:lstStyle/>
+          <a:p>
+            <a:pPr algn="ctr" indent="0" marL="0">
+              <a:lnSpc>
+                <a:spcPts val="1500"/>
+              </a:lnSpc>
+              <a:buNone/>
+            </a:pPr>
+            <a:r>
+              <a:rPr lang="en-US" sz="1300" dirty="0">
+                <a:solidFill>
+                  <a:srgbClr val="0000FF"/>
+                </a:solidFill>
+                <a:latin typeface="Arial" pitchFamily="34" charset="0"/>
+                <a:ea typeface="Arial" pitchFamily="34" charset="-122"/>
+                <a:cs typeface="Arial" pitchFamily="34" charset="-120"/>
+              </a:rPr>
+              <a:t>1</a:t>
+            </a:r>
+            <a:endParaRPr lang="en-US" sz="1300" dirty="0"/>
+          </a:p>
+        </p:txBody>
+      </p:sp>
+      <p:sp>
+        <p:nvSpPr>
+          <p:cNvPr id="152" name="Text 150"/>
+          <p:cNvSpPr/>
+          <p:nvPr/>
+        </p:nvSpPr>
+        <p:spPr>
+          <a:xfrm>
+            <a:off x="4644390" y="3526790"/>
+            <a:ext cx="127000" cy="190500"/>
+          </a:xfrm>
+          <a:prstGeom prst="rect">
+            <a:avLst/>
+          </a:prstGeom>
+          <a:noFill/>
+          <a:ln/>
+        </p:spPr>
+        <p:txBody>
+          <a:bodyPr wrap="square" lIns="0" tIns="0" rIns="0" bIns="0" rtlCol="0" anchor="ctr"/>
+          <a:lstStyle/>
+          <a:p>
+            <a:pPr algn="ctr" indent="0" marL="0">
+              <a:lnSpc>
+                <a:spcPts val="1500"/>
+              </a:lnSpc>
+              <a:buNone/>
+            </a:pPr>
+            <a:r>
+              <a:rPr lang="en-US" sz="1300" dirty="0">
+                <a:solidFill>
+                  <a:srgbClr val="0000FF"/>
+                </a:solidFill>
+                <a:latin typeface="Arial" pitchFamily="34" charset="0"/>
+                <a:ea typeface="Arial" pitchFamily="34" charset="-122"/>
+                <a:cs typeface="Arial" pitchFamily="34" charset="-120"/>
+              </a:rPr>
+              <a:t>2</a:t>
+            </a:r>
+            <a:endParaRPr lang="en-US" sz="1300" dirty="0"/>
+          </a:p>
+        </p:txBody>
+      </p:sp>
+      <p:sp>
+        <p:nvSpPr>
+          <p:cNvPr id="153" name="Shape 151"/>
+          <p:cNvSpPr/>
+          <p:nvPr/>
+        </p:nvSpPr>
+        <p:spPr>
+          <a:xfrm>
+            <a:off x="4178300" y="3543300"/>
+            <a:ext cx="12700" cy="165100"/>
           </a:xfrm>
           <a:prstGeom prst="rect">
             <a:avLst/>
@@ -7699,14 +7337,14 @@
       </p:sp>
       <p:sp>
         <p:nvSpPr>
-          <p:cNvPr id="160" name="Shape 158"/>
-          <p:cNvSpPr/>
-          <p:nvPr/>
-        </p:nvSpPr>
-        <p:spPr>
-          <a:xfrm>
-            <a:off x="5124450" y="4368800"/>
-            <a:ext cx="12700" cy="584200"/>
+          <p:cNvPr id="154" name="Shape 152"/>
+          <p:cNvSpPr/>
+          <p:nvPr/>
+        </p:nvSpPr>
+        <p:spPr>
+          <a:xfrm>
+            <a:off x="4762500" y="3556000"/>
+            <a:ext cx="12700" cy="152400"/>
           </a:xfrm>
           <a:prstGeom prst="rect">
             <a:avLst/>
@@ -7719,359 +7357,14 @@
       </p:sp>
       <p:sp>
         <p:nvSpPr>
-          <p:cNvPr id="161" name="Text 159"/>
-          <p:cNvSpPr/>
-          <p:nvPr/>
-        </p:nvSpPr>
-        <p:spPr>
-          <a:xfrm>
-            <a:off x="4832350" y="4362450"/>
-            <a:ext cx="279400" cy="203200"/>
-          </a:xfrm>
-          <a:prstGeom prst="rect">
-            <a:avLst/>
-          </a:prstGeom>
-          <a:noFill/>
-          <a:ln/>
-        </p:spPr>
-        <p:txBody>
-          <a:bodyPr wrap="square" lIns="0" tIns="0" rIns="0" bIns="0" rtlCol="0" anchor="ctr"/>
-          <a:lstStyle/>
-          <a:p>
-            <a:pPr algn="ctr" indent="0" marL="0">
-              <a:lnSpc>
-                <a:spcPts val="1500"/>
-              </a:lnSpc>
-              <a:buNone/>
-            </a:pPr>
-            <a:r>
-              <a:rPr lang="en-US" sz="1300" dirty="0">
-                <a:solidFill>
-                  <a:srgbClr val="008000"/>
-                </a:solidFill>
-                <a:latin typeface="Arial" pitchFamily="34" charset="0"/>
-                <a:ea typeface="Arial" pitchFamily="34" charset="-122"/>
-                <a:cs typeface="Arial" pitchFamily="34" charset="-120"/>
-              </a:rPr>
-              <a:t>14</a:t>
-            </a:r>
-            <a:endParaRPr lang="en-US" sz="1300" dirty="0"/>
-          </a:p>
-        </p:txBody>
-      </p:sp>
-      <p:sp>
-        <p:nvSpPr>
-          <p:cNvPr id="162" name="Text 160"/>
-          <p:cNvSpPr/>
-          <p:nvPr/>
-        </p:nvSpPr>
-        <p:spPr>
-          <a:xfrm>
-            <a:off x="4832350" y="4559300"/>
-            <a:ext cx="279400" cy="203200"/>
-          </a:xfrm>
-          <a:prstGeom prst="rect">
-            <a:avLst/>
-          </a:prstGeom>
-          <a:noFill/>
-          <a:ln/>
-        </p:spPr>
-        <p:txBody>
-          <a:bodyPr wrap="square" lIns="0" tIns="0" rIns="0" bIns="0" rtlCol="0" anchor="ctr"/>
-          <a:lstStyle/>
-          <a:p>
-            <a:pPr algn="ctr" indent="0" marL="0">
-              <a:lnSpc>
-                <a:spcPts val="1500"/>
-              </a:lnSpc>
-              <a:buNone/>
-            </a:pPr>
-            <a:r>
-              <a:rPr lang="en-US" sz="1300" dirty="0">
-                <a:solidFill>
-                  <a:srgbClr val="008000"/>
-                </a:solidFill>
-                <a:latin typeface="Arial" pitchFamily="34" charset="0"/>
-                <a:ea typeface="Arial" pitchFamily="34" charset="-122"/>
-                <a:cs typeface="Arial" pitchFamily="34" charset="-120"/>
-              </a:rPr>
-              <a:t>−4</a:t>
-            </a:r>
-            <a:endParaRPr lang="en-US" sz="1300" dirty="0"/>
-          </a:p>
-        </p:txBody>
-      </p:sp>
-      <p:sp>
-        <p:nvSpPr>
-          <p:cNvPr id="163" name="Text 161"/>
-          <p:cNvSpPr/>
-          <p:nvPr/>
-        </p:nvSpPr>
-        <p:spPr>
-          <a:xfrm>
-            <a:off x="4832350" y="4756150"/>
-            <a:ext cx="279400" cy="203200"/>
-          </a:xfrm>
-          <a:prstGeom prst="rect">
-            <a:avLst/>
-          </a:prstGeom>
-          <a:noFill/>
-          <a:ln/>
-        </p:spPr>
-        <p:txBody>
-          <a:bodyPr wrap="square" lIns="0" tIns="0" rIns="0" bIns="0" rtlCol="0" anchor="ctr"/>
-          <a:lstStyle/>
-          <a:p>
-            <a:pPr algn="ctr" indent="0" marL="0">
-              <a:lnSpc>
-                <a:spcPts val="1500"/>
-              </a:lnSpc>
-              <a:buNone/>
-            </a:pPr>
-            <a:r>
-              <a:rPr lang="en-US" sz="1300" dirty="0">
-                <a:solidFill>
-                  <a:srgbClr val="008000"/>
-                </a:solidFill>
-                <a:latin typeface="Arial" pitchFamily="34" charset="0"/>
-                <a:ea typeface="Arial" pitchFamily="34" charset="-122"/>
-                <a:cs typeface="Arial" pitchFamily="34" charset="-120"/>
-              </a:rPr>
-              <a:t>0</a:t>
-            </a:r>
-            <a:endParaRPr lang="en-US" sz="1300" dirty="0"/>
-          </a:p>
-        </p:txBody>
-      </p:sp>
-      <p:sp>
-        <p:nvSpPr>
-          <p:cNvPr id="164" name="Text 162"/>
-          <p:cNvSpPr/>
-          <p:nvPr/>
-        </p:nvSpPr>
-        <p:spPr>
-          <a:xfrm>
-            <a:off x="5232400" y="4565650"/>
-            <a:ext cx="736600" cy="228600"/>
-          </a:xfrm>
-          <a:prstGeom prst="rect">
-            <a:avLst/>
-          </a:prstGeom>
-          <a:noFill/>
-          <a:ln/>
-        </p:spPr>
-        <p:txBody>
-          <a:bodyPr wrap="square" lIns="0" tIns="0" rIns="0" bIns="0" rtlCol="0" anchor="ctr"/>
-          <a:lstStyle/>
-          <a:p>
-            <a:pPr algn="l" indent="0" marL="0">
-              <a:lnSpc>
-                <a:spcPts val="1500"/>
-              </a:lnSpc>
-              <a:buNone/>
-            </a:pPr>
-            <a:r>
-              <a:rPr lang="en-US" sz="1300" dirty="0">
-                <a:solidFill>
-                  <a:srgbClr val="000000"/>
-                </a:solidFill>
-                <a:latin typeface="Arial" pitchFamily="34" charset="0"/>
-                <a:ea typeface="Arial" pitchFamily="34" charset="-122"/>
-                <a:cs typeface="Arial" pitchFamily="34" charset="-120"/>
-              </a:rPr>
-              <a:t>= −6</a:t>
-            </a:r>
-            <a:endParaRPr lang="en-US" sz="1300" dirty="0"/>
-          </a:p>
-        </p:txBody>
-      </p:sp>
-      <p:sp>
-        <p:nvSpPr>
-          <p:cNvPr id="165" name="Text 163"/>
-          <p:cNvSpPr/>
-          <p:nvPr/>
-        </p:nvSpPr>
-        <p:spPr>
-          <a:xfrm>
-            <a:off x="6477000" y="4565650"/>
-            <a:ext cx="203200" cy="228600"/>
-          </a:xfrm>
-          <a:prstGeom prst="rect">
-            <a:avLst/>
-          </a:prstGeom>
-          <a:noFill/>
-          <a:ln/>
-        </p:spPr>
-        <p:txBody>
-          <a:bodyPr wrap="square" lIns="0" tIns="0" rIns="0" bIns="0" rtlCol="0" anchor="ctr"/>
-          <a:lstStyle/>
-          <a:p>
-            <a:pPr algn="l" indent="0" marL="0">
-              <a:lnSpc>
-                <a:spcPts val="1500"/>
-              </a:lnSpc>
-              <a:buNone/>
-            </a:pPr>
-            <a:r>
-              <a:rPr lang="en-US" sz="1300" dirty="0">
-                <a:solidFill>
-                  <a:srgbClr val="000000"/>
-                </a:solidFill>
-                <a:latin typeface="Arial" pitchFamily="34" charset="0"/>
-                <a:ea typeface="Arial" pitchFamily="34" charset="-122"/>
-                <a:cs typeface="Arial" pitchFamily="34" charset="-120"/>
-              </a:rPr>
-              <a:t>⇒</a:t>
-            </a:r>
-            <a:endParaRPr lang="en-US" sz="1300" dirty="0"/>
-          </a:p>
-        </p:txBody>
-      </p:sp>
-      <p:sp>
-        <p:nvSpPr>
-          <p:cNvPr id="166" name="Text 164"/>
-          <p:cNvSpPr/>
-          <p:nvPr/>
-        </p:nvSpPr>
-        <p:spPr>
-          <a:xfrm>
-            <a:off x="6731000" y="4565650"/>
-            <a:ext cx="2209800" cy="228600"/>
-          </a:xfrm>
-          <a:prstGeom prst="rect">
-            <a:avLst/>
-          </a:prstGeom>
-          <a:noFill/>
-          <a:ln/>
-        </p:spPr>
-        <p:txBody>
-          <a:bodyPr wrap="square" lIns="0" tIns="0" rIns="0" bIns="0" rtlCol="0" anchor="ctr"/>
-          <a:lstStyle/>
-          <a:p>
-            <a:pPr algn="l" indent="0" marL="0">
-              <a:lnSpc>
-                <a:spcPts val="1500"/>
-              </a:lnSpc>
-              <a:buNone/>
-            </a:pPr>
-            <a:r>
-              <a:rPr lang="en-US" sz="1300" dirty="0">
-                <a:solidFill>
-                  <a:srgbClr val="000000"/>
-                </a:solidFill>
-                <a:latin typeface="Arial" pitchFamily="34" charset="0"/>
-                <a:ea typeface="Arial" pitchFamily="34" charset="-122"/>
-                <a:cs typeface="Arial" pitchFamily="34" charset="-120"/>
-              </a:rPr>
-              <a:t>Keep same </a:t>
-            </a:r>
-            <a:pPr algn="l" indent="0" marL="0">
-              <a:lnSpc>
-                <a:spcPts val="1500"/>
-              </a:lnSpc>
-              <a:buNone/>
-            </a:pPr>
-            <a:r>
-              <a:rPr lang="en-US" sz="1300" u="sng" dirty="0">
-                <a:solidFill>
-                  <a:srgbClr val="000000"/>
-                </a:solidFill>
-                <a:latin typeface="Arial" pitchFamily="34" charset="0"/>
-                <a:ea typeface="Arial" pitchFamily="34" charset="-122"/>
-                <a:cs typeface="Arial" pitchFamily="34" charset="-120"/>
-              </a:rPr>
-              <a:t>W</a:t>
-            </a:r>
-            <a:pPr algn="l" indent="0" marL="0">
-              <a:lnSpc>
-                <a:spcPts val="1500"/>
-              </a:lnSpc>
-              <a:buNone/>
-            </a:pPr>
-            <a:r>
-              <a:rPr lang="en-US" sz="1300" dirty="0">
-                <a:solidFill>
-                  <a:srgbClr val="000000"/>
-                </a:solidFill>
-                <a:latin typeface="Arial" pitchFamily="34" charset="0"/>
-                <a:ea typeface="Arial" pitchFamily="34" charset="-122"/>
-                <a:cs typeface="Arial" pitchFamily="34" charset="-120"/>
-              </a:rPr>
-              <a:t>eight</a:t>
-            </a:r>
-            <a:endParaRPr lang="en-US" sz="1300" dirty="0"/>
-          </a:p>
-        </p:txBody>
-      </p:sp>
-      <p:sp>
-        <p:nvSpPr>
-          <p:cNvPr id="167" name="Text 165"/>
-          <p:cNvSpPr/>
-          <p:nvPr/>
-        </p:nvSpPr>
-        <p:spPr>
-          <a:xfrm>
-            <a:off x="9017000" y="4565650"/>
-            <a:ext cx="342900" cy="228600"/>
-          </a:xfrm>
-          <a:prstGeom prst="rect">
-            <a:avLst/>
-          </a:prstGeom>
-          <a:noFill/>
-          <a:ln/>
-        </p:spPr>
-        <p:txBody>
-          <a:bodyPr wrap="square" lIns="0" tIns="0" rIns="0" bIns="0" rtlCol="0" anchor="ctr"/>
-          <a:lstStyle/>
-          <a:p>
-            <a:pPr algn="l" indent="0" marL="0">
-              <a:lnSpc>
-                <a:spcPts val="1500"/>
-              </a:lnSpc>
-              <a:buNone/>
-            </a:pPr>
-            <a:r>
-              <a:rPr lang="en-US" sz="1300" u="sng" dirty="0">
-                <a:solidFill>
-                  <a:srgbClr val="000000"/>
-                </a:solidFill>
-                <a:latin typeface="Arial" pitchFamily="34" charset="0"/>
-                <a:ea typeface="Arial" pitchFamily="34" charset="-122"/>
-                <a:cs typeface="Arial" pitchFamily="34" charset="-120"/>
-              </a:rPr>
-              <a:t>W</a:t>
-            </a:r>
-            <a:pPr algn="l" indent="0" marL="0">
-              <a:lnSpc>
-                <a:spcPts val="1500"/>
-              </a:lnSpc>
-              <a:buNone/>
-            </a:pPr>
-            <a:r>
-              <a:rPr lang="en-US" sz="1300" dirty="0">
-                <a:solidFill>
-                  <a:srgbClr val="000000"/>
-                </a:solidFill>
-                <a:latin typeface="Arial" pitchFamily="34" charset="0"/>
-                <a:ea typeface="Arial" pitchFamily="34" charset="-122"/>
-                <a:cs typeface="Arial" pitchFamily="34" charset="-120"/>
-              </a:rPr>
-              <a:t> = </a:t>
-            </a:r>
-            <a:endParaRPr lang="en-US" sz="1300" dirty="0"/>
-          </a:p>
-        </p:txBody>
-      </p:sp>
-      <p:sp>
-        <p:nvSpPr>
-          <p:cNvPr id="168" name="Shape 166"/>
-          <p:cNvSpPr/>
-          <p:nvPr/>
-        </p:nvSpPr>
-        <p:spPr>
-          <a:xfrm>
-            <a:off x="9340850" y="4368800"/>
-            <a:ext cx="12700" cy="584200"/>
+          <p:cNvPr id="155" name="Shape 153"/>
+          <p:cNvSpPr/>
+          <p:nvPr/>
+        </p:nvSpPr>
+        <p:spPr>
+          <a:xfrm>
+            <a:off x="4819650" y="3530600"/>
+            <a:ext cx="12700" cy="596900"/>
           </a:xfrm>
           <a:prstGeom prst="rect">
             <a:avLst/>
@@ -8084,14 +7377,14 @@
       </p:sp>
       <p:sp>
         <p:nvSpPr>
-          <p:cNvPr id="169" name="Shape 167"/>
-          <p:cNvSpPr/>
-          <p:nvPr/>
-        </p:nvSpPr>
-        <p:spPr>
-          <a:xfrm>
-            <a:off x="9645650" y="4368800"/>
-            <a:ext cx="12700" cy="584200"/>
+          <p:cNvPr id="156" name="Shape 154"/>
+          <p:cNvSpPr/>
+          <p:nvPr/>
+        </p:nvSpPr>
+        <p:spPr>
+          <a:xfrm>
+            <a:off x="5124450" y="3530600"/>
+            <a:ext cx="12700" cy="596900"/>
           </a:xfrm>
           <a:prstGeom prst="rect">
             <a:avLst/>
@@ -8104,13 +7397,13 @@
       </p:sp>
       <p:sp>
         <p:nvSpPr>
-          <p:cNvPr id="170" name="Text 168"/>
-          <p:cNvSpPr/>
-          <p:nvPr/>
-        </p:nvSpPr>
-        <p:spPr>
-          <a:xfrm>
-            <a:off x="9353550" y="4362450"/>
+          <p:cNvPr id="157" name="Text 155"/>
+          <p:cNvSpPr/>
+          <p:nvPr/>
+        </p:nvSpPr>
+        <p:spPr>
+          <a:xfrm>
+            <a:off x="4832350" y="3524250"/>
             <a:ext cx="279400" cy="203200"/>
           </a:xfrm>
           <a:prstGeom prst="rect">
@@ -8132,7 +7425,7 @@
             <a:r>
               <a:rPr lang="en-US" sz="1300" dirty="0">
                 <a:solidFill>
-                  <a:srgbClr val="000000"/>
+                  <a:srgbClr val="008000"/>
                 </a:solidFill>
                 <a:latin typeface="Arial" pitchFamily="34" charset="0"/>
                 <a:ea typeface="Arial" pitchFamily="34" charset="-122"/>
@@ -8146,13 +7439,13 @@
       </p:sp>
       <p:sp>
         <p:nvSpPr>
-          <p:cNvPr id="171" name="Text 169"/>
-          <p:cNvSpPr/>
-          <p:nvPr/>
-        </p:nvSpPr>
-        <p:spPr>
-          <a:xfrm>
-            <a:off x="9353550" y="4559300"/>
+          <p:cNvPr id="158" name="Text 156"/>
+          <p:cNvSpPr/>
+          <p:nvPr/>
+        </p:nvSpPr>
+        <p:spPr>
+          <a:xfrm>
+            <a:off x="4832350" y="3721100"/>
             <a:ext cx="279400" cy="203200"/>
           </a:xfrm>
           <a:prstGeom prst="rect">
@@ -8174,7 +7467,7 @@
             <a:r>
               <a:rPr lang="en-US" sz="1300" dirty="0">
                 <a:solidFill>
-                  <a:srgbClr val="000000"/>
+                  <a:srgbClr val="008000"/>
                 </a:solidFill>
                 <a:latin typeface="Arial" pitchFamily="34" charset="0"/>
                 <a:ea typeface="Arial" pitchFamily="34" charset="-122"/>
@@ -8188,13 +7481,13 @@
       </p:sp>
       <p:sp>
         <p:nvSpPr>
-          <p:cNvPr id="172" name="Text 170"/>
-          <p:cNvSpPr/>
-          <p:nvPr/>
-        </p:nvSpPr>
-        <p:spPr>
-          <a:xfrm>
-            <a:off x="9353550" y="4756150"/>
+          <p:cNvPr id="159" name="Text 157"/>
+          <p:cNvSpPr/>
+          <p:nvPr/>
+        </p:nvSpPr>
+        <p:spPr>
+          <a:xfrm>
+            <a:off x="4832350" y="3917950"/>
             <a:ext cx="279400" cy="203200"/>
           </a:xfrm>
           <a:prstGeom prst="rect">
@@ -8216,7 +7509,7 @@
             <a:r>
               <a:rPr lang="en-US" sz="1300" dirty="0">
                 <a:solidFill>
-                  <a:srgbClr val="000000"/>
+                  <a:srgbClr val="008000"/>
                 </a:solidFill>
                 <a:latin typeface="Arial" pitchFamily="34" charset="0"/>
                 <a:ea typeface="Arial" pitchFamily="34" charset="-122"/>
@@ -8230,14 +7523,14 @@
       </p:sp>
       <p:sp>
         <p:nvSpPr>
-          <p:cNvPr id="173" name="Text 171"/>
-          <p:cNvSpPr/>
-          <p:nvPr/>
-        </p:nvSpPr>
-        <p:spPr>
-          <a:xfrm>
-            <a:off x="3594100" y="5365750"/>
-            <a:ext cx="635000" cy="228600"/>
+          <p:cNvPr id="160" name="Text 158"/>
+          <p:cNvSpPr/>
+          <p:nvPr/>
+        </p:nvSpPr>
+        <p:spPr>
+          <a:xfrm>
+            <a:off x="5219700" y="3689350"/>
+            <a:ext cx="736600" cy="228600"/>
           </a:xfrm>
           <a:prstGeom prst="rect">
             <a:avLst/>
@@ -8264,8 +7557,33 @@
                 <a:ea typeface="Arial" pitchFamily="34" charset="-122"/>
                 <a:cs typeface="Arial" pitchFamily="34" charset="-120"/>
               </a:rPr>
-              <a:t>d(</a:t>
-            </a:r>
+              <a:t>= 10</a:t>
+            </a:r>
+            <a:endParaRPr lang="en-US" sz="1300" dirty="0"/>
+          </a:p>
+        </p:txBody>
+      </p:sp>
+      <p:sp>
+        <p:nvSpPr>
+          <p:cNvPr id="161" name="Text 159"/>
+          <p:cNvSpPr/>
+          <p:nvPr/>
+        </p:nvSpPr>
+        <p:spPr>
+          <a:xfrm>
+            <a:off x="6413500" y="3689350"/>
+            <a:ext cx="203200" cy="228600"/>
+          </a:xfrm>
+          <a:prstGeom prst="rect">
+            <a:avLst/>
+          </a:prstGeom>
+          <a:noFill/>
+          <a:ln/>
+        </p:spPr>
+        <p:txBody>
+          <a:bodyPr wrap="square" lIns="0" tIns="0" rIns="0" bIns="0" rtlCol="0" anchor="ctr"/>
+          <a:lstStyle/>
+          <a:p>
             <a:pPr algn="l" indent="0" marL="0">
               <a:lnSpc>
                 <a:spcPts val="1500"/>
@@ -8281,8 +7599,33 @@
                 <a:ea typeface="Arial" pitchFamily="34" charset="-122"/>
                 <a:cs typeface="Arial" pitchFamily="34" charset="-120"/>
               </a:rPr>
-              <a:t>x</a:t>
-            </a:r>
+              <a:t>⇒</a:t>
+            </a:r>
+            <a:endParaRPr lang="en-US" sz="1300" dirty="0"/>
+          </a:p>
+        </p:txBody>
+      </p:sp>
+      <p:sp>
+        <p:nvSpPr>
+          <p:cNvPr id="162" name="Text 160"/>
+          <p:cNvSpPr/>
+          <p:nvPr/>
+        </p:nvSpPr>
+        <p:spPr>
+          <a:xfrm>
+            <a:off x="6667500" y="3689350"/>
+            <a:ext cx="2197100" cy="228600"/>
+          </a:xfrm>
+          <a:prstGeom prst="rect">
+            <a:avLst/>
+          </a:prstGeom>
+          <a:noFill/>
+          <a:ln/>
+        </p:spPr>
+        <p:txBody>
+          <a:bodyPr wrap="square" lIns="0" tIns="0" rIns="0" bIns="0" rtlCol="0" anchor="ctr"/>
+          <a:lstStyle/>
+          <a:p>
             <a:pPr algn="l" indent="0" marL="0">
               <a:lnSpc>
                 <a:spcPts val="1500"/>
@@ -8290,15 +7633,15 @@
               <a:buNone/>
             </a:pPr>
             <a:r>
-              <a:rPr lang="en-US" sz="950" baseline="-40000" dirty="0">
-                <a:solidFill>
-                  <a:srgbClr val="000000"/>
-                </a:solidFill>
-                <a:latin typeface="Arial" pitchFamily="34" charset="0"/>
-                <a:ea typeface="Arial" pitchFamily="34" charset="-122"/>
-                <a:cs typeface="Arial" pitchFamily="34" charset="-120"/>
-              </a:rPr>
-              <a:t>5</a:t>
+              <a:rPr lang="en-US" sz="1300" dirty="0">
+                <a:solidFill>
+                  <a:srgbClr val="000000"/>
+                </a:solidFill>
+                <a:latin typeface="Arial" pitchFamily="34" charset="0"/>
+                <a:ea typeface="Arial" pitchFamily="34" charset="-122"/>
+                <a:cs typeface="Arial" pitchFamily="34" charset="-120"/>
+              </a:rPr>
+              <a:t>Keep same </a:t>
             </a:r>
             <a:pPr algn="l" indent="0" marL="0">
               <a:lnSpc>
@@ -8307,15 +7650,15 @@
               <a:buNone/>
             </a:pPr>
             <a:r>
-              <a:rPr lang="en-US" sz="1300" dirty="0">
-                <a:solidFill>
-                  <a:srgbClr val="000000"/>
-                </a:solidFill>
-                <a:latin typeface="Arial" pitchFamily="34" charset="0"/>
-                <a:ea typeface="Arial" pitchFamily="34" charset="-122"/>
-                <a:cs typeface="Arial" pitchFamily="34" charset="-120"/>
-              </a:rPr>
-              <a:t>)</a:t>
+              <a:rPr lang="en-US" sz="1300" u="sng" dirty="0">
+                <a:solidFill>
+                  <a:srgbClr val="000000"/>
+                </a:solidFill>
+                <a:latin typeface="Arial" pitchFamily="34" charset="0"/>
+                <a:ea typeface="Arial" pitchFamily="34" charset="-122"/>
+                <a:cs typeface="Arial" pitchFamily="34" charset="-120"/>
+              </a:rPr>
+              <a:t>W</a:t>
             </a:r>
             <a:pPr algn="l" indent="0" marL="0">
               <a:lnSpc>
@@ -8332,6 +7675,65 @@
                 <a:ea typeface="Arial" pitchFamily="34" charset="-122"/>
                 <a:cs typeface="Arial" pitchFamily="34" charset="-120"/>
               </a:rPr>
+              <a:t>eight</a:t>
+            </a:r>
+            <a:endParaRPr lang="en-US" sz="1300" dirty="0"/>
+          </a:p>
+        </p:txBody>
+      </p:sp>
+      <p:sp>
+        <p:nvSpPr>
+          <p:cNvPr id="163" name="Text 161"/>
+          <p:cNvSpPr/>
+          <p:nvPr/>
+        </p:nvSpPr>
+        <p:spPr>
+          <a:xfrm>
+            <a:off x="8940800" y="3689350"/>
+            <a:ext cx="342900" cy="228600"/>
+          </a:xfrm>
+          <a:prstGeom prst="rect">
+            <a:avLst/>
+          </a:prstGeom>
+          <a:noFill/>
+          <a:ln/>
+        </p:spPr>
+        <p:txBody>
+          <a:bodyPr wrap="square" lIns="0" tIns="0" rIns="0" bIns="0" rtlCol="0" anchor="ctr"/>
+          <a:lstStyle/>
+          <a:p>
+            <a:pPr algn="l" indent="0" marL="0">
+              <a:lnSpc>
+                <a:spcPts val="1500"/>
+              </a:lnSpc>
+              <a:buNone/>
+            </a:pPr>
+            <a:r>
+              <a:rPr lang="en-US" sz="1300" u="sng" dirty="0">
+                <a:solidFill>
+                  <a:srgbClr val="000000"/>
+                </a:solidFill>
+                <a:latin typeface="Arial" pitchFamily="34" charset="0"/>
+                <a:ea typeface="Arial" pitchFamily="34" charset="-122"/>
+                <a:cs typeface="Arial" pitchFamily="34" charset="-120"/>
+              </a:rPr>
+              <a:t>W</a:t>
+            </a:r>
+            <a:pPr algn="l" indent="0" marL="0">
+              <a:lnSpc>
+                <a:spcPts val="1500"/>
+              </a:lnSpc>
+              <a:buNone/>
+            </a:pPr>
+            <a:r>
+              <a:rPr lang="en-US" sz="1300" dirty="0">
+                <a:solidFill>
+                  <a:srgbClr val="000000"/>
+                </a:solidFill>
+                <a:latin typeface="Arial" pitchFamily="34" charset="0"/>
+                <a:ea typeface="Arial" pitchFamily="34" charset="-122"/>
+                <a:cs typeface="Arial" pitchFamily="34" charset="-120"/>
+              </a:rPr>
               <a:t> = </a:t>
             </a:r>
             <a:endParaRPr lang="en-US" sz="1300" dirty="0"/>
@@ -8340,56 +7742,14 @@
       </p:sp>
       <p:sp>
         <p:nvSpPr>
-          <p:cNvPr id="174" name="Text 172"/>
-          <p:cNvSpPr/>
-          <p:nvPr/>
-        </p:nvSpPr>
-        <p:spPr>
-          <a:xfrm>
-            <a:off x="4241800" y="5365750"/>
-            <a:ext cx="558800" cy="228600"/>
-          </a:xfrm>
-          <a:prstGeom prst="rect">
-            <a:avLst/>
-          </a:prstGeom>
-          <a:noFill/>
-          <a:ln/>
-        </p:spPr>
-        <p:txBody>
-          <a:bodyPr wrap="square" lIns="0" tIns="0" rIns="0" bIns="0" rtlCol="0" anchor="ctr"/>
-          <a:lstStyle/>
-          <a:p>
-            <a:pPr algn="l" indent="0" marL="0">
-              <a:lnSpc>
-                <a:spcPts val="1500"/>
-              </a:lnSpc>
-              <a:buNone/>
-            </a:pPr>
-            <a:r>
-              <a:rPr lang="en-US" sz="1300" spc="300" kern="0" dirty="0">
-                <a:solidFill>
-                  <a:srgbClr val="0000FF"/>
-                </a:solidFill>
-                <a:latin typeface="Arial" pitchFamily="34" charset="0"/>
-                <a:ea typeface="Arial" pitchFamily="34" charset="-122"/>
-                <a:cs typeface="Arial" pitchFamily="34" charset="-120"/>
-              </a:rPr>
-              <a:t>1 6 5</a:t>
-            </a:r>
-            <a:endParaRPr lang="en-US" sz="1300" dirty="0"/>
-          </a:p>
-        </p:txBody>
-      </p:sp>
-      <p:sp>
-        <p:nvSpPr>
-          <p:cNvPr id="175" name="Shape 173"/>
-          <p:cNvSpPr/>
-          <p:nvPr/>
-        </p:nvSpPr>
-        <p:spPr>
-          <a:xfrm>
-            <a:off x="4819650" y="5207000"/>
-            <a:ext cx="12700" cy="584200"/>
+          <p:cNvPr id="164" name="Shape 162"/>
+          <p:cNvSpPr/>
+          <p:nvPr/>
+        </p:nvSpPr>
+        <p:spPr>
+          <a:xfrm>
+            <a:off x="9271000" y="3530600"/>
+            <a:ext cx="12700" cy="596900"/>
           </a:xfrm>
           <a:prstGeom prst="rect">
             <a:avLst/>
@@ -8402,14 +7762,14 @@
       </p:sp>
       <p:sp>
         <p:nvSpPr>
-          <p:cNvPr id="176" name="Shape 174"/>
-          <p:cNvSpPr/>
-          <p:nvPr/>
-        </p:nvSpPr>
-        <p:spPr>
-          <a:xfrm>
-            <a:off x="5124450" y="5207000"/>
-            <a:ext cx="12700" cy="584200"/>
+          <p:cNvPr id="165" name="Shape 163"/>
+          <p:cNvSpPr/>
+          <p:nvPr/>
+        </p:nvSpPr>
+        <p:spPr>
+          <a:xfrm>
+            <a:off x="9575800" y="3530600"/>
+            <a:ext cx="12700" cy="596900"/>
           </a:xfrm>
           <a:prstGeom prst="rect">
             <a:avLst/>
@@ -8422,13 +7782,13 @@
       </p:sp>
       <p:sp>
         <p:nvSpPr>
-          <p:cNvPr id="177" name="Text 175"/>
-          <p:cNvSpPr/>
-          <p:nvPr/>
-        </p:nvSpPr>
-        <p:spPr>
-          <a:xfrm>
-            <a:off x="4832350" y="5200650"/>
+          <p:cNvPr id="166" name="Text 164"/>
+          <p:cNvSpPr/>
+          <p:nvPr/>
+        </p:nvSpPr>
+        <p:spPr>
+          <a:xfrm>
+            <a:off x="9283700" y="3524250"/>
             <a:ext cx="279400" cy="203200"/>
           </a:xfrm>
           <a:prstGeom prst="rect">
@@ -8450,7 +7810,7 @@
             <a:r>
               <a:rPr lang="en-US" sz="1300" dirty="0">
                 <a:solidFill>
-                  <a:srgbClr val="008000"/>
+                  <a:srgbClr val="000000"/>
                 </a:solidFill>
                 <a:latin typeface="Arial" pitchFamily="34" charset="0"/>
                 <a:ea typeface="Arial" pitchFamily="34" charset="-122"/>
@@ -8464,13 +7824,13 @@
       </p:sp>
       <p:sp>
         <p:nvSpPr>
-          <p:cNvPr id="178" name="Text 176"/>
-          <p:cNvSpPr/>
-          <p:nvPr/>
-        </p:nvSpPr>
-        <p:spPr>
-          <a:xfrm>
-            <a:off x="4832350" y="5397500"/>
+          <p:cNvPr id="167" name="Text 165"/>
+          <p:cNvSpPr/>
+          <p:nvPr/>
+        </p:nvSpPr>
+        <p:spPr>
+          <a:xfrm>
+            <a:off x="9283700" y="3721100"/>
             <a:ext cx="279400" cy="203200"/>
           </a:xfrm>
           <a:prstGeom prst="rect">
@@ -8492,7 +7852,7 @@
             <a:r>
               <a:rPr lang="en-US" sz="1300" dirty="0">
                 <a:solidFill>
-                  <a:srgbClr val="008000"/>
+                  <a:srgbClr val="000000"/>
                 </a:solidFill>
                 <a:latin typeface="Arial" pitchFamily="34" charset="0"/>
                 <a:ea typeface="Arial" pitchFamily="34" charset="-122"/>
@@ -8506,13 +7866,13 @@
       </p:sp>
       <p:sp>
         <p:nvSpPr>
-          <p:cNvPr id="179" name="Text 177"/>
-          <p:cNvSpPr/>
-          <p:nvPr/>
-        </p:nvSpPr>
-        <p:spPr>
-          <a:xfrm>
-            <a:off x="4832350" y="5594350"/>
+          <p:cNvPr id="168" name="Text 166"/>
+          <p:cNvSpPr/>
+          <p:nvPr/>
+        </p:nvSpPr>
+        <p:spPr>
+          <a:xfrm>
+            <a:off x="9283700" y="3917950"/>
             <a:ext cx="279400" cy="203200"/>
           </a:xfrm>
           <a:prstGeom prst="rect">
@@ -8534,7 +7894,7 @@
             <a:r>
               <a:rPr lang="en-US" sz="1300" dirty="0">
                 <a:solidFill>
-                  <a:srgbClr val="008000"/>
+                  <a:srgbClr val="000000"/>
                 </a:solidFill>
                 <a:latin typeface="Arial" pitchFamily="34" charset="0"/>
                 <a:ea typeface="Arial" pitchFamily="34" charset="-122"/>
@@ -8548,14 +7908,14 @@
       </p:sp>
       <p:sp>
         <p:nvSpPr>
-          <p:cNvPr id="180" name="Text 178"/>
-          <p:cNvSpPr/>
-          <p:nvPr/>
-        </p:nvSpPr>
-        <p:spPr>
-          <a:xfrm>
-            <a:off x="5232400" y="5365750"/>
-            <a:ext cx="736600" cy="228600"/>
+          <p:cNvPr id="169" name="Text 167"/>
+          <p:cNvSpPr/>
+          <p:nvPr/>
+        </p:nvSpPr>
+        <p:spPr>
+          <a:xfrm>
+            <a:off x="3594100" y="4565650"/>
+            <a:ext cx="635000" cy="228600"/>
           </a:xfrm>
           <a:prstGeom prst="rect">
             <a:avLst/>
@@ -8582,33 +7942,8 @@
                 <a:ea typeface="Arial" pitchFamily="34" charset="-122"/>
                 <a:cs typeface="Arial" pitchFamily="34" charset="-120"/>
               </a:rPr>
-              <a:t>= −10</a:t>
-            </a:r>
-            <a:endParaRPr lang="en-US" sz="1300" dirty="0"/>
-          </a:p>
-        </p:txBody>
-      </p:sp>
-      <p:sp>
-        <p:nvSpPr>
-          <p:cNvPr id="181" name="Text 179"/>
-          <p:cNvSpPr/>
-          <p:nvPr/>
-        </p:nvSpPr>
-        <p:spPr>
-          <a:xfrm>
-            <a:off x="6553200" y="5365750"/>
-            <a:ext cx="203200" cy="228600"/>
-          </a:xfrm>
-          <a:prstGeom prst="rect">
-            <a:avLst/>
-          </a:prstGeom>
-          <a:noFill/>
-          <a:ln/>
-        </p:spPr>
-        <p:txBody>
-          <a:bodyPr wrap="square" lIns="0" tIns="0" rIns="0" bIns="0" rtlCol="0" anchor="ctr"/>
-          <a:lstStyle/>
-          <a:p>
+              <a:t>d(</a:t>
+            </a:r>
             <a:pPr algn="l" indent="0" marL="0">
               <a:lnSpc>
                 <a:spcPts val="1500"/>
@@ -8624,33 +7959,8 @@
                 <a:ea typeface="Arial" pitchFamily="34" charset="-122"/>
                 <a:cs typeface="Arial" pitchFamily="34" charset="-120"/>
               </a:rPr>
-              <a:t>⇒</a:t>
-            </a:r>
-            <a:endParaRPr lang="en-US" sz="1300" dirty="0"/>
-          </a:p>
-        </p:txBody>
-      </p:sp>
-      <p:sp>
-        <p:nvSpPr>
-          <p:cNvPr id="182" name="Text 180"/>
-          <p:cNvSpPr/>
-          <p:nvPr/>
-        </p:nvSpPr>
-        <p:spPr>
-          <a:xfrm>
-            <a:off x="6794500" y="5365750"/>
-            <a:ext cx="2209800" cy="228600"/>
-          </a:xfrm>
-          <a:prstGeom prst="rect">
-            <a:avLst/>
-          </a:prstGeom>
-          <a:noFill/>
-          <a:ln/>
-        </p:spPr>
-        <p:txBody>
-          <a:bodyPr wrap="square" lIns="0" tIns="0" rIns="0" bIns="0" rtlCol="0" anchor="ctr"/>
-          <a:lstStyle/>
-          <a:p>
+              <a:t>x</a:t>
+            </a:r>
             <a:pPr algn="l" indent="0" marL="0">
               <a:lnSpc>
                 <a:spcPts val="1500"/>
@@ -8658,15 +7968,15 @@
               <a:buNone/>
             </a:pPr>
             <a:r>
-              <a:rPr lang="en-US" sz="1300" dirty="0">
-                <a:solidFill>
-                  <a:srgbClr val="000000"/>
-                </a:solidFill>
-                <a:latin typeface="Arial" pitchFamily="34" charset="0"/>
-                <a:ea typeface="Arial" pitchFamily="34" charset="-122"/>
-                <a:cs typeface="Arial" pitchFamily="34" charset="-120"/>
-              </a:rPr>
-              <a:t>Keep same </a:t>
+              <a:rPr lang="en-US" sz="950" baseline="-40000" dirty="0">
+                <a:solidFill>
+                  <a:srgbClr val="000000"/>
+                </a:solidFill>
+                <a:latin typeface="Arial" pitchFamily="34" charset="0"/>
+                <a:ea typeface="Arial" pitchFamily="34" charset="-122"/>
+                <a:cs typeface="Arial" pitchFamily="34" charset="-120"/>
+              </a:rPr>
+              <a:t>4</a:t>
             </a:r>
             <a:pPr algn="l" indent="0" marL="0">
               <a:lnSpc>
@@ -8675,15 +7985,15 @@
               <a:buNone/>
             </a:pPr>
             <a:r>
-              <a:rPr lang="en-US" sz="1300" u="sng" dirty="0">
-                <a:solidFill>
-                  <a:srgbClr val="000000"/>
-                </a:solidFill>
-                <a:latin typeface="Arial" pitchFamily="34" charset="0"/>
-                <a:ea typeface="Arial" pitchFamily="34" charset="-122"/>
-                <a:cs typeface="Arial" pitchFamily="34" charset="-120"/>
-              </a:rPr>
-              <a:t>W</a:t>
+              <a:rPr lang="en-US" sz="1300" dirty="0">
+                <a:solidFill>
+                  <a:srgbClr val="000000"/>
+                </a:solidFill>
+                <a:latin typeface="Arial" pitchFamily="34" charset="0"/>
+                <a:ea typeface="Arial" pitchFamily="34" charset="-122"/>
+                <a:cs typeface="Arial" pitchFamily="34" charset="-120"/>
+              </a:rPr>
+              <a:t>)</a:t>
             </a:r>
             <a:pPr algn="l" indent="0" marL="0">
               <a:lnSpc>
@@ -8700,65 +8010,6 @@
                 <a:ea typeface="Arial" pitchFamily="34" charset="-122"/>
                 <a:cs typeface="Arial" pitchFamily="34" charset="-120"/>
               </a:rPr>
-              <a:t>eight</a:t>
-            </a:r>
-            <a:endParaRPr lang="en-US" sz="1300" dirty="0"/>
-          </a:p>
-        </p:txBody>
-      </p:sp>
-      <p:sp>
-        <p:nvSpPr>
-          <p:cNvPr id="183" name="Text 181"/>
-          <p:cNvSpPr/>
-          <p:nvPr/>
-        </p:nvSpPr>
-        <p:spPr>
-          <a:xfrm>
-            <a:off x="9080500" y="5365750"/>
-            <a:ext cx="342900" cy="228600"/>
-          </a:xfrm>
-          <a:prstGeom prst="rect">
-            <a:avLst/>
-          </a:prstGeom>
-          <a:noFill/>
-          <a:ln/>
-        </p:spPr>
-        <p:txBody>
-          <a:bodyPr wrap="square" lIns="0" tIns="0" rIns="0" bIns="0" rtlCol="0" anchor="ctr"/>
-          <a:lstStyle/>
-          <a:p>
-            <a:pPr algn="l" indent="0" marL="0">
-              <a:lnSpc>
-                <a:spcPts val="1500"/>
-              </a:lnSpc>
-              <a:buNone/>
-            </a:pPr>
-            <a:r>
-              <a:rPr lang="en-US" sz="1300" u="sng" dirty="0">
-                <a:solidFill>
-                  <a:srgbClr val="000000"/>
-                </a:solidFill>
-                <a:latin typeface="Arial" pitchFamily="34" charset="0"/>
-                <a:ea typeface="Arial" pitchFamily="34" charset="-122"/>
-                <a:cs typeface="Arial" pitchFamily="34" charset="-120"/>
-              </a:rPr>
-              <a:t>W</a:t>
-            </a:r>
-            <a:pPr algn="l" indent="0" marL="0">
-              <a:lnSpc>
-                <a:spcPts val="1500"/>
-              </a:lnSpc>
-              <a:buNone/>
-            </a:pPr>
-            <a:r>
-              <a:rPr lang="en-US" sz="1300" dirty="0">
-                <a:solidFill>
-                  <a:srgbClr val="000000"/>
-                </a:solidFill>
-                <a:latin typeface="Arial" pitchFamily="34" charset="0"/>
-                <a:ea typeface="Arial" pitchFamily="34" charset="-122"/>
-                <a:cs typeface="Arial" pitchFamily="34" charset="-120"/>
-              </a:rPr>
               <a:t> = </a:t>
             </a:r>
             <a:endParaRPr lang="en-US" sz="1300" dirty="0"/>
@@ -8767,14 +8018,140 @@
       </p:sp>
       <p:sp>
         <p:nvSpPr>
-          <p:cNvPr id="184" name="Shape 182"/>
-          <p:cNvSpPr/>
-          <p:nvPr/>
-        </p:nvSpPr>
-        <p:spPr>
-          <a:xfrm>
-            <a:off x="9404350" y="5207000"/>
-            <a:ext cx="12700" cy="584200"/>
+          <p:cNvPr id="170" name="Text 168"/>
+          <p:cNvSpPr/>
+          <p:nvPr/>
+        </p:nvSpPr>
+        <p:spPr>
+          <a:xfrm>
+            <a:off x="4187190" y="4364990"/>
+            <a:ext cx="127000" cy="190500"/>
+          </a:xfrm>
+          <a:prstGeom prst="rect">
+            <a:avLst/>
+          </a:prstGeom>
+          <a:noFill/>
+          <a:ln/>
+        </p:spPr>
+        <p:txBody>
+          <a:bodyPr wrap="square" lIns="0" tIns="0" rIns="0" bIns="0" rtlCol="0" anchor="ctr"/>
+          <a:lstStyle/>
+          <a:p>
+            <a:pPr algn="ctr" indent="0" marL="0">
+              <a:lnSpc>
+                <a:spcPts val="1500"/>
+              </a:lnSpc>
+              <a:buNone/>
+            </a:pPr>
+            <a:r>
+              <a:rPr lang="en-US" sz="1300" dirty="0">
+                <a:solidFill>
+                  <a:srgbClr val="0000FF"/>
+                </a:solidFill>
+                <a:latin typeface="Arial" pitchFamily="34" charset="0"/>
+                <a:ea typeface="Arial" pitchFamily="34" charset="-122"/>
+                <a:cs typeface="Arial" pitchFamily="34" charset="-120"/>
+              </a:rPr>
+              <a:t>1</a:t>
+            </a:r>
+            <a:endParaRPr lang="en-US" sz="1300" dirty="0"/>
+          </a:p>
+        </p:txBody>
+      </p:sp>
+      <p:sp>
+        <p:nvSpPr>
+          <p:cNvPr id="171" name="Text 169"/>
+          <p:cNvSpPr/>
+          <p:nvPr/>
+        </p:nvSpPr>
+        <p:spPr>
+          <a:xfrm>
+            <a:off x="4414520" y="4364990"/>
+            <a:ext cx="127000" cy="190500"/>
+          </a:xfrm>
+          <a:prstGeom prst="rect">
+            <a:avLst/>
+          </a:prstGeom>
+          <a:noFill/>
+          <a:ln/>
+        </p:spPr>
+        <p:txBody>
+          <a:bodyPr wrap="square" lIns="0" tIns="0" rIns="0" bIns="0" rtlCol="0" anchor="ctr"/>
+          <a:lstStyle/>
+          <a:p>
+            <a:pPr algn="ctr" indent="0" marL="0">
+              <a:lnSpc>
+                <a:spcPts val="1500"/>
+              </a:lnSpc>
+              <a:buNone/>
+            </a:pPr>
+            <a:r>
+              <a:rPr lang="en-US" sz="1300" dirty="0">
+                <a:solidFill>
+                  <a:srgbClr val="0000FF"/>
+                </a:solidFill>
+                <a:latin typeface="Arial" pitchFamily="34" charset="0"/>
+                <a:ea typeface="Arial" pitchFamily="34" charset="-122"/>
+                <a:cs typeface="Arial" pitchFamily="34" charset="-120"/>
+              </a:rPr>
+              <a:t>5</a:t>
+            </a:r>
+            <a:endParaRPr lang="en-US" sz="1300" dirty="0"/>
+          </a:p>
+        </p:txBody>
+      </p:sp>
+      <p:sp>
+        <p:nvSpPr>
+          <p:cNvPr id="172" name="Text 170"/>
+          <p:cNvSpPr/>
+          <p:nvPr/>
+        </p:nvSpPr>
+        <p:spPr>
+          <a:xfrm>
+            <a:off x="4644390" y="4364990"/>
+            <a:ext cx="127000" cy="190500"/>
+          </a:xfrm>
+          <a:prstGeom prst="rect">
+            <a:avLst/>
+          </a:prstGeom>
+          <a:noFill/>
+          <a:ln/>
+        </p:spPr>
+        <p:txBody>
+          <a:bodyPr wrap="square" lIns="0" tIns="0" rIns="0" bIns="0" rtlCol="0" anchor="ctr"/>
+          <a:lstStyle/>
+          <a:p>
+            <a:pPr algn="ctr" indent="0" marL="0">
+              <a:lnSpc>
+                <a:spcPts val="1500"/>
+              </a:lnSpc>
+              <a:buNone/>
+            </a:pPr>
+            <a:r>
+              <a:rPr lang="en-US" sz="1300" dirty="0">
+                <a:solidFill>
+                  <a:srgbClr val="0000FF"/>
+                </a:solidFill>
+                <a:latin typeface="Arial" pitchFamily="34" charset="0"/>
+                <a:ea typeface="Arial" pitchFamily="34" charset="-122"/>
+                <a:cs typeface="Arial" pitchFamily="34" charset="-120"/>
+              </a:rPr>
+              <a:t>4</a:t>
+            </a:r>
+            <a:endParaRPr lang="en-US" sz="1300" dirty="0"/>
+          </a:p>
+        </p:txBody>
+      </p:sp>
+      <p:sp>
+        <p:nvSpPr>
+          <p:cNvPr id="173" name="Shape 171"/>
+          <p:cNvSpPr/>
+          <p:nvPr/>
+        </p:nvSpPr>
+        <p:spPr>
+          <a:xfrm>
+            <a:off x="4178300" y="4381500"/>
+            <a:ext cx="12700" cy="165100"/>
           </a:xfrm>
           <a:prstGeom prst="rect">
             <a:avLst/>
@@ -8787,14 +8164,14 @@
       </p:sp>
       <p:sp>
         <p:nvSpPr>
-          <p:cNvPr id="185" name="Shape 183"/>
-          <p:cNvSpPr/>
-          <p:nvPr/>
-        </p:nvSpPr>
-        <p:spPr>
-          <a:xfrm>
-            <a:off x="9709150" y="5207000"/>
-            <a:ext cx="12700" cy="584200"/>
+          <p:cNvPr id="174" name="Shape 172"/>
+          <p:cNvSpPr/>
+          <p:nvPr/>
+        </p:nvSpPr>
+        <p:spPr>
+          <a:xfrm>
+            <a:off x="4762500" y="4394200"/>
+            <a:ext cx="12700" cy="152400"/>
           </a:xfrm>
           <a:prstGeom prst="rect">
             <a:avLst/>
@@ -8807,291 +8184,13 @@
       </p:sp>
       <p:sp>
         <p:nvSpPr>
-          <p:cNvPr id="186" name="Text 184"/>
-          <p:cNvSpPr/>
-          <p:nvPr/>
-        </p:nvSpPr>
-        <p:spPr>
-          <a:xfrm>
-            <a:off x="9417050" y="5200650"/>
-            <a:ext cx="279400" cy="203200"/>
-          </a:xfrm>
-          <a:prstGeom prst="rect">
-            <a:avLst/>
-          </a:prstGeom>
-          <a:noFill/>
-          <a:ln/>
-        </p:spPr>
-        <p:txBody>
-          <a:bodyPr wrap="square" lIns="0" tIns="0" rIns="0" bIns="0" rtlCol="0" anchor="ctr"/>
-          <a:lstStyle/>
-          <a:p>
-            <a:pPr algn="ctr" indent="0" marL="0">
-              <a:lnSpc>
-                <a:spcPts val="1500"/>
-              </a:lnSpc>
-              <a:buNone/>
-            </a:pPr>
-            <a:r>
-              <a:rPr lang="en-US" sz="1300" dirty="0">
-                <a:solidFill>
-                  <a:srgbClr val="000000"/>
-                </a:solidFill>
-                <a:latin typeface="Arial" pitchFamily="34" charset="0"/>
-                <a:ea typeface="Arial" pitchFamily="34" charset="-122"/>
-                <a:cs typeface="Arial" pitchFamily="34" charset="-120"/>
-              </a:rPr>
-              <a:t>14</a:t>
-            </a:r>
-            <a:endParaRPr lang="en-US" sz="1300" dirty="0"/>
-          </a:p>
-        </p:txBody>
-      </p:sp>
-      <p:sp>
-        <p:nvSpPr>
-          <p:cNvPr id="187" name="Text 185"/>
-          <p:cNvSpPr/>
-          <p:nvPr/>
-        </p:nvSpPr>
-        <p:spPr>
-          <a:xfrm>
-            <a:off x="9417050" y="5397500"/>
-            <a:ext cx="279400" cy="203200"/>
-          </a:xfrm>
-          <a:prstGeom prst="rect">
-            <a:avLst/>
-          </a:prstGeom>
-          <a:noFill/>
-          <a:ln/>
-        </p:spPr>
-        <p:txBody>
-          <a:bodyPr wrap="square" lIns="0" tIns="0" rIns="0" bIns="0" rtlCol="0" anchor="ctr"/>
-          <a:lstStyle/>
-          <a:p>
-            <a:pPr algn="ctr" indent="0" marL="0">
-              <a:lnSpc>
-                <a:spcPts val="1500"/>
-              </a:lnSpc>
-              <a:buNone/>
-            </a:pPr>
-            <a:r>
-              <a:rPr lang="en-US" sz="1300" dirty="0">
-                <a:solidFill>
-                  <a:srgbClr val="000000"/>
-                </a:solidFill>
-                <a:latin typeface="Arial" pitchFamily="34" charset="0"/>
-                <a:ea typeface="Arial" pitchFamily="34" charset="-122"/>
-                <a:cs typeface="Arial" pitchFamily="34" charset="-120"/>
-              </a:rPr>
-              <a:t>−4</a:t>
-            </a:r>
-            <a:endParaRPr lang="en-US" sz="1300" dirty="0"/>
-          </a:p>
-        </p:txBody>
-      </p:sp>
-      <p:sp>
-        <p:nvSpPr>
-          <p:cNvPr id="188" name="Text 186"/>
-          <p:cNvSpPr/>
-          <p:nvPr/>
-        </p:nvSpPr>
-        <p:spPr>
-          <a:xfrm>
-            <a:off x="9417050" y="5594350"/>
-            <a:ext cx="279400" cy="203200"/>
-          </a:xfrm>
-          <a:prstGeom prst="rect">
-            <a:avLst/>
-          </a:prstGeom>
-          <a:noFill/>
-          <a:ln/>
-        </p:spPr>
-        <p:txBody>
-          <a:bodyPr wrap="square" lIns="0" tIns="0" rIns="0" bIns="0" rtlCol="0" anchor="ctr"/>
-          <a:lstStyle/>
-          <a:p>
-            <a:pPr algn="ctr" indent="0" marL="0">
-              <a:lnSpc>
-                <a:spcPts val="1500"/>
-              </a:lnSpc>
-              <a:buNone/>
-            </a:pPr>
-            <a:r>
-              <a:rPr lang="en-US" sz="1300" dirty="0">
-                <a:solidFill>
-                  <a:srgbClr val="000000"/>
-                </a:solidFill>
-                <a:latin typeface="Arial" pitchFamily="34" charset="0"/>
-                <a:ea typeface="Arial" pitchFamily="34" charset="-122"/>
-                <a:cs typeface="Arial" pitchFamily="34" charset="-120"/>
-              </a:rPr>
-              <a:t>0</a:t>
-            </a:r>
-            <a:endParaRPr lang="en-US" sz="1300" dirty="0"/>
-          </a:p>
-        </p:txBody>
-      </p:sp>
-      <p:sp>
-        <p:nvSpPr>
-          <p:cNvPr id="189" name="Text 187"/>
-          <p:cNvSpPr/>
-          <p:nvPr/>
-        </p:nvSpPr>
-        <p:spPr>
-          <a:xfrm>
-            <a:off x="3594100" y="6203950"/>
-            <a:ext cx="635000" cy="228600"/>
-          </a:xfrm>
-          <a:prstGeom prst="rect">
-            <a:avLst/>
-          </a:prstGeom>
-          <a:noFill/>
-          <a:ln/>
-        </p:spPr>
-        <p:txBody>
-          <a:bodyPr wrap="square" lIns="0" tIns="0" rIns="0" bIns="0" rtlCol="0" anchor="ctr"/>
-          <a:lstStyle/>
-          <a:p>
-            <a:pPr algn="l" indent="0" marL="0">
-              <a:lnSpc>
-                <a:spcPts val="1500"/>
-              </a:lnSpc>
-              <a:buNone/>
-            </a:pPr>
-            <a:r>
-              <a:rPr lang="en-US" sz="1300" dirty="0">
-                <a:solidFill>
-                  <a:srgbClr val="000000"/>
-                </a:solidFill>
-                <a:latin typeface="Arial" pitchFamily="34" charset="0"/>
-                <a:ea typeface="Arial" pitchFamily="34" charset="-122"/>
-                <a:cs typeface="Arial" pitchFamily="34" charset="-120"/>
-              </a:rPr>
-              <a:t>d(</a:t>
-            </a:r>
-            <a:pPr algn="l" indent="0" marL="0">
-              <a:lnSpc>
-                <a:spcPts val="1500"/>
-              </a:lnSpc>
-              <a:buNone/>
-            </a:pPr>
-            <a:r>
-              <a:rPr lang="en-US" sz="1300" dirty="0">
-                <a:solidFill>
-                  <a:srgbClr val="000000"/>
-                </a:solidFill>
-                <a:latin typeface="Arial" pitchFamily="34" charset="0"/>
-                <a:ea typeface="Arial" pitchFamily="34" charset="-122"/>
-                <a:cs typeface="Arial" pitchFamily="34" charset="-120"/>
-              </a:rPr>
-              <a:t>x</a:t>
-            </a:r>
-            <a:pPr algn="l" indent="0" marL="0">
-              <a:lnSpc>
-                <a:spcPts val="1500"/>
-              </a:lnSpc>
-              <a:buNone/>
-            </a:pPr>
-            <a:r>
-              <a:rPr lang="en-US" sz="950" baseline="-40000" dirty="0">
-                <a:solidFill>
-                  <a:srgbClr val="000000"/>
-                </a:solidFill>
-                <a:latin typeface="Arial" pitchFamily="34" charset="0"/>
-                <a:ea typeface="Arial" pitchFamily="34" charset="-122"/>
-                <a:cs typeface="Arial" pitchFamily="34" charset="-120"/>
-              </a:rPr>
-              <a:t>6</a:t>
-            </a:r>
-            <a:pPr algn="l" indent="0" marL="0">
-              <a:lnSpc>
-                <a:spcPts val="1500"/>
-              </a:lnSpc>
-              <a:buNone/>
-            </a:pPr>
-            <a:r>
-              <a:rPr lang="en-US" sz="1300" dirty="0">
-                <a:solidFill>
-                  <a:srgbClr val="000000"/>
-                </a:solidFill>
-                <a:latin typeface="Arial" pitchFamily="34" charset="0"/>
-                <a:ea typeface="Arial" pitchFamily="34" charset="-122"/>
-                <a:cs typeface="Arial" pitchFamily="34" charset="-120"/>
-              </a:rPr>
-              <a:t>)</a:t>
-            </a:r>
-            <a:pPr algn="l" indent="0" marL="0">
-              <a:lnSpc>
-                <a:spcPts val="1500"/>
-              </a:lnSpc>
-              <a:buNone/>
-            </a:pPr>
-            <a:r>
-              <a:rPr lang="en-US" sz="1300" dirty="0">
-                <a:solidFill>
-                  <a:srgbClr val="000000"/>
-                </a:solidFill>
-                <a:latin typeface="Arial" pitchFamily="34" charset="0"/>
-                <a:ea typeface="Arial" pitchFamily="34" charset="-122"/>
-                <a:cs typeface="Arial" pitchFamily="34" charset="-120"/>
-              </a:rPr>
-              <a:t> = </a:t>
-            </a:r>
-            <a:endParaRPr lang="en-US" sz="1300" dirty="0"/>
-          </a:p>
-        </p:txBody>
-      </p:sp>
-      <p:sp>
-        <p:nvSpPr>
-          <p:cNvPr id="190" name="Text 188"/>
-          <p:cNvSpPr/>
-          <p:nvPr/>
-        </p:nvSpPr>
-        <p:spPr>
-          <a:xfrm>
-            <a:off x="4241800" y="6203950"/>
-            <a:ext cx="558800" cy="228600"/>
-          </a:xfrm>
-          <a:prstGeom prst="rect">
-            <a:avLst/>
-          </a:prstGeom>
-          <a:noFill/>
-          <a:ln/>
-        </p:spPr>
-        <p:txBody>
-          <a:bodyPr wrap="square" lIns="0" tIns="0" rIns="0" bIns="0" rtlCol="0" anchor="ctr"/>
-          <a:lstStyle/>
-          <a:p>
-            <a:pPr algn="l" indent="0" marL="0">
-              <a:lnSpc>
-                <a:spcPts val="1500"/>
-              </a:lnSpc>
-              <a:buNone/>
-            </a:pPr>
-            <a:r>
-              <a:rPr lang="en-US" sz="1300" spc="300" kern="0" dirty="0">
-                <a:solidFill>
-                  <a:srgbClr val="0000FF"/>
-                </a:solidFill>
-                <a:latin typeface="Arial" pitchFamily="34" charset="0"/>
-                <a:ea typeface="Arial" pitchFamily="34" charset="-122"/>
-                <a:cs typeface="Arial" pitchFamily="34" charset="-120"/>
-              </a:rPr>
-              <a:t>1 6 6</a:t>
-            </a:r>
-            <a:endParaRPr lang="en-US" sz="1300" dirty="0"/>
-          </a:p>
-        </p:txBody>
-      </p:sp>
-      <p:sp>
-        <p:nvSpPr>
-          <p:cNvPr id="191" name="Shape 189"/>
-          <p:cNvSpPr/>
-          <p:nvPr/>
-        </p:nvSpPr>
-        <p:spPr>
-          <a:xfrm>
-            <a:off x="4819650" y="6045200"/>
+          <p:cNvPr id="175" name="Shape 173"/>
+          <p:cNvSpPr/>
+          <p:nvPr/>
+        </p:nvSpPr>
+        <p:spPr>
+          <a:xfrm>
+            <a:off x="4819650" y="4368800"/>
             <a:ext cx="12700" cy="584200"/>
           </a:xfrm>
           <a:prstGeom prst="rect">
@@ -9105,13 +8204,13 @@
       </p:sp>
       <p:sp>
         <p:nvSpPr>
-          <p:cNvPr id="192" name="Shape 190"/>
-          <p:cNvSpPr/>
-          <p:nvPr/>
-        </p:nvSpPr>
-        <p:spPr>
-          <a:xfrm>
-            <a:off x="5124450" y="6045200"/>
+          <p:cNvPr id="176" name="Shape 174"/>
+          <p:cNvSpPr/>
+          <p:nvPr/>
+        </p:nvSpPr>
+        <p:spPr>
+          <a:xfrm>
+            <a:off x="5124450" y="4368800"/>
             <a:ext cx="12700" cy="584200"/>
           </a:xfrm>
           <a:prstGeom prst="rect">
@@ -9125,13 +8224,13 @@
       </p:sp>
       <p:sp>
         <p:nvSpPr>
-          <p:cNvPr id="193" name="Text 191"/>
-          <p:cNvSpPr/>
-          <p:nvPr/>
-        </p:nvSpPr>
-        <p:spPr>
-          <a:xfrm>
-            <a:off x="4832350" y="6038850"/>
+          <p:cNvPr id="177" name="Text 175"/>
+          <p:cNvSpPr/>
+          <p:nvPr/>
+        </p:nvSpPr>
+        <p:spPr>
+          <a:xfrm>
+            <a:off x="4832350" y="4362450"/>
             <a:ext cx="279400" cy="203200"/>
           </a:xfrm>
           <a:prstGeom prst="rect">
@@ -9167,13 +8266,13 @@
       </p:sp>
       <p:sp>
         <p:nvSpPr>
-          <p:cNvPr id="194" name="Text 192"/>
-          <p:cNvSpPr/>
-          <p:nvPr/>
-        </p:nvSpPr>
-        <p:spPr>
-          <a:xfrm>
-            <a:off x="4832350" y="6235700"/>
+          <p:cNvPr id="178" name="Text 176"/>
+          <p:cNvSpPr/>
+          <p:nvPr/>
+        </p:nvSpPr>
+        <p:spPr>
+          <a:xfrm>
+            <a:off x="4832350" y="4559300"/>
             <a:ext cx="279400" cy="203200"/>
           </a:xfrm>
           <a:prstGeom prst="rect">
@@ -9209,13 +8308,13 @@
       </p:sp>
       <p:sp>
         <p:nvSpPr>
-          <p:cNvPr id="195" name="Text 193"/>
-          <p:cNvSpPr/>
-          <p:nvPr/>
-        </p:nvSpPr>
-        <p:spPr>
-          <a:xfrm>
-            <a:off x="4832350" y="6432550"/>
+          <p:cNvPr id="179" name="Text 177"/>
+          <p:cNvSpPr/>
+          <p:nvPr/>
+        </p:nvSpPr>
+        <p:spPr>
+          <a:xfrm>
+            <a:off x="4832350" y="4756150"/>
             <a:ext cx="279400" cy="203200"/>
           </a:xfrm>
           <a:prstGeom prst="rect">
@@ -9251,13 +8350,13 @@
       </p:sp>
       <p:sp>
         <p:nvSpPr>
-          <p:cNvPr id="196" name="Text 194"/>
-          <p:cNvSpPr/>
-          <p:nvPr/>
-        </p:nvSpPr>
-        <p:spPr>
-          <a:xfrm>
-            <a:off x="5219700" y="6203950"/>
+          <p:cNvPr id="180" name="Text 178"/>
+          <p:cNvSpPr/>
+          <p:nvPr/>
+        </p:nvSpPr>
+        <p:spPr>
+          <a:xfrm>
+            <a:off x="5232400" y="4565650"/>
             <a:ext cx="736600" cy="228600"/>
           </a:xfrm>
           <a:prstGeom prst="rect">
@@ -9285,21 +8384,21 @@
                 <a:ea typeface="Arial" pitchFamily="34" charset="-122"/>
                 <a:cs typeface="Arial" pitchFamily="34" charset="-120"/>
               </a:rPr>
-              <a:t>= −112</a:t>
-            </a:r>
-            <a:endParaRPr lang="en-US" sz="1300" dirty="0"/>
-          </a:p>
-        </p:txBody>
-      </p:sp>
-      <p:sp>
-        <p:nvSpPr>
-          <p:cNvPr id="197" name="Text 195"/>
-          <p:cNvSpPr/>
-          <p:nvPr/>
-        </p:nvSpPr>
-        <p:spPr>
-          <a:xfrm>
-            <a:off x="6629400" y="6203950"/>
+              <a:t>= −6</a:t>
+            </a:r>
+            <a:endParaRPr lang="en-US" sz="1300" dirty="0"/>
+          </a:p>
+        </p:txBody>
+      </p:sp>
+      <p:sp>
+        <p:nvSpPr>
+          <p:cNvPr id="181" name="Text 179"/>
+          <p:cNvSpPr/>
+          <p:nvPr/>
+        </p:nvSpPr>
+        <p:spPr>
+          <a:xfrm>
+            <a:off x="6477000" y="4565650"/>
             <a:ext cx="203200" cy="228600"/>
           </a:xfrm>
           <a:prstGeom prst="rect">
@@ -9335,13 +8434,13 @@
       </p:sp>
       <p:sp>
         <p:nvSpPr>
-          <p:cNvPr id="198" name="Text 196"/>
-          <p:cNvSpPr/>
-          <p:nvPr/>
-        </p:nvSpPr>
-        <p:spPr>
-          <a:xfrm>
-            <a:off x="6870700" y="6203950"/>
+          <p:cNvPr id="182" name="Text 180"/>
+          <p:cNvSpPr/>
+          <p:nvPr/>
+        </p:nvSpPr>
+        <p:spPr>
+          <a:xfrm>
+            <a:off x="6731000" y="4565650"/>
             <a:ext cx="2209800" cy="228600"/>
           </a:xfrm>
           <a:prstGeom prst="rect">
@@ -9411,13 +8510,13 @@
       </p:sp>
       <p:sp>
         <p:nvSpPr>
-          <p:cNvPr id="199" name="Text 197"/>
-          <p:cNvSpPr/>
-          <p:nvPr/>
-        </p:nvSpPr>
-        <p:spPr>
-          <a:xfrm>
-            <a:off x="9156700" y="6203950"/>
+          <p:cNvPr id="183" name="Text 181"/>
+          <p:cNvSpPr/>
+          <p:nvPr/>
+        </p:nvSpPr>
+        <p:spPr>
+          <a:xfrm>
+            <a:off x="9017000" y="4565650"/>
             <a:ext cx="342900" cy="228600"/>
           </a:xfrm>
           <a:prstGeom prst="rect">
@@ -9470,13 +8569,13 @@
       </p:sp>
       <p:sp>
         <p:nvSpPr>
-          <p:cNvPr id="200" name="Shape 198"/>
-          <p:cNvSpPr/>
-          <p:nvPr/>
-        </p:nvSpPr>
-        <p:spPr>
-          <a:xfrm>
-            <a:off x="9474200" y="6045200"/>
+          <p:cNvPr id="184" name="Shape 182"/>
+          <p:cNvSpPr/>
+          <p:nvPr/>
+        </p:nvSpPr>
+        <p:spPr>
+          <a:xfrm>
+            <a:off x="9340850" y="4368800"/>
             <a:ext cx="12700" cy="584200"/>
           </a:xfrm>
           <a:prstGeom prst="rect">
@@ -9490,13 +8589,13 @@
       </p:sp>
       <p:sp>
         <p:nvSpPr>
-          <p:cNvPr id="201" name="Shape 199"/>
-          <p:cNvSpPr/>
-          <p:nvPr/>
-        </p:nvSpPr>
-        <p:spPr>
-          <a:xfrm>
-            <a:off x="9779000" y="6045200"/>
+          <p:cNvPr id="185" name="Shape 183"/>
+          <p:cNvSpPr/>
+          <p:nvPr/>
+        </p:nvSpPr>
+        <p:spPr>
+          <a:xfrm>
+            <a:off x="9645650" y="4368800"/>
             <a:ext cx="12700" cy="584200"/>
           </a:xfrm>
           <a:prstGeom prst="rect">
@@ -9510,7 +8609,1661 @@
       </p:sp>
       <p:sp>
         <p:nvSpPr>
+          <p:cNvPr id="186" name="Text 184"/>
+          <p:cNvSpPr/>
+          <p:nvPr/>
+        </p:nvSpPr>
+        <p:spPr>
+          <a:xfrm>
+            <a:off x="9353550" y="4362450"/>
+            <a:ext cx="279400" cy="203200"/>
+          </a:xfrm>
+          <a:prstGeom prst="rect">
+            <a:avLst/>
+          </a:prstGeom>
+          <a:noFill/>
+          <a:ln/>
+        </p:spPr>
+        <p:txBody>
+          <a:bodyPr wrap="square" lIns="0" tIns="0" rIns="0" bIns="0" rtlCol="0" anchor="ctr"/>
+          <a:lstStyle/>
+          <a:p>
+            <a:pPr algn="ctr" indent="0" marL="0">
+              <a:lnSpc>
+                <a:spcPts val="1500"/>
+              </a:lnSpc>
+              <a:buNone/>
+            </a:pPr>
+            <a:r>
+              <a:rPr lang="en-US" sz="1300" dirty="0">
+                <a:solidFill>
+                  <a:srgbClr val="000000"/>
+                </a:solidFill>
+                <a:latin typeface="Arial" pitchFamily="34" charset="0"/>
+                <a:ea typeface="Arial" pitchFamily="34" charset="-122"/>
+                <a:cs typeface="Arial" pitchFamily="34" charset="-120"/>
+              </a:rPr>
+              <a:t>14</a:t>
+            </a:r>
+            <a:endParaRPr lang="en-US" sz="1300" dirty="0"/>
+          </a:p>
+        </p:txBody>
+      </p:sp>
+      <p:sp>
+        <p:nvSpPr>
+          <p:cNvPr id="187" name="Text 185"/>
+          <p:cNvSpPr/>
+          <p:nvPr/>
+        </p:nvSpPr>
+        <p:spPr>
+          <a:xfrm>
+            <a:off x="9353550" y="4559300"/>
+            <a:ext cx="279400" cy="203200"/>
+          </a:xfrm>
+          <a:prstGeom prst="rect">
+            <a:avLst/>
+          </a:prstGeom>
+          <a:noFill/>
+          <a:ln/>
+        </p:spPr>
+        <p:txBody>
+          <a:bodyPr wrap="square" lIns="0" tIns="0" rIns="0" bIns="0" rtlCol="0" anchor="ctr"/>
+          <a:lstStyle/>
+          <a:p>
+            <a:pPr algn="ctr" indent="0" marL="0">
+              <a:lnSpc>
+                <a:spcPts val="1500"/>
+              </a:lnSpc>
+              <a:buNone/>
+            </a:pPr>
+            <a:r>
+              <a:rPr lang="en-US" sz="1300" dirty="0">
+                <a:solidFill>
+                  <a:srgbClr val="000000"/>
+                </a:solidFill>
+                <a:latin typeface="Arial" pitchFamily="34" charset="0"/>
+                <a:ea typeface="Arial" pitchFamily="34" charset="-122"/>
+                <a:cs typeface="Arial" pitchFamily="34" charset="-120"/>
+              </a:rPr>
+              <a:t>−4</a:t>
+            </a:r>
+            <a:endParaRPr lang="en-US" sz="1300" dirty="0"/>
+          </a:p>
+        </p:txBody>
+      </p:sp>
+      <p:sp>
+        <p:nvSpPr>
+          <p:cNvPr id="188" name="Text 186"/>
+          <p:cNvSpPr/>
+          <p:nvPr/>
+        </p:nvSpPr>
+        <p:spPr>
+          <a:xfrm>
+            <a:off x="9353550" y="4756150"/>
+            <a:ext cx="279400" cy="203200"/>
+          </a:xfrm>
+          <a:prstGeom prst="rect">
+            <a:avLst/>
+          </a:prstGeom>
+          <a:noFill/>
+          <a:ln/>
+        </p:spPr>
+        <p:txBody>
+          <a:bodyPr wrap="square" lIns="0" tIns="0" rIns="0" bIns="0" rtlCol="0" anchor="ctr"/>
+          <a:lstStyle/>
+          <a:p>
+            <a:pPr algn="ctr" indent="0" marL="0">
+              <a:lnSpc>
+                <a:spcPts val="1500"/>
+              </a:lnSpc>
+              <a:buNone/>
+            </a:pPr>
+            <a:r>
+              <a:rPr lang="en-US" sz="1300" dirty="0">
+                <a:solidFill>
+                  <a:srgbClr val="000000"/>
+                </a:solidFill>
+                <a:latin typeface="Arial" pitchFamily="34" charset="0"/>
+                <a:ea typeface="Arial" pitchFamily="34" charset="-122"/>
+                <a:cs typeface="Arial" pitchFamily="34" charset="-120"/>
+              </a:rPr>
+              <a:t>0</a:t>
+            </a:r>
+            <a:endParaRPr lang="en-US" sz="1300" dirty="0"/>
+          </a:p>
+        </p:txBody>
+      </p:sp>
+      <p:sp>
+        <p:nvSpPr>
+          <p:cNvPr id="189" name="Text 187"/>
+          <p:cNvSpPr/>
+          <p:nvPr/>
+        </p:nvSpPr>
+        <p:spPr>
+          <a:xfrm>
+            <a:off x="3594100" y="5365750"/>
+            <a:ext cx="635000" cy="228600"/>
+          </a:xfrm>
+          <a:prstGeom prst="rect">
+            <a:avLst/>
+          </a:prstGeom>
+          <a:noFill/>
+          <a:ln/>
+        </p:spPr>
+        <p:txBody>
+          <a:bodyPr wrap="square" lIns="0" tIns="0" rIns="0" bIns="0" rtlCol="0" anchor="ctr"/>
+          <a:lstStyle/>
+          <a:p>
+            <a:pPr algn="l" indent="0" marL="0">
+              <a:lnSpc>
+                <a:spcPts val="1500"/>
+              </a:lnSpc>
+              <a:buNone/>
+            </a:pPr>
+            <a:r>
+              <a:rPr lang="en-US" sz="1300" dirty="0">
+                <a:solidFill>
+                  <a:srgbClr val="000000"/>
+                </a:solidFill>
+                <a:latin typeface="Arial" pitchFamily="34" charset="0"/>
+                <a:ea typeface="Arial" pitchFamily="34" charset="-122"/>
+                <a:cs typeface="Arial" pitchFamily="34" charset="-120"/>
+              </a:rPr>
+              <a:t>d(</a:t>
+            </a:r>
+            <a:pPr algn="l" indent="0" marL="0">
+              <a:lnSpc>
+                <a:spcPts val="1500"/>
+              </a:lnSpc>
+              <a:buNone/>
+            </a:pPr>
+            <a:r>
+              <a:rPr lang="en-US" sz="1300" dirty="0">
+                <a:solidFill>
+                  <a:srgbClr val="000000"/>
+                </a:solidFill>
+                <a:latin typeface="Arial" pitchFamily="34" charset="0"/>
+                <a:ea typeface="Arial" pitchFamily="34" charset="-122"/>
+                <a:cs typeface="Arial" pitchFamily="34" charset="-120"/>
+              </a:rPr>
+              <a:t>x</a:t>
+            </a:r>
+            <a:pPr algn="l" indent="0" marL="0">
+              <a:lnSpc>
+                <a:spcPts val="1500"/>
+              </a:lnSpc>
+              <a:buNone/>
+            </a:pPr>
+            <a:r>
+              <a:rPr lang="en-US" sz="950" baseline="-40000" dirty="0">
+                <a:solidFill>
+                  <a:srgbClr val="000000"/>
+                </a:solidFill>
+                <a:latin typeface="Arial" pitchFamily="34" charset="0"/>
+                <a:ea typeface="Arial" pitchFamily="34" charset="-122"/>
+                <a:cs typeface="Arial" pitchFamily="34" charset="-120"/>
+              </a:rPr>
+              <a:t>5</a:t>
+            </a:r>
+            <a:pPr algn="l" indent="0" marL="0">
+              <a:lnSpc>
+                <a:spcPts val="1500"/>
+              </a:lnSpc>
+              <a:buNone/>
+            </a:pPr>
+            <a:r>
+              <a:rPr lang="en-US" sz="1300" dirty="0">
+                <a:solidFill>
+                  <a:srgbClr val="000000"/>
+                </a:solidFill>
+                <a:latin typeface="Arial" pitchFamily="34" charset="0"/>
+                <a:ea typeface="Arial" pitchFamily="34" charset="-122"/>
+                <a:cs typeface="Arial" pitchFamily="34" charset="-120"/>
+              </a:rPr>
+              <a:t>)</a:t>
+            </a:r>
+            <a:pPr algn="l" indent="0" marL="0">
+              <a:lnSpc>
+                <a:spcPts val="1500"/>
+              </a:lnSpc>
+              <a:buNone/>
+            </a:pPr>
+            <a:r>
+              <a:rPr lang="en-US" sz="1300" dirty="0">
+                <a:solidFill>
+                  <a:srgbClr val="000000"/>
+                </a:solidFill>
+                <a:latin typeface="Arial" pitchFamily="34" charset="0"/>
+                <a:ea typeface="Arial" pitchFamily="34" charset="-122"/>
+                <a:cs typeface="Arial" pitchFamily="34" charset="-120"/>
+              </a:rPr>
+              <a:t> = </a:t>
+            </a:r>
+            <a:endParaRPr lang="en-US" sz="1300" dirty="0"/>
+          </a:p>
+        </p:txBody>
+      </p:sp>
+      <p:sp>
+        <p:nvSpPr>
+          <p:cNvPr id="190" name="Text 188"/>
+          <p:cNvSpPr/>
+          <p:nvPr/>
+        </p:nvSpPr>
+        <p:spPr>
+          <a:xfrm>
+            <a:off x="4187190" y="5203190"/>
+            <a:ext cx="127000" cy="190500"/>
+          </a:xfrm>
+          <a:prstGeom prst="rect">
+            <a:avLst/>
+          </a:prstGeom>
+          <a:noFill/>
+          <a:ln/>
+        </p:spPr>
+        <p:txBody>
+          <a:bodyPr wrap="square" lIns="0" tIns="0" rIns="0" bIns="0" rtlCol="0" anchor="ctr"/>
+          <a:lstStyle/>
+          <a:p>
+            <a:pPr algn="ctr" indent="0" marL="0">
+              <a:lnSpc>
+                <a:spcPts val="1500"/>
+              </a:lnSpc>
+              <a:buNone/>
+            </a:pPr>
+            <a:r>
+              <a:rPr lang="en-US" sz="1300" dirty="0">
+                <a:solidFill>
+                  <a:srgbClr val="0000FF"/>
+                </a:solidFill>
+                <a:latin typeface="Arial" pitchFamily="34" charset="0"/>
+                <a:ea typeface="Arial" pitchFamily="34" charset="-122"/>
+                <a:cs typeface="Arial" pitchFamily="34" charset="-120"/>
+              </a:rPr>
+              <a:t>1</a:t>
+            </a:r>
+            <a:endParaRPr lang="en-US" sz="1300" dirty="0"/>
+          </a:p>
+        </p:txBody>
+      </p:sp>
+      <p:sp>
+        <p:nvSpPr>
+          <p:cNvPr id="191" name="Text 189"/>
+          <p:cNvSpPr/>
+          <p:nvPr/>
+        </p:nvSpPr>
+        <p:spPr>
+          <a:xfrm>
+            <a:off x="4414520" y="5203190"/>
+            <a:ext cx="127000" cy="190500"/>
+          </a:xfrm>
+          <a:prstGeom prst="rect">
+            <a:avLst/>
+          </a:prstGeom>
+          <a:noFill/>
+          <a:ln/>
+        </p:spPr>
+        <p:txBody>
+          <a:bodyPr wrap="square" lIns="0" tIns="0" rIns="0" bIns="0" rtlCol="0" anchor="ctr"/>
+          <a:lstStyle/>
+          <a:p>
+            <a:pPr algn="ctr" indent="0" marL="0">
+              <a:lnSpc>
+                <a:spcPts val="1500"/>
+              </a:lnSpc>
+              <a:buNone/>
+            </a:pPr>
+            <a:r>
+              <a:rPr lang="en-US" sz="1300" dirty="0">
+                <a:solidFill>
+                  <a:srgbClr val="0000FF"/>
+                </a:solidFill>
+                <a:latin typeface="Arial" pitchFamily="34" charset="0"/>
+                <a:ea typeface="Arial" pitchFamily="34" charset="-122"/>
+                <a:cs typeface="Arial" pitchFamily="34" charset="-120"/>
+              </a:rPr>
+              <a:t>6</a:t>
+            </a:r>
+            <a:endParaRPr lang="en-US" sz="1300" dirty="0"/>
+          </a:p>
+        </p:txBody>
+      </p:sp>
+      <p:sp>
+        <p:nvSpPr>
+          <p:cNvPr id="192" name="Text 190"/>
+          <p:cNvSpPr/>
+          <p:nvPr/>
+        </p:nvSpPr>
+        <p:spPr>
+          <a:xfrm>
+            <a:off x="4644390" y="5203190"/>
+            <a:ext cx="127000" cy="190500"/>
+          </a:xfrm>
+          <a:prstGeom prst="rect">
+            <a:avLst/>
+          </a:prstGeom>
+          <a:noFill/>
+          <a:ln/>
+        </p:spPr>
+        <p:txBody>
+          <a:bodyPr wrap="square" lIns="0" tIns="0" rIns="0" bIns="0" rtlCol="0" anchor="ctr"/>
+          <a:lstStyle/>
+          <a:p>
+            <a:pPr algn="ctr" indent="0" marL="0">
+              <a:lnSpc>
+                <a:spcPts val="1500"/>
+              </a:lnSpc>
+              <a:buNone/>
+            </a:pPr>
+            <a:r>
+              <a:rPr lang="en-US" sz="1300" dirty="0">
+                <a:solidFill>
+                  <a:srgbClr val="0000FF"/>
+                </a:solidFill>
+                <a:latin typeface="Arial" pitchFamily="34" charset="0"/>
+                <a:ea typeface="Arial" pitchFamily="34" charset="-122"/>
+                <a:cs typeface="Arial" pitchFamily="34" charset="-120"/>
+              </a:rPr>
+              <a:t>5</a:t>
+            </a:r>
+            <a:endParaRPr lang="en-US" sz="1300" dirty="0"/>
+          </a:p>
+        </p:txBody>
+      </p:sp>
+      <p:sp>
+        <p:nvSpPr>
+          <p:cNvPr id="193" name="Shape 191"/>
+          <p:cNvSpPr/>
+          <p:nvPr/>
+        </p:nvSpPr>
+        <p:spPr>
+          <a:xfrm>
+            <a:off x="4178300" y="5219700"/>
+            <a:ext cx="12700" cy="165100"/>
+          </a:xfrm>
+          <a:prstGeom prst="rect">
+            <a:avLst/>
+          </a:prstGeom>
+          <a:solidFill>
+            <a:srgbClr val="A6A6A6"/>
+          </a:solidFill>
+          <a:ln/>
+        </p:spPr>
+      </p:sp>
+      <p:sp>
+        <p:nvSpPr>
+          <p:cNvPr id="194" name="Shape 192"/>
+          <p:cNvSpPr/>
+          <p:nvPr/>
+        </p:nvSpPr>
+        <p:spPr>
+          <a:xfrm>
+            <a:off x="4762500" y="5232400"/>
+            <a:ext cx="12700" cy="152400"/>
+          </a:xfrm>
+          <a:prstGeom prst="rect">
+            <a:avLst/>
+          </a:prstGeom>
+          <a:solidFill>
+            <a:srgbClr val="A6A6A6"/>
+          </a:solidFill>
+          <a:ln/>
+        </p:spPr>
+      </p:sp>
+      <p:sp>
+        <p:nvSpPr>
+          <p:cNvPr id="195" name="Shape 193"/>
+          <p:cNvSpPr/>
+          <p:nvPr/>
+        </p:nvSpPr>
+        <p:spPr>
+          <a:xfrm>
+            <a:off x="4819650" y="5207000"/>
+            <a:ext cx="12700" cy="584200"/>
+          </a:xfrm>
+          <a:prstGeom prst="rect">
+            <a:avLst/>
+          </a:prstGeom>
+          <a:solidFill>
+            <a:srgbClr val="A6A6A6"/>
+          </a:solidFill>
+          <a:ln/>
+        </p:spPr>
+      </p:sp>
+      <p:sp>
+        <p:nvSpPr>
+          <p:cNvPr id="196" name="Shape 194"/>
+          <p:cNvSpPr/>
+          <p:nvPr/>
+        </p:nvSpPr>
+        <p:spPr>
+          <a:xfrm>
+            <a:off x="5124450" y="5207000"/>
+            <a:ext cx="12700" cy="584200"/>
+          </a:xfrm>
+          <a:prstGeom prst="rect">
+            <a:avLst/>
+          </a:prstGeom>
+          <a:solidFill>
+            <a:srgbClr val="A6A6A6"/>
+          </a:solidFill>
+          <a:ln/>
+        </p:spPr>
+      </p:sp>
+      <p:sp>
+        <p:nvSpPr>
+          <p:cNvPr id="197" name="Text 195"/>
+          <p:cNvSpPr/>
+          <p:nvPr/>
+        </p:nvSpPr>
+        <p:spPr>
+          <a:xfrm>
+            <a:off x="4832350" y="5200650"/>
+            <a:ext cx="279400" cy="203200"/>
+          </a:xfrm>
+          <a:prstGeom prst="rect">
+            <a:avLst/>
+          </a:prstGeom>
+          <a:noFill/>
+          <a:ln/>
+        </p:spPr>
+        <p:txBody>
+          <a:bodyPr wrap="square" lIns="0" tIns="0" rIns="0" bIns="0" rtlCol="0" anchor="ctr"/>
+          <a:lstStyle/>
+          <a:p>
+            <a:pPr algn="ctr" indent="0" marL="0">
+              <a:lnSpc>
+                <a:spcPts val="1500"/>
+              </a:lnSpc>
+              <a:buNone/>
+            </a:pPr>
+            <a:r>
+              <a:rPr lang="en-US" sz="1300" dirty="0">
+                <a:solidFill>
+                  <a:srgbClr val="008000"/>
+                </a:solidFill>
+                <a:latin typeface="Arial" pitchFamily="34" charset="0"/>
+                <a:ea typeface="Arial" pitchFamily="34" charset="-122"/>
+                <a:cs typeface="Arial" pitchFamily="34" charset="-120"/>
+              </a:rPr>
+              <a:t>14</a:t>
+            </a:r>
+            <a:endParaRPr lang="en-US" sz="1300" dirty="0"/>
+          </a:p>
+        </p:txBody>
+      </p:sp>
+      <p:sp>
+        <p:nvSpPr>
+          <p:cNvPr id="198" name="Text 196"/>
+          <p:cNvSpPr/>
+          <p:nvPr/>
+        </p:nvSpPr>
+        <p:spPr>
+          <a:xfrm>
+            <a:off x="4832350" y="5397500"/>
+            <a:ext cx="279400" cy="203200"/>
+          </a:xfrm>
+          <a:prstGeom prst="rect">
+            <a:avLst/>
+          </a:prstGeom>
+          <a:noFill/>
+          <a:ln/>
+        </p:spPr>
+        <p:txBody>
+          <a:bodyPr wrap="square" lIns="0" tIns="0" rIns="0" bIns="0" rtlCol="0" anchor="ctr"/>
+          <a:lstStyle/>
+          <a:p>
+            <a:pPr algn="ctr" indent="0" marL="0">
+              <a:lnSpc>
+                <a:spcPts val="1500"/>
+              </a:lnSpc>
+              <a:buNone/>
+            </a:pPr>
+            <a:r>
+              <a:rPr lang="en-US" sz="1300" dirty="0">
+                <a:solidFill>
+                  <a:srgbClr val="008000"/>
+                </a:solidFill>
+                <a:latin typeface="Arial" pitchFamily="34" charset="0"/>
+                <a:ea typeface="Arial" pitchFamily="34" charset="-122"/>
+                <a:cs typeface="Arial" pitchFamily="34" charset="-120"/>
+              </a:rPr>
+              <a:t>−4</a:t>
+            </a:r>
+            <a:endParaRPr lang="en-US" sz="1300" dirty="0"/>
+          </a:p>
+        </p:txBody>
+      </p:sp>
+      <p:sp>
+        <p:nvSpPr>
+          <p:cNvPr id="199" name="Text 197"/>
+          <p:cNvSpPr/>
+          <p:nvPr/>
+        </p:nvSpPr>
+        <p:spPr>
+          <a:xfrm>
+            <a:off x="4832350" y="5594350"/>
+            <a:ext cx="279400" cy="203200"/>
+          </a:xfrm>
+          <a:prstGeom prst="rect">
+            <a:avLst/>
+          </a:prstGeom>
+          <a:noFill/>
+          <a:ln/>
+        </p:spPr>
+        <p:txBody>
+          <a:bodyPr wrap="square" lIns="0" tIns="0" rIns="0" bIns="0" rtlCol="0" anchor="ctr"/>
+          <a:lstStyle/>
+          <a:p>
+            <a:pPr algn="ctr" indent="0" marL="0">
+              <a:lnSpc>
+                <a:spcPts val="1500"/>
+              </a:lnSpc>
+              <a:buNone/>
+            </a:pPr>
+            <a:r>
+              <a:rPr lang="en-US" sz="1300" dirty="0">
+                <a:solidFill>
+                  <a:srgbClr val="008000"/>
+                </a:solidFill>
+                <a:latin typeface="Arial" pitchFamily="34" charset="0"/>
+                <a:ea typeface="Arial" pitchFamily="34" charset="-122"/>
+                <a:cs typeface="Arial" pitchFamily="34" charset="-120"/>
+              </a:rPr>
+              <a:t>0</a:t>
+            </a:r>
+            <a:endParaRPr lang="en-US" sz="1300" dirty="0"/>
+          </a:p>
+        </p:txBody>
+      </p:sp>
+      <p:sp>
+        <p:nvSpPr>
+          <p:cNvPr id="200" name="Text 198"/>
+          <p:cNvSpPr/>
+          <p:nvPr/>
+        </p:nvSpPr>
+        <p:spPr>
+          <a:xfrm>
+            <a:off x="5232400" y="5365750"/>
+            <a:ext cx="736600" cy="228600"/>
+          </a:xfrm>
+          <a:prstGeom prst="rect">
+            <a:avLst/>
+          </a:prstGeom>
+          <a:noFill/>
+          <a:ln/>
+        </p:spPr>
+        <p:txBody>
+          <a:bodyPr wrap="square" lIns="0" tIns="0" rIns="0" bIns="0" rtlCol="0" anchor="ctr"/>
+          <a:lstStyle/>
+          <a:p>
+            <a:pPr algn="l" indent="0" marL="0">
+              <a:lnSpc>
+                <a:spcPts val="1500"/>
+              </a:lnSpc>
+              <a:buNone/>
+            </a:pPr>
+            <a:r>
+              <a:rPr lang="en-US" sz="1300" dirty="0">
+                <a:solidFill>
+                  <a:srgbClr val="000000"/>
+                </a:solidFill>
+                <a:latin typeface="Arial" pitchFamily="34" charset="0"/>
+                <a:ea typeface="Arial" pitchFamily="34" charset="-122"/>
+                <a:cs typeface="Arial" pitchFamily="34" charset="-120"/>
+              </a:rPr>
+              <a:t>= −10</a:t>
+            </a:r>
+            <a:endParaRPr lang="en-US" sz="1300" dirty="0"/>
+          </a:p>
+        </p:txBody>
+      </p:sp>
+      <p:sp>
+        <p:nvSpPr>
+          <p:cNvPr id="201" name="Text 199"/>
+          <p:cNvSpPr/>
+          <p:nvPr/>
+        </p:nvSpPr>
+        <p:spPr>
+          <a:xfrm>
+            <a:off x="6553200" y="5365750"/>
+            <a:ext cx="203200" cy="228600"/>
+          </a:xfrm>
+          <a:prstGeom prst="rect">
+            <a:avLst/>
+          </a:prstGeom>
+          <a:noFill/>
+          <a:ln/>
+        </p:spPr>
+        <p:txBody>
+          <a:bodyPr wrap="square" lIns="0" tIns="0" rIns="0" bIns="0" rtlCol="0" anchor="ctr"/>
+          <a:lstStyle/>
+          <a:p>
+            <a:pPr algn="l" indent="0" marL="0">
+              <a:lnSpc>
+                <a:spcPts val="1500"/>
+              </a:lnSpc>
+              <a:buNone/>
+            </a:pPr>
+            <a:r>
+              <a:rPr lang="en-US" sz="1300" dirty="0">
+                <a:solidFill>
+                  <a:srgbClr val="000000"/>
+                </a:solidFill>
+                <a:latin typeface="Arial" pitchFamily="34" charset="0"/>
+                <a:ea typeface="Arial" pitchFamily="34" charset="-122"/>
+                <a:cs typeface="Arial" pitchFamily="34" charset="-120"/>
+              </a:rPr>
+              <a:t>⇒</a:t>
+            </a:r>
+            <a:endParaRPr lang="en-US" sz="1300" dirty="0"/>
+          </a:p>
+        </p:txBody>
+      </p:sp>
+      <p:sp>
+        <p:nvSpPr>
           <p:cNvPr id="202" name="Text 200"/>
+          <p:cNvSpPr/>
+          <p:nvPr/>
+        </p:nvSpPr>
+        <p:spPr>
+          <a:xfrm>
+            <a:off x="6794500" y="5365750"/>
+            <a:ext cx="2209800" cy="228600"/>
+          </a:xfrm>
+          <a:prstGeom prst="rect">
+            <a:avLst/>
+          </a:prstGeom>
+          <a:noFill/>
+          <a:ln/>
+        </p:spPr>
+        <p:txBody>
+          <a:bodyPr wrap="square" lIns="0" tIns="0" rIns="0" bIns="0" rtlCol="0" anchor="ctr"/>
+          <a:lstStyle/>
+          <a:p>
+            <a:pPr algn="l" indent="0" marL="0">
+              <a:lnSpc>
+                <a:spcPts val="1500"/>
+              </a:lnSpc>
+              <a:buNone/>
+            </a:pPr>
+            <a:r>
+              <a:rPr lang="en-US" sz="1300" dirty="0">
+                <a:solidFill>
+                  <a:srgbClr val="000000"/>
+                </a:solidFill>
+                <a:latin typeface="Arial" pitchFamily="34" charset="0"/>
+                <a:ea typeface="Arial" pitchFamily="34" charset="-122"/>
+                <a:cs typeface="Arial" pitchFamily="34" charset="-120"/>
+              </a:rPr>
+              <a:t>Keep same </a:t>
+            </a:r>
+            <a:pPr algn="l" indent="0" marL="0">
+              <a:lnSpc>
+                <a:spcPts val="1500"/>
+              </a:lnSpc>
+              <a:buNone/>
+            </a:pPr>
+            <a:r>
+              <a:rPr lang="en-US" sz="1300" u="sng" dirty="0">
+                <a:solidFill>
+                  <a:srgbClr val="000000"/>
+                </a:solidFill>
+                <a:latin typeface="Arial" pitchFamily="34" charset="0"/>
+                <a:ea typeface="Arial" pitchFamily="34" charset="-122"/>
+                <a:cs typeface="Arial" pitchFamily="34" charset="-120"/>
+              </a:rPr>
+              <a:t>W</a:t>
+            </a:r>
+            <a:pPr algn="l" indent="0" marL="0">
+              <a:lnSpc>
+                <a:spcPts val="1500"/>
+              </a:lnSpc>
+              <a:buNone/>
+            </a:pPr>
+            <a:r>
+              <a:rPr lang="en-US" sz="1300" dirty="0">
+                <a:solidFill>
+                  <a:srgbClr val="000000"/>
+                </a:solidFill>
+                <a:latin typeface="Arial" pitchFamily="34" charset="0"/>
+                <a:ea typeface="Arial" pitchFamily="34" charset="-122"/>
+                <a:cs typeface="Arial" pitchFamily="34" charset="-120"/>
+              </a:rPr>
+              <a:t>eight</a:t>
+            </a:r>
+            <a:endParaRPr lang="en-US" sz="1300" dirty="0"/>
+          </a:p>
+        </p:txBody>
+      </p:sp>
+      <p:sp>
+        <p:nvSpPr>
+          <p:cNvPr id="203" name="Text 201"/>
+          <p:cNvSpPr/>
+          <p:nvPr/>
+        </p:nvSpPr>
+        <p:spPr>
+          <a:xfrm>
+            <a:off x="9080500" y="5365750"/>
+            <a:ext cx="342900" cy="228600"/>
+          </a:xfrm>
+          <a:prstGeom prst="rect">
+            <a:avLst/>
+          </a:prstGeom>
+          <a:noFill/>
+          <a:ln/>
+        </p:spPr>
+        <p:txBody>
+          <a:bodyPr wrap="square" lIns="0" tIns="0" rIns="0" bIns="0" rtlCol="0" anchor="ctr"/>
+          <a:lstStyle/>
+          <a:p>
+            <a:pPr algn="l" indent="0" marL="0">
+              <a:lnSpc>
+                <a:spcPts val="1500"/>
+              </a:lnSpc>
+              <a:buNone/>
+            </a:pPr>
+            <a:r>
+              <a:rPr lang="en-US" sz="1300" u="sng" dirty="0">
+                <a:solidFill>
+                  <a:srgbClr val="000000"/>
+                </a:solidFill>
+                <a:latin typeface="Arial" pitchFamily="34" charset="0"/>
+                <a:ea typeface="Arial" pitchFamily="34" charset="-122"/>
+                <a:cs typeface="Arial" pitchFamily="34" charset="-120"/>
+              </a:rPr>
+              <a:t>W</a:t>
+            </a:r>
+            <a:pPr algn="l" indent="0" marL="0">
+              <a:lnSpc>
+                <a:spcPts val="1500"/>
+              </a:lnSpc>
+              <a:buNone/>
+            </a:pPr>
+            <a:r>
+              <a:rPr lang="en-US" sz="1300" dirty="0">
+                <a:solidFill>
+                  <a:srgbClr val="000000"/>
+                </a:solidFill>
+                <a:latin typeface="Arial" pitchFamily="34" charset="0"/>
+                <a:ea typeface="Arial" pitchFamily="34" charset="-122"/>
+                <a:cs typeface="Arial" pitchFamily="34" charset="-120"/>
+              </a:rPr>
+              <a:t> = </a:t>
+            </a:r>
+            <a:endParaRPr lang="en-US" sz="1300" dirty="0"/>
+          </a:p>
+        </p:txBody>
+      </p:sp>
+      <p:sp>
+        <p:nvSpPr>
+          <p:cNvPr id="204" name="Shape 202"/>
+          <p:cNvSpPr/>
+          <p:nvPr/>
+        </p:nvSpPr>
+        <p:spPr>
+          <a:xfrm>
+            <a:off x="9404350" y="5207000"/>
+            <a:ext cx="12700" cy="584200"/>
+          </a:xfrm>
+          <a:prstGeom prst="rect">
+            <a:avLst/>
+          </a:prstGeom>
+          <a:solidFill>
+            <a:srgbClr val="A6A6A6"/>
+          </a:solidFill>
+          <a:ln/>
+        </p:spPr>
+      </p:sp>
+      <p:sp>
+        <p:nvSpPr>
+          <p:cNvPr id="205" name="Shape 203"/>
+          <p:cNvSpPr/>
+          <p:nvPr/>
+        </p:nvSpPr>
+        <p:spPr>
+          <a:xfrm>
+            <a:off x="9709150" y="5207000"/>
+            <a:ext cx="12700" cy="584200"/>
+          </a:xfrm>
+          <a:prstGeom prst="rect">
+            <a:avLst/>
+          </a:prstGeom>
+          <a:solidFill>
+            <a:srgbClr val="A6A6A6"/>
+          </a:solidFill>
+          <a:ln/>
+        </p:spPr>
+      </p:sp>
+      <p:sp>
+        <p:nvSpPr>
+          <p:cNvPr id="206" name="Text 204"/>
+          <p:cNvSpPr/>
+          <p:nvPr/>
+        </p:nvSpPr>
+        <p:spPr>
+          <a:xfrm>
+            <a:off x="9417050" y="5200650"/>
+            <a:ext cx="279400" cy="203200"/>
+          </a:xfrm>
+          <a:prstGeom prst="rect">
+            <a:avLst/>
+          </a:prstGeom>
+          <a:noFill/>
+          <a:ln/>
+        </p:spPr>
+        <p:txBody>
+          <a:bodyPr wrap="square" lIns="0" tIns="0" rIns="0" bIns="0" rtlCol="0" anchor="ctr"/>
+          <a:lstStyle/>
+          <a:p>
+            <a:pPr algn="ctr" indent="0" marL="0">
+              <a:lnSpc>
+                <a:spcPts val="1500"/>
+              </a:lnSpc>
+              <a:buNone/>
+            </a:pPr>
+            <a:r>
+              <a:rPr lang="en-US" sz="1300" dirty="0">
+                <a:solidFill>
+                  <a:srgbClr val="000000"/>
+                </a:solidFill>
+                <a:latin typeface="Arial" pitchFamily="34" charset="0"/>
+                <a:ea typeface="Arial" pitchFamily="34" charset="-122"/>
+                <a:cs typeface="Arial" pitchFamily="34" charset="-120"/>
+              </a:rPr>
+              <a:t>14</a:t>
+            </a:r>
+            <a:endParaRPr lang="en-US" sz="1300" dirty="0"/>
+          </a:p>
+        </p:txBody>
+      </p:sp>
+      <p:sp>
+        <p:nvSpPr>
+          <p:cNvPr id="207" name="Text 205"/>
+          <p:cNvSpPr/>
+          <p:nvPr/>
+        </p:nvSpPr>
+        <p:spPr>
+          <a:xfrm>
+            <a:off x="9417050" y="5397500"/>
+            <a:ext cx="279400" cy="203200"/>
+          </a:xfrm>
+          <a:prstGeom prst="rect">
+            <a:avLst/>
+          </a:prstGeom>
+          <a:noFill/>
+          <a:ln/>
+        </p:spPr>
+        <p:txBody>
+          <a:bodyPr wrap="square" lIns="0" tIns="0" rIns="0" bIns="0" rtlCol="0" anchor="ctr"/>
+          <a:lstStyle/>
+          <a:p>
+            <a:pPr algn="ctr" indent="0" marL="0">
+              <a:lnSpc>
+                <a:spcPts val="1500"/>
+              </a:lnSpc>
+              <a:buNone/>
+            </a:pPr>
+            <a:r>
+              <a:rPr lang="en-US" sz="1300" dirty="0">
+                <a:solidFill>
+                  <a:srgbClr val="000000"/>
+                </a:solidFill>
+                <a:latin typeface="Arial" pitchFamily="34" charset="0"/>
+                <a:ea typeface="Arial" pitchFamily="34" charset="-122"/>
+                <a:cs typeface="Arial" pitchFamily="34" charset="-120"/>
+              </a:rPr>
+              <a:t>−4</a:t>
+            </a:r>
+            <a:endParaRPr lang="en-US" sz="1300" dirty="0"/>
+          </a:p>
+        </p:txBody>
+      </p:sp>
+      <p:sp>
+        <p:nvSpPr>
+          <p:cNvPr id="208" name="Text 206"/>
+          <p:cNvSpPr/>
+          <p:nvPr/>
+        </p:nvSpPr>
+        <p:spPr>
+          <a:xfrm>
+            <a:off x="9417050" y="5594350"/>
+            <a:ext cx="279400" cy="203200"/>
+          </a:xfrm>
+          <a:prstGeom prst="rect">
+            <a:avLst/>
+          </a:prstGeom>
+          <a:noFill/>
+          <a:ln/>
+        </p:spPr>
+        <p:txBody>
+          <a:bodyPr wrap="square" lIns="0" tIns="0" rIns="0" bIns="0" rtlCol="0" anchor="ctr"/>
+          <a:lstStyle/>
+          <a:p>
+            <a:pPr algn="ctr" indent="0" marL="0">
+              <a:lnSpc>
+                <a:spcPts val="1500"/>
+              </a:lnSpc>
+              <a:buNone/>
+            </a:pPr>
+            <a:r>
+              <a:rPr lang="en-US" sz="1300" dirty="0">
+                <a:solidFill>
+                  <a:srgbClr val="000000"/>
+                </a:solidFill>
+                <a:latin typeface="Arial" pitchFamily="34" charset="0"/>
+                <a:ea typeface="Arial" pitchFamily="34" charset="-122"/>
+                <a:cs typeface="Arial" pitchFamily="34" charset="-120"/>
+              </a:rPr>
+              <a:t>0</a:t>
+            </a:r>
+            <a:endParaRPr lang="en-US" sz="1300" dirty="0"/>
+          </a:p>
+        </p:txBody>
+      </p:sp>
+      <p:sp>
+        <p:nvSpPr>
+          <p:cNvPr id="209" name="Text 207"/>
+          <p:cNvSpPr/>
+          <p:nvPr/>
+        </p:nvSpPr>
+        <p:spPr>
+          <a:xfrm>
+            <a:off x="3594100" y="6203950"/>
+            <a:ext cx="635000" cy="228600"/>
+          </a:xfrm>
+          <a:prstGeom prst="rect">
+            <a:avLst/>
+          </a:prstGeom>
+          <a:noFill/>
+          <a:ln/>
+        </p:spPr>
+        <p:txBody>
+          <a:bodyPr wrap="square" lIns="0" tIns="0" rIns="0" bIns="0" rtlCol="0" anchor="ctr"/>
+          <a:lstStyle/>
+          <a:p>
+            <a:pPr algn="l" indent="0" marL="0">
+              <a:lnSpc>
+                <a:spcPts val="1500"/>
+              </a:lnSpc>
+              <a:buNone/>
+            </a:pPr>
+            <a:r>
+              <a:rPr lang="en-US" sz="1300" dirty="0">
+                <a:solidFill>
+                  <a:srgbClr val="000000"/>
+                </a:solidFill>
+                <a:latin typeface="Arial" pitchFamily="34" charset="0"/>
+                <a:ea typeface="Arial" pitchFamily="34" charset="-122"/>
+                <a:cs typeface="Arial" pitchFamily="34" charset="-120"/>
+              </a:rPr>
+              <a:t>d(</a:t>
+            </a:r>
+            <a:pPr algn="l" indent="0" marL="0">
+              <a:lnSpc>
+                <a:spcPts val="1500"/>
+              </a:lnSpc>
+              <a:buNone/>
+            </a:pPr>
+            <a:r>
+              <a:rPr lang="en-US" sz="1300" dirty="0">
+                <a:solidFill>
+                  <a:srgbClr val="000000"/>
+                </a:solidFill>
+                <a:latin typeface="Arial" pitchFamily="34" charset="0"/>
+                <a:ea typeface="Arial" pitchFamily="34" charset="-122"/>
+                <a:cs typeface="Arial" pitchFamily="34" charset="-120"/>
+              </a:rPr>
+              <a:t>x</a:t>
+            </a:r>
+            <a:pPr algn="l" indent="0" marL="0">
+              <a:lnSpc>
+                <a:spcPts val="1500"/>
+              </a:lnSpc>
+              <a:buNone/>
+            </a:pPr>
+            <a:r>
+              <a:rPr lang="en-US" sz="950" baseline="-40000" dirty="0">
+                <a:solidFill>
+                  <a:srgbClr val="000000"/>
+                </a:solidFill>
+                <a:latin typeface="Arial" pitchFamily="34" charset="0"/>
+                <a:ea typeface="Arial" pitchFamily="34" charset="-122"/>
+                <a:cs typeface="Arial" pitchFamily="34" charset="-120"/>
+              </a:rPr>
+              <a:t>6</a:t>
+            </a:r>
+            <a:pPr algn="l" indent="0" marL="0">
+              <a:lnSpc>
+                <a:spcPts val="1500"/>
+              </a:lnSpc>
+              <a:buNone/>
+            </a:pPr>
+            <a:r>
+              <a:rPr lang="en-US" sz="1300" dirty="0">
+                <a:solidFill>
+                  <a:srgbClr val="000000"/>
+                </a:solidFill>
+                <a:latin typeface="Arial" pitchFamily="34" charset="0"/>
+                <a:ea typeface="Arial" pitchFamily="34" charset="-122"/>
+                <a:cs typeface="Arial" pitchFamily="34" charset="-120"/>
+              </a:rPr>
+              <a:t>)</a:t>
+            </a:r>
+            <a:pPr algn="l" indent="0" marL="0">
+              <a:lnSpc>
+                <a:spcPts val="1500"/>
+              </a:lnSpc>
+              <a:buNone/>
+            </a:pPr>
+            <a:r>
+              <a:rPr lang="en-US" sz="1300" dirty="0">
+                <a:solidFill>
+                  <a:srgbClr val="000000"/>
+                </a:solidFill>
+                <a:latin typeface="Arial" pitchFamily="34" charset="0"/>
+                <a:ea typeface="Arial" pitchFamily="34" charset="-122"/>
+                <a:cs typeface="Arial" pitchFamily="34" charset="-120"/>
+              </a:rPr>
+              <a:t> = </a:t>
+            </a:r>
+            <a:endParaRPr lang="en-US" sz="1300" dirty="0"/>
+          </a:p>
+        </p:txBody>
+      </p:sp>
+      <p:sp>
+        <p:nvSpPr>
+          <p:cNvPr id="210" name="Text 208"/>
+          <p:cNvSpPr/>
+          <p:nvPr/>
+        </p:nvSpPr>
+        <p:spPr>
+          <a:xfrm>
+            <a:off x="4187190" y="6041390"/>
+            <a:ext cx="127000" cy="190500"/>
+          </a:xfrm>
+          <a:prstGeom prst="rect">
+            <a:avLst/>
+          </a:prstGeom>
+          <a:noFill/>
+          <a:ln/>
+        </p:spPr>
+        <p:txBody>
+          <a:bodyPr wrap="square" lIns="0" tIns="0" rIns="0" bIns="0" rtlCol="0" anchor="ctr"/>
+          <a:lstStyle/>
+          <a:p>
+            <a:pPr algn="ctr" indent="0" marL="0">
+              <a:lnSpc>
+                <a:spcPts val="1500"/>
+              </a:lnSpc>
+              <a:buNone/>
+            </a:pPr>
+            <a:r>
+              <a:rPr lang="en-US" sz="1300" dirty="0">
+                <a:solidFill>
+                  <a:srgbClr val="0000FF"/>
+                </a:solidFill>
+                <a:latin typeface="Arial" pitchFamily="34" charset="0"/>
+                <a:ea typeface="Arial" pitchFamily="34" charset="-122"/>
+                <a:cs typeface="Arial" pitchFamily="34" charset="-120"/>
+              </a:rPr>
+              <a:t>1</a:t>
+            </a:r>
+            <a:endParaRPr lang="en-US" sz="1300" dirty="0"/>
+          </a:p>
+        </p:txBody>
+      </p:sp>
+      <p:sp>
+        <p:nvSpPr>
+          <p:cNvPr id="211" name="Text 209"/>
+          <p:cNvSpPr/>
+          <p:nvPr/>
+        </p:nvSpPr>
+        <p:spPr>
+          <a:xfrm>
+            <a:off x="4414520" y="6041390"/>
+            <a:ext cx="127000" cy="190500"/>
+          </a:xfrm>
+          <a:prstGeom prst="rect">
+            <a:avLst/>
+          </a:prstGeom>
+          <a:noFill/>
+          <a:ln/>
+        </p:spPr>
+        <p:txBody>
+          <a:bodyPr wrap="square" lIns="0" tIns="0" rIns="0" bIns="0" rtlCol="0" anchor="ctr"/>
+          <a:lstStyle/>
+          <a:p>
+            <a:pPr algn="ctr" indent="0" marL="0">
+              <a:lnSpc>
+                <a:spcPts val="1500"/>
+              </a:lnSpc>
+              <a:buNone/>
+            </a:pPr>
+            <a:r>
+              <a:rPr lang="en-US" sz="1300" dirty="0">
+                <a:solidFill>
+                  <a:srgbClr val="0000FF"/>
+                </a:solidFill>
+                <a:latin typeface="Arial" pitchFamily="34" charset="0"/>
+                <a:ea typeface="Arial" pitchFamily="34" charset="-122"/>
+                <a:cs typeface="Arial" pitchFamily="34" charset="-120"/>
+              </a:rPr>
+              <a:t>6</a:t>
+            </a:r>
+            <a:endParaRPr lang="en-US" sz="1300" dirty="0"/>
+          </a:p>
+        </p:txBody>
+      </p:sp>
+      <p:sp>
+        <p:nvSpPr>
+          <p:cNvPr id="212" name="Text 210"/>
+          <p:cNvSpPr/>
+          <p:nvPr/>
+        </p:nvSpPr>
+        <p:spPr>
+          <a:xfrm>
+            <a:off x="4644390" y="6041390"/>
+            <a:ext cx="127000" cy="190500"/>
+          </a:xfrm>
+          <a:prstGeom prst="rect">
+            <a:avLst/>
+          </a:prstGeom>
+          <a:noFill/>
+          <a:ln/>
+        </p:spPr>
+        <p:txBody>
+          <a:bodyPr wrap="square" lIns="0" tIns="0" rIns="0" bIns="0" rtlCol="0" anchor="ctr"/>
+          <a:lstStyle/>
+          <a:p>
+            <a:pPr algn="ctr" indent="0" marL="0">
+              <a:lnSpc>
+                <a:spcPts val="1500"/>
+              </a:lnSpc>
+              <a:buNone/>
+            </a:pPr>
+            <a:r>
+              <a:rPr lang="en-US" sz="1300" dirty="0">
+                <a:solidFill>
+                  <a:srgbClr val="0000FF"/>
+                </a:solidFill>
+                <a:latin typeface="Arial" pitchFamily="34" charset="0"/>
+                <a:ea typeface="Arial" pitchFamily="34" charset="-122"/>
+                <a:cs typeface="Arial" pitchFamily="34" charset="-120"/>
+              </a:rPr>
+              <a:t>6</a:t>
+            </a:r>
+            <a:endParaRPr lang="en-US" sz="1300" dirty="0"/>
+          </a:p>
+        </p:txBody>
+      </p:sp>
+      <p:sp>
+        <p:nvSpPr>
+          <p:cNvPr id="213" name="Shape 211"/>
+          <p:cNvSpPr/>
+          <p:nvPr/>
+        </p:nvSpPr>
+        <p:spPr>
+          <a:xfrm>
+            <a:off x="4178300" y="6057900"/>
+            <a:ext cx="12700" cy="165100"/>
+          </a:xfrm>
+          <a:prstGeom prst="rect">
+            <a:avLst/>
+          </a:prstGeom>
+          <a:solidFill>
+            <a:srgbClr val="A6A6A6"/>
+          </a:solidFill>
+          <a:ln/>
+        </p:spPr>
+      </p:sp>
+      <p:sp>
+        <p:nvSpPr>
+          <p:cNvPr id="214" name="Shape 212"/>
+          <p:cNvSpPr/>
+          <p:nvPr/>
+        </p:nvSpPr>
+        <p:spPr>
+          <a:xfrm>
+            <a:off x="4762500" y="6070600"/>
+            <a:ext cx="12700" cy="152400"/>
+          </a:xfrm>
+          <a:prstGeom prst="rect">
+            <a:avLst/>
+          </a:prstGeom>
+          <a:solidFill>
+            <a:srgbClr val="A6A6A6"/>
+          </a:solidFill>
+          <a:ln/>
+        </p:spPr>
+      </p:sp>
+      <p:sp>
+        <p:nvSpPr>
+          <p:cNvPr id="215" name="Shape 213"/>
+          <p:cNvSpPr/>
+          <p:nvPr/>
+        </p:nvSpPr>
+        <p:spPr>
+          <a:xfrm>
+            <a:off x="4819650" y="6045200"/>
+            <a:ext cx="12700" cy="584200"/>
+          </a:xfrm>
+          <a:prstGeom prst="rect">
+            <a:avLst/>
+          </a:prstGeom>
+          <a:solidFill>
+            <a:srgbClr val="A6A6A6"/>
+          </a:solidFill>
+          <a:ln/>
+        </p:spPr>
+      </p:sp>
+      <p:sp>
+        <p:nvSpPr>
+          <p:cNvPr id="216" name="Shape 214"/>
+          <p:cNvSpPr/>
+          <p:nvPr/>
+        </p:nvSpPr>
+        <p:spPr>
+          <a:xfrm>
+            <a:off x="5124450" y="6045200"/>
+            <a:ext cx="12700" cy="584200"/>
+          </a:xfrm>
+          <a:prstGeom prst="rect">
+            <a:avLst/>
+          </a:prstGeom>
+          <a:solidFill>
+            <a:srgbClr val="A6A6A6"/>
+          </a:solidFill>
+          <a:ln/>
+        </p:spPr>
+      </p:sp>
+      <p:sp>
+        <p:nvSpPr>
+          <p:cNvPr id="217" name="Text 215"/>
+          <p:cNvSpPr/>
+          <p:nvPr/>
+        </p:nvSpPr>
+        <p:spPr>
+          <a:xfrm>
+            <a:off x="4832350" y="6038850"/>
+            <a:ext cx="279400" cy="203200"/>
+          </a:xfrm>
+          <a:prstGeom prst="rect">
+            <a:avLst/>
+          </a:prstGeom>
+          <a:noFill/>
+          <a:ln/>
+        </p:spPr>
+        <p:txBody>
+          <a:bodyPr wrap="square" lIns="0" tIns="0" rIns="0" bIns="0" rtlCol="0" anchor="ctr"/>
+          <a:lstStyle/>
+          <a:p>
+            <a:pPr algn="ctr" indent="0" marL="0">
+              <a:lnSpc>
+                <a:spcPts val="1500"/>
+              </a:lnSpc>
+              <a:buNone/>
+            </a:pPr>
+            <a:r>
+              <a:rPr lang="en-US" sz="1300" dirty="0">
+                <a:solidFill>
+                  <a:srgbClr val="008000"/>
+                </a:solidFill>
+                <a:latin typeface="Arial" pitchFamily="34" charset="0"/>
+                <a:ea typeface="Arial" pitchFamily="34" charset="-122"/>
+                <a:cs typeface="Arial" pitchFamily="34" charset="-120"/>
+              </a:rPr>
+              <a:t>14</a:t>
+            </a:r>
+            <a:endParaRPr lang="en-US" sz="1300" dirty="0"/>
+          </a:p>
+        </p:txBody>
+      </p:sp>
+      <p:sp>
+        <p:nvSpPr>
+          <p:cNvPr id="218" name="Text 216"/>
+          <p:cNvSpPr/>
+          <p:nvPr/>
+        </p:nvSpPr>
+        <p:spPr>
+          <a:xfrm>
+            <a:off x="4832350" y="6235700"/>
+            <a:ext cx="279400" cy="203200"/>
+          </a:xfrm>
+          <a:prstGeom prst="rect">
+            <a:avLst/>
+          </a:prstGeom>
+          <a:noFill/>
+          <a:ln/>
+        </p:spPr>
+        <p:txBody>
+          <a:bodyPr wrap="square" lIns="0" tIns="0" rIns="0" bIns="0" rtlCol="0" anchor="ctr"/>
+          <a:lstStyle/>
+          <a:p>
+            <a:pPr algn="ctr" indent="0" marL="0">
+              <a:lnSpc>
+                <a:spcPts val="1500"/>
+              </a:lnSpc>
+              <a:buNone/>
+            </a:pPr>
+            <a:r>
+              <a:rPr lang="en-US" sz="1300" dirty="0">
+                <a:solidFill>
+                  <a:srgbClr val="008000"/>
+                </a:solidFill>
+                <a:latin typeface="Arial" pitchFamily="34" charset="0"/>
+                <a:ea typeface="Arial" pitchFamily="34" charset="-122"/>
+                <a:cs typeface="Arial" pitchFamily="34" charset="-120"/>
+              </a:rPr>
+              <a:t>−4</a:t>
+            </a:r>
+            <a:endParaRPr lang="en-US" sz="1300" dirty="0"/>
+          </a:p>
+        </p:txBody>
+      </p:sp>
+      <p:sp>
+        <p:nvSpPr>
+          <p:cNvPr id="219" name="Text 217"/>
+          <p:cNvSpPr/>
+          <p:nvPr/>
+        </p:nvSpPr>
+        <p:spPr>
+          <a:xfrm>
+            <a:off x="4832350" y="6432550"/>
+            <a:ext cx="279400" cy="203200"/>
+          </a:xfrm>
+          <a:prstGeom prst="rect">
+            <a:avLst/>
+          </a:prstGeom>
+          <a:noFill/>
+          <a:ln/>
+        </p:spPr>
+        <p:txBody>
+          <a:bodyPr wrap="square" lIns="0" tIns="0" rIns="0" bIns="0" rtlCol="0" anchor="ctr"/>
+          <a:lstStyle/>
+          <a:p>
+            <a:pPr algn="ctr" indent="0" marL="0">
+              <a:lnSpc>
+                <a:spcPts val="1500"/>
+              </a:lnSpc>
+              <a:buNone/>
+            </a:pPr>
+            <a:r>
+              <a:rPr lang="en-US" sz="1300" dirty="0">
+                <a:solidFill>
+                  <a:srgbClr val="008000"/>
+                </a:solidFill>
+                <a:latin typeface="Arial" pitchFamily="34" charset="0"/>
+                <a:ea typeface="Arial" pitchFamily="34" charset="-122"/>
+                <a:cs typeface="Arial" pitchFamily="34" charset="-120"/>
+              </a:rPr>
+              <a:t>0</a:t>
+            </a:r>
+            <a:endParaRPr lang="en-US" sz="1300" dirty="0"/>
+          </a:p>
+        </p:txBody>
+      </p:sp>
+      <p:sp>
+        <p:nvSpPr>
+          <p:cNvPr id="220" name="Text 218"/>
+          <p:cNvSpPr/>
+          <p:nvPr/>
+        </p:nvSpPr>
+        <p:spPr>
+          <a:xfrm>
+            <a:off x="5219700" y="6203950"/>
+            <a:ext cx="736600" cy="228600"/>
+          </a:xfrm>
+          <a:prstGeom prst="rect">
+            <a:avLst/>
+          </a:prstGeom>
+          <a:noFill/>
+          <a:ln/>
+        </p:spPr>
+        <p:txBody>
+          <a:bodyPr wrap="square" lIns="0" tIns="0" rIns="0" bIns="0" rtlCol="0" anchor="ctr"/>
+          <a:lstStyle/>
+          <a:p>
+            <a:pPr algn="l" indent="0" marL="0">
+              <a:lnSpc>
+                <a:spcPts val="1500"/>
+              </a:lnSpc>
+              <a:buNone/>
+            </a:pPr>
+            <a:r>
+              <a:rPr lang="en-US" sz="1300" dirty="0">
+                <a:solidFill>
+                  <a:srgbClr val="000000"/>
+                </a:solidFill>
+                <a:latin typeface="Arial" pitchFamily="34" charset="0"/>
+                <a:ea typeface="Arial" pitchFamily="34" charset="-122"/>
+                <a:cs typeface="Arial" pitchFamily="34" charset="-120"/>
+              </a:rPr>
+              <a:t>= −112</a:t>
+            </a:r>
+            <a:endParaRPr lang="en-US" sz="1300" dirty="0"/>
+          </a:p>
+        </p:txBody>
+      </p:sp>
+      <p:sp>
+        <p:nvSpPr>
+          <p:cNvPr id="221" name="Text 219"/>
+          <p:cNvSpPr/>
+          <p:nvPr/>
+        </p:nvSpPr>
+        <p:spPr>
+          <a:xfrm>
+            <a:off x="6629400" y="6203950"/>
+            <a:ext cx="203200" cy="228600"/>
+          </a:xfrm>
+          <a:prstGeom prst="rect">
+            <a:avLst/>
+          </a:prstGeom>
+          <a:noFill/>
+          <a:ln/>
+        </p:spPr>
+        <p:txBody>
+          <a:bodyPr wrap="square" lIns="0" tIns="0" rIns="0" bIns="0" rtlCol="0" anchor="ctr"/>
+          <a:lstStyle/>
+          <a:p>
+            <a:pPr algn="l" indent="0" marL="0">
+              <a:lnSpc>
+                <a:spcPts val="1500"/>
+              </a:lnSpc>
+              <a:buNone/>
+            </a:pPr>
+            <a:r>
+              <a:rPr lang="en-US" sz="1300" dirty="0">
+                <a:solidFill>
+                  <a:srgbClr val="000000"/>
+                </a:solidFill>
+                <a:latin typeface="Arial" pitchFamily="34" charset="0"/>
+                <a:ea typeface="Arial" pitchFamily="34" charset="-122"/>
+                <a:cs typeface="Arial" pitchFamily="34" charset="-120"/>
+              </a:rPr>
+              <a:t>⇒</a:t>
+            </a:r>
+            <a:endParaRPr lang="en-US" sz="1300" dirty="0"/>
+          </a:p>
+        </p:txBody>
+      </p:sp>
+      <p:sp>
+        <p:nvSpPr>
+          <p:cNvPr id="222" name="Text 220"/>
+          <p:cNvSpPr/>
+          <p:nvPr/>
+        </p:nvSpPr>
+        <p:spPr>
+          <a:xfrm>
+            <a:off x="6870700" y="6203950"/>
+            <a:ext cx="2209800" cy="228600"/>
+          </a:xfrm>
+          <a:prstGeom prst="rect">
+            <a:avLst/>
+          </a:prstGeom>
+          <a:noFill/>
+          <a:ln/>
+        </p:spPr>
+        <p:txBody>
+          <a:bodyPr wrap="square" lIns="0" tIns="0" rIns="0" bIns="0" rtlCol="0" anchor="ctr"/>
+          <a:lstStyle/>
+          <a:p>
+            <a:pPr algn="l" indent="0" marL="0">
+              <a:lnSpc>
+                <a:spcPts val="1500"/>
+              </a:lnSpc>
+              <a:buNone/>
+            </a:pPr>
+            <a:r>
+              <a:rPr lang="en-US" sz="1300" dirty="0">
+                <a:solidFill>
+                  <a:srgbClr val="000000"/>
+                </a:solidFill>
+                <a:latin typeface="Arial" pitchFamily="34" charset="0"/>
+                <a:ea typeface="Arial" pitchFamily="34" charset="-122"/>
+                <a:cs typeface="Arial" pitchFamily="34" charset="-120"/>
+              </a:rPr>
+              <a:t>Keep same </a:t>
+            </a:r>
+            <a:pPr algn="l" indent="0" marL="0">
+              <a:lnSpc>
+                <a:spcPts val="1500"/>
+              </a:lnSpc>
+              <a:buNone/>
+            </a:pPr>
+            <a:r>
+              <a:rPr lang="en-US" sz="1300" u="sng" dirty="0">
+                <a:solidFill>
+                  <a:srgbClr val="000000"/>
+                </a:solidFill>
+                <a:latin typeface="Arial" pitchFamily="34" charset="0"/>
+                <a:ea typeface="Arial" pitchFamily="34" charset="-122"/>
+                <a:cs typeface="Arial" pitchFamily="34" charset="-120"/>
+              </a:rPr>
+              <a:t>W</a:t>
+            </a:r>
+            <a:pPr algn="l" indent="0" marL="0">
+              <a:lnSpc>
+                <a:spcPts val="1500"/>
+              </a:lnSpc>
+              <a:buNone/>
+            </a:pPr>
+            <a:r>
+              <a:rPr lang="en-US" sz="1300" dirty="0">
+                <a:solidFill>
+                  <a:srgbClr val="000000"/>
+                </a:solidFill>
+                <a:latin typeface="Arial" pitchFamily="34" charset="0"/>
+                <a:ea typeface="Arial" pitchFamily="34" charset="-122"/>
+                <a:cs typeface="Arial" pitchFamily="34" charset="-120"/>
+              </a:rPr>
+              <a:t>eight</a:t>
+            </a:r>
+            <a:endParaRPr lang="en-US" sz="1300" dirty="0"/>
+          </a:p>
+        </p:txBody>
+      </p:sp>
+      <p:sp>
+        <p:nvSpPr>
+          <p:cNvPr id="223" name="Text 221"/>
+          <p:cNvSpPr/>
+          <p:nvPr/>
+        </p:nvSpPr>
+        <p:spPr>
+          <a:xfrm>
+            <a:off x="9156700" y="6203950"/>
+            <a:ext cx="342900" cy="228600"/>
+          </a:xfrm>
+          <a:prstGeom prst="rect">
+            <a:avLst/>
+          </a:prstGeom>
+          <a:noFill/>
+          <a:ln/>
+        </p:spPr>
+        <p:txBody>
+          <a:bodyPr wrap="square" lIns="0" tIns="0" rIns="0" bIns="0" rtlCol="0" anchor="ctr"/>
+          <a:lstStyle/>
+          <a:p>
+            <a:pPr algn="l" indent="0" marL="0">
+              <a:lnSpc>
+                <a:spcPts val="1500"/>
+              </a:lnSpc>
+              <a:buNone/>
+            </a:pPr>
+            <a:r>
+              <a:rPr lang="en-US" sz="1300" u="sng" dirty="0">
+                <a:solidFill>
+                  <a:srgbClr val="000000"/>
+                </a:solidFill>
+                <a:latin typeface="Arial" pitchFamily="34" charset="0"/>
+                <a:ea typeface="Arial" pitchFamily="34" charset="-122"/>
+                <a:cs typeface="Arial" pitchFamily="34" charset="-120"/>
+              </a:rPr>
+              <a:t>W</a:t>
+            </a:r>
+            <a:pPr algn="l" indent="0" marL="0">
+              <a:lnSpc>
+                <a:spcPts val="1500"/>
+              </a:lnSpc>
+              <a:buNone/>
+            </a:pPr>
+            <a:r>
+              <a:rPr lang="en-US" sz="1300" dirty="0">
+                <a:solidFill>
+                  <a:srgbClr val="000000"/>
+                </a:solidFill>
+                <a:latin typeface="Arial" pitchFamily="34" charset="0"/>
+                <a:ea typeface="Arial" pitchFamily="34" charset="-122"/>
+                <a:cs typeface="Arial" pitchFamily="34" charset="-120"/>
+              </a:rPr>
+              <a:t> = </a:t>
+            </a:r>
+            <a:endParaRPr lang="en-US" sz="1300" dirty="0"/>
+          </a:p>
+        </p:txBody>
+      </p:sp>
+      <p:sp>
+        <p:nvSpPr>
+          <p:cNvPr id="224" name="Shape 222"/>
+          <p:cNvSpPr/>
+          <p:nvPr/>
+        </p:nvSpPr>
+        <p:spPr>
+          <a:xfrm>
+            <a:off x="9474200" y="6045200"/>
+            <a:ext cx="12700" cy="584200"/>
+          </a:xfrm>
+          <a:prstGeom prst="rect">
+            <a:avLst/>
+          </a:prstGeom>
+          <a:solidFill>
+            <a:srgbClr val="A6A6A6"/>
+          </a:solidFill>
+          <a:ln/>
+        </p:spPr>
+      </p:sp>
+      <p:sp>
+        <p:nvSpPr>
+          <p:cNvPr id="225" name="Shape 223"/>
+          <p:cNvSpPr/>
+          <p:nvPr/>
+        </p:nvSpPr>
+        <p:spPr>
+          <a:xfrm>
+            <a:off x="9779000" y="6045200"/>
+            <a:ext cx="12700" cy="584200"/>
+          </a:xfrm>
+          <a:prstGeom prst="rect">
+            <a:avLst/>
+          </a:prstGeom>
+          <a:solidFill>
+            <a:srgbClr val="A6A6A6"/>
+          </a:solidFill>
+          <a:ln/>
+        </p:spPr>
+      </p:sp>
+      <p:sp>
+        <p:nvSpPr>
+          <p:cNvPr id="226" name="Text 224"/>
           <p:cNvSpPr/>
           <p:nvPr/>
         </p:nvSpPr>
@@ -9552,7 +10305,7 @@
       </p:sp>
       <p:sp>
         <p:nvSpPr>
-          <p:cNvPr id="203" name="Text 201"/>
+          <p:cNvPr id="227" name="Text 225"/>
           <p:cNvSpPr/>
           <p:nvPr/>
         </p:nvSpPr>
@@ -9594,7 +10347,7 @@
       </p:sp>
       <p:sp>
         <p:nvSpPr>
-          <p:cNvPr id="204" name="Text 202"/>
+          <p:cNvPr id="228" name="Text 226"/>
           <p:cNvSpPr/>
           <p:nvPr/>
         </p:nvSpPr>
